--- a/Seasonal_Agriculture_Performance_Analysis_Presentation.pptx
+++ b/Seasonal_Agriculture_Performance_Analysis_Presentation.pptx
@@ -2041,7 +2041,7 @@
         <p:spPr>
           <a:xfrm>
             <a:off x="0" y="0"/>
-            <a:ext cx="9144000" cy="457200"/>
+            <a:ext cx="9144000" cy="411480"/>
           </a:xfrm>
           <a:prstGeom prst="rect">
             <a:avLst/>
@@ -2060,8 +2060,8 @@
         </p:nvSpPr>
         <p:spPr>
           <a:xfrm>
-            <a:off x="731520" y="91440"/>
-            <a:ext cx="10515600" cy="320040"/>
+            <a:off x="731520" y="73152"/>
+            <a:ext cx="10515600" cy="274320"/>
           </a:xfrm>
           <a:prstGeom prst="rect">
             <a:avLst/>
@@ -2077,14 +2077,14 @@
               <a:buNone/>
             </a:pPr>
             <a:r>
-              <a:rPr lang="en-US" sz="1300" b="1" dirty="0">
+              <a:rPr lang="en-US" sz="1250" b="1" dirty="0">
                 <a:solidFill>
                   <a:srgbClr val="FFFFFF"/>
                 </a:solidFill>
               </a:rPr>
               <a:t>VOIS AICTE Internship Batch 1 (2026-2027) Major Project</a:t>
             </a:r>
-            <a:endParaRPr lang="en-US" sz="1300" dirty="0"/>
+            <a:endParaRPr lang="en-US" sz="1250" dirty="0"/>
           </a:p>
         </p:txBody>
       </p:sp>
@@ -2096,7 +2096,7 @@
         </p:nvSpPr>
         <p:spPr>
           <a:xfrm>
-            <a:off x="731520" y="1463040"/>
+            <a:off x="731520" y="1280160"/>
             <a:ext cx="10698480" cy="1005840"/>
           </a:xfrm>
           <a:prstGeom prst="rect">
@@ -2132,7 +2132,7 @@
         </p:nvSpPr>
         <p:spPr>
           <a:xfrm>
-            <a:off x="914400" y="2560320"/>
+            <a:off x="914400" y="2331720"/>
             <a:ext cx="10332720" cy="457200"/>
           </a:xfrm>
           <a:prstGeom prst="rect">
@@ -2168,8 +2168,8 @@
         </p:nvSpPr>
         <p:spPr>
           <a:xfrm>
-            <a:off x="2011680" y="3291840"/>
-            <a:ext cx="8138160" cy="2651760"/>
+            <a:off x="2011680" y="3108960"/>
+            <a:ext cx="8138160" cy="2743200"/>
           </a:xfrm>
           <a:prstGeom prst="rect">
             <a:avLst/>
@@ -2376,7 +2376,7 @@
         <p:spPr>
           <a:xfrm>
             <a:off x="0" y="0"/>
-            <a:ext cx="9144000" cy="914400"/>
+            <a:ext cx="9144000" cy="822960"/>
           </a:xfrm>
           <a:prstGeom prst="rect">
             <a:avLst/>
@@ -2395,8 +2395,8 @@
         </p:nvSpPr>
         <p:spPr>
           <a:xfrm>
-            <a:off x="731520" y="137160"/>
-            <a:ext cx="9144000" cy="640080"/>
+            <a:off x="731520" y="109728"/>
+            <a:ext cx="8686800" cy="594360"/>
           </a:xfrm>
           <a:prstGeom prst="rect">
             <a:avLst/>
@@ -2412,14 +2412,14 @@
               <a:buNone/>
             </a:pPr>
             <a:r>
-              <a:rPr lang="en-US" sz="2400" b="1" dirty="0">
+              <a:rPr lang="en-US" sz="2200" b="1" dirty="0">
                 <a:solidFill>
                   <a:srgbClr val="FFFFFF"/>
                 </a:solidFill>
               </a:rPr>
-              <a:t>Results: Formal Statistical Hypothesis Testing</a:t>
-            </a:r>
-            <a:endParaRPr lang="en-US" sz="2400" dirty="0"/>
+              <a:t>RESULTS: Formal Statistical Hypothesis Testing</a:t>
+            </a:r>
+            <a:endParaRPr lang="en-US" sz="2200" dirty="0"/>
           </a:p>
         </p:txBody>
       </p:sp>
@@ -2431,8 +2431,8 @@
         </p:nvSpPr>
         <p:spPr>
           <a:xfrm>
-            <a:off x="8686800" y="228600"/>
-            <a:ext cx="2926080" cy="457200"/>
+            <a:off x="8412480" y="182880"/>
+            <a:ext cx="3200400" cy="411480"/>
           </a:xfrm>
           <a:prstGeom prst="rect">
             <a:avLst/>
@@ -2453,7 +2453,7 @@
                   <a:srgbClr val="BBDEFB"/>
                 </a:solidFill>
               </a:rPr>
-              <a:t>Slide 10 of 14</a:t>
+              <a:t>Slide 10 of 14 [Statistical Proof]</a:t>
             </a:r>
             <a:endParaRPr lang="en-US" sz="1100" dirty="0"/>
           </a:p>
@@ -2467,8 +2467,8 @@
         </p:nvSpPr>
         <p:spPr>
           <a:xfrm>
-            <a:off x="731520" y="1097280"/>
-            <a:ext cx="10698480" cy="731520"/>
+            <a:off x="731520" y="1051560"/>
+            <a:ext cx="10698480" cy="685800"/>
           </a:xfrm>
           <a:prstGeom prst="rect">
             <a:avLst/>
@@ -2536,7 +2536,7 @@
           </p:nvPr>
         </p:nvGraphicFramePr>
         <p:xfrm>
-          <a:off x="731520" y="1920240"/>
+          <a:off x="731520" y="1828800"/>
           <a:ext cx="10698480" cy="2834640"/>
         </p:xfrm>
         <a:graphic>
@@ -4621,8 +4621,8 @@
         </p:nvSpPr>
         <p:spPr>
           <a:xfrm>
-            <a:off x="731520" y="4937760"/>
-            <a:ext cx="10698480" cy="1371600"/>
+            <a:off x="731520" y="4846320"/>
+            <a:ext cx="10698480" cy="1463040"/>
           </a:xfrm>
           <a:prstGeom prst="rect">
             <a:avLst/>
@@ -4655,7 +4655,19 @@
                   <a:srgbClr val="222222"/>
                 </a:solidFill>
               </a:rPr>
-              <a:t>• While overall yield variance across all combined crops is dominated by sugarcane biomass, evaluating crops individually proves that seasonal decline (Kharif &gt; Rabi &gt; Zaid) is overwhelmingly statistically significant across all staples.</a:t>
+              <a:t>• While overall yield variance across all combined crops is dominated by sugarcane biomass, evaluating crops individually proves that seasonal decline (Kharif &gt; Rabi &gt; Zaid) is overwhelmingly statistically significant across all staples.
+</a:t>
+            </a:r>
+            <a:pPr indent="0" marL="0">
+              <a:buNone/>
+            </a:pPr>
+            <a:r>
+              <a:rPr lang="en-US" sz="1200" b="1" dirty="0">
+                <a:solidFill>
+                  <a:srgbClr val="222222"/>
+                </a:solidFill>
+              </a:rPr>
+              <a:t>• Both parametric (One-Way ANOVA) and non-parametric (Kruskal-Wallis) tests confirm that seasonal variations dictate crop yields, farm water requirements, and financial returns with &gt;99.9% statistical confidence.</a:t>
             </a:r>
             <a:endParaRPr lang="en-US" sz="1300" dirty="0"/>
           </a:p>
@@ -4702,7 +4714,7 @@
         <p:spPr>
           <a:xfrm>
             <a:off x="0" y="0"/>
-            <a:ext cx="9144000" cy="914400"/>
+            <a:ext cx="9144000" cy="822960"/>
           </a:xfrm>
           <a:prstGeom prst="rect">
             <a:avLst/>
@@ -4721,8 +4733,8 @@
         </p:nvSpPr>
         <p:spPr>
           <a:xfrm>
-            <a:off x="731520" y="137160"/>
-            <a:ext cx="9144000" cy="640080"/>
+            <a:off x="731520" y="109728"/>
+            <a:ext cx="8686800" cy="594360"/>
           </a:xfrm>
           <a:prstGeom prst="rect">
             <a:avLst/>
@@ -4738,14 +4750,14 @@
               <a:buNone/>
             </a:pPr>
             <a:r>
-              <a:rPr lang="en-US" sz="2400" b="1" dirty="0">
+              <a:rPr lang="en-US" sz="2200" b="1" dirty="0">
                 <a:solidFill>
                   <a:srgbClr val="FFFFFF"/>
                 </a:solidFill>
               </a:rPr>
               <a:t>Future Scope &amp; Technological Enhancements</a:t>
             </a:r>
-            <a:endParaRPr lang="en-US" sz="2400" dirty="0"/>
+            <a:endParaRPr lang="en-US" sz="2200" dirty="0"/>
           </a:p>
         </p:txBody>
       </p:sp>
@@ -4757,8 +4769,8 @@
         </p:nvSpPr>
         <p:spPr>
           <a:xfrm>
-            <a:off x="8686800" y="228600"/>
-            <a:ext cx="2926080" cy="457200"/>
+            <a:off x="8412480" y="182880"/>
+            <a:ext cx="3200400" cy="411480"/>
           </a:xfrm>
           <a:prstGeom prst="rect">
             <a:avLst/>
@@ -5214,7 +5226,7 @@
         <p:spPr>
           <a:xfrm>
             <a:off x="0" y="0"/>
-            <a:ext cx="9144000" cy="914400"/>
+            <a:ext cx="9144000" cy="822960"/>
           </a:xfrm>
           <a:prstGeom prst="rect">
             <a:avLst/>
@@ -5233,8 +5245,8 @@
         </p:nvSpPr>
         <p:spPr>
           <a:xfrm>
-            <a:off x="731520" y="137160"/>
-            <a:ext cx="9144000" cy="640080"/>
+            <a:off x="731520" y="109728"/>
+            <a:ext cx="8686800" cy="594360"/>
           </a:xfrm>
           <a:prstGeom prst="rect">
             <a:avLst/>
@@ -5250,14 +5262,14 @@
               <a:buNone/>
             </a:pPr>
             <a:r>
-              <a:rPr lang="en-US" sz="2400" b="1" dirty="0">
+              <a:rPr lang="en-US" sz="2200" b="1" dirty="0">
                 <a:solidFill>
                   <a:srgbClr val="FFFFFF"/>
                 </a:solidFill>
               </a:rPr>
               <a:t>Project Deliverables &amp; GitHub Repository</a:t>
             </a:r>
-            <a:endParaRPr lang="en-US" sz="2400" dirty="0"/>
+            <a:endParaRPr lang="en-US" sz="2200" dirty="0"/>
           </a:p>
         </p:txBody>
       </p:sp>
@@ -5269,8 +5281,8 @@
         </p:nvSpPr>
         <p:spPr>
           <a:xfrm>
-            <a:off x="8686800" y="228600"/>
-            <a:ext cx="2926080" cy="457200"/>
+            <a:off x="8412480" y="182880"/>
+            <a:ext cx="3200400" cy="411480"/>
           </a:xfrm>
           <a:prstGeom prst="rect">
             <a:avLst/>
@@ -5305,8 +5317,8 @@
         </p:nvSpPr>
         <p:spPr>
           <a:xfrm>
-            <a:off x="731520" y="1371600"/>
-            <a:ext cx="10698480" cy="4937760"/>
+            <a:off x="731520" y="1280160"/>
+            <a:ext cx="10698480" cy="5029200"/>
           </a:xfrm>
           <a:prstGeom prst="roundRect">
             <a:avLst/>
@@ -5330,7 +5342,7 @@
         </p:nvSpPr>
         <p:spPr>
           <a:xfrm>
-            <a:off x="1097280" y="1645920"/>
+            <a:off x="1097280" y="1554480"/>
             <a:ext cx="9966960" cy="365760"/>
           </a:xfrm>
           <a:prstGeom prst="rect">
@@ -5366,7 +5378,7 @@
         </p:nvSpPr>
         <p:spPr>
           <a:xfrm>
-            <a:off x="1097280" y="2057400"/>
+            <a:off x="1097280" y="1965960"/>
             <a:ext cx="9966960" cy="457200"/>
           </a:xfrm>
           <a:prstGeom prst="rect">
@@ -5402,7 +5414,7 @@
         </p:nvSpPr>
         <p:spPr>
           <a:xfrm>
-            <a:off x="1097280" y="2606040"/>
+            <a:off x="1097280" y="2514600"/>
             <a:ext cx="9966960" cy="3566160"/>
           </a:xfrm>
           <a:prstGeom prst="rect">
@@ -5593,7 +5605,7 @@
         <p:spPr>
           <a:xfrm>
             <a:off x="0" y="0"/>
-            <a:ext cx="9144000" cy="914400"/>
+            <a:ext cx="9144000" cy="822960"/>
           </a:xfrm>
           <a:prstGeom prst="rect">
             <a:avLst/>
@@ -5612,8 +5624,8 @@
         </p:nvSpPr>
         <p:spPr>
           <a:xfrm>
-            <a:off x="731520" y="137160"/>
-            <a:ext cx="9144000" cy="640080"/>
+            <a:off x="731520" y="109728"/>
+            <a:ext cx="8686800" cy="594360"/>
           </a:xfrm>
           <a:prstGeom prst="rect">
             <a:avLst/>
@@ -5629,14 +5641,14 @@
               <a:buNone/>
             </a:pPr>
             <a:r>
-              <a:rPr lang="en-US" sz="2400" b="1" dirty="0">
+              <a:rPr lang="en-US" sz="2200" b="1" dirty="0">
                 <a:solidFill>
                   <a:srgbClr val="FFFFFF"/>
                 </a:solidFill>
               </a:rPr>
               <a:t>Course Completion Certificate</a:t>
             </a:r>
-            <a:endParaRPr lang="en-US" sz="2400" dirty="0"/>
+            <a:endParaRPr lang="en-US" sz="2200" dirty="0"/>
           </a:p>
         </p:txBody>
       </p:sp>
@@ -5648,8 +5660,8 @@
         </p:nvSpPr>
         <p:spPr>
           <a:xfrm>
-            <a:off x="8686800" y="228600"/>
-            <a:ext cx="2926080" cy="457200"/>
+            <a:off x="8412480" y="182880"/>
+            <a:ext cx="3200400" cy="411480"/>
           </a:xfrm>
           <a:prstGeom prst="rect">
             <a:avLst/>
@@ -6068,7 +6080,7 @@
         <p:spPr>
           <a:xfrm>
             <a:off x="0" y="0"/>
-            <a:ext cx="9144000" cy="457200"/>
+            <a:ext cx="9144000" cy="411480"/>
           </a:xfrm>
           <a:prstGeom prst="rect">
             <a:avLst/>
@@ -6087,8 +6099,8 @@
         </p:nvSpPr>
         <p:spPr>
           <a:xfrm>
-            <a:off x="914400" y="1645920"/>
-            <a:ext cx="10332720" cy="1097280"/>
+            <a:off x="914400" y="1463040"/>
+            <a:ext cx="10332720" cy="1005840"/>
           </a:xfrm>
           <a:prstGeom prst="rect">
             <a:avLst/>
@@ -6104,14 +6116,14 @@
               <a:buNone/>
             </a:pPr>
             <a:r>
-              <a:rPr lang="en-US" sz="4000" b="1" dirty="0">
+              <a:rPr lang="en-US" sz="3800" b="1" dirty="0">
                 <a:solidFill>
                   <a:srgbClr val="003366"/>
                 </a:solidFill>
               </a:rPr>
               <a:t>Thank You!</a:t>
             </a:r>
-            <a:endParaRPr lang="en-US" sz="4000" dirty="0"/>
+            <a:endParaRPr lang="en-US" sz="3800" dirty="0"/>
           </a:p>
         </p:txBody>
       </p:sp>
@@ -6123,7 +6135,7 @@
         </p:nvSpPr>
         <p:spPr>
           <a:xfrm>
-            <a:off x="914400" y="2743200"/>
+            <a:off x="914400" y="2514600"/>
             <a:ext cx="10332720" cy="457200"/>
           </a:xfrm>
           <a:prstGeom prst="rect">
@@ -6140,14 +6152,14 @@
               <a:buNone/>
             </a:pPr>
             <a:r>
-              <a:rPr lang="en-US" sz="1800" i="1" dirty="0">
+              <a:rPr lang="en-US" sz="1700" i="1" dirty="0">
                 <a:solidFill>
                   <a:srgbClr val="555555"/>
                 </a:solidFill>
               </a:rPr>
               <a:t>Empirical Evidence for Climate-Resilient Agricultural Planning</a:t>
             </a:r>
-            <a:endParaRPr lang="en-US" sz="1800" dirty="0"/>
+            <a:endParaRPr lang="en-US" sz="1700" dirty="0"/>
           </a:p>
         </p:txBody>
       </p:sp>
@@ -6159,8 +6171,8 @@
         </p:nvSpPr>
         <p:spPr>
           <a:xfrm>
-            <a:off x="1645920" y="3383280"/>
-            <a:ext cx="8869680" cy="2560320"/>
+            <a:off x="1645920" y="3108960"/>
+            <a:ext cx="8869680" cy="2834640"/>
           </a:xfrm>
           <a:prstGeom prst="rect">
             <a:avLst/>
@@ -6182,7 +6194,7 @@
               <a:buNone/>
             </a:pPr>
             <a:r>
-              <a:rPr lang="en-US" sz="1500" b="1" dirty="0">
+              <a:rPr lang="en-US" sz="1450" b="1" dirty="0">
                 <a:solidFill>
                   <a:srgbClr val="003366"/>
                 </a:solidFill>
@@ -6206,7 +6218,7 @@
               <a:buNone/>
             </a:pPr>
             <a:r>
-              <a:rPr lang="en-US" sz="1500" b="1" dirty="0">
+              <a:rPr lang="en-US" sz="1450" b="1" dirty="0">
                 <a:solidFill>
                   <a:srgbClr val="003366"/>
                 </a:solidFill>
@@ -6248,7 +6260,7 @@
               </a:rPr>
               <a:t>Asmi Sharma | Chandigarh University (STU6a65f9036e5721785067779)</a:t>
             </a:r>
-            <a:endParaRPr lang="en-US" sz="1500" dirty="0"/>
+            <a:endParaRPr lang="en-US" sz="1450" dirty="0"/>
           </a:p>
         </p:txBody>
       </p:sp>
@@ -6293,7 +6305,7 @@
         <p:spPr>
           <a:xfrm>
             <a:off x="0" y="0"/>
-            <a:ext cx="9144000" cy="914400"/>
+            <a:ext cx="9144000" cy="822960"/>
           </a:xfrm>
           <a:prstGeom prst="rect">
             <a:avLst/>
@@ -6312,8 +6324,8 @@
         </p:nvSpPr>
         <p:spPr>
           <a:xfrm>
-            <a:off x="731520" y="137160"/>
-            <a:ext cx="9144000" cy="640080"/>
+            <a:off x="731520" y="109728"/>
+            <a:ext cx="8686800" cy="594360"/>
           </a:xfrm>
           <a:prstGeom prst="rect">
             <a:avLst/>
@@ -6329,14 +6341,14 @@
               <a:buNone/>
             </a:pPr>
             <a:r>
-              <a:rPr lang="en-US" sz="2400" b="1" dirty="0">
+              <a:rPr lang="en-US" sz="2200" b="1" dirty="0">
                 <a:solidFill>
                   <a:srgbClr val="FFFFFF"/>
                 </a:solidFill>
               </a:rPr>
               <a:t>Problem Statement</a:t>
             </a:r>
-            <a:endParaRPr lang="en-US" sz="2400" dirty="0"/>
+            <a:endParaRPr lang="en-US" sz="2200" dirty="0"/>
           </a:p>
         </p:txBody>
       </p:sp>
@@ -6348,8 +6360,8 @@
         </p:nvSpPr>
         <p:spPr>
           <a:xfrm>
-            <a:off x="8686800" y="228600"/>
-            <a:ext cx="2926080" cy="457200"/>
+            <a:off x="8412480" y="182880"/>
+            <a:ext cx="3200400" cy="411480"/>
           </a:xfrm>
           <a:prstGeom prst="rect">
             <a:avLst/>
@@ -6384,7 +6396,7 @@
         </p:nvSpPr>
         <p:spPr>
           <a:xfrm>
-            <a:off x="731520" y="1188720"/>
+            <a:off x="731520" y="1097280"/>
             <a:ext cx="10698480" cy="5303520"/>
           </a:xfrm>
           <a:prstGeom prst="rect">
@@ -6549,7 +6561,7 @@
         <p:spPr>
           <a:xfrm>
             <a:off x="0" y="0"/>
-            <a:ext cx="9144000" cy="914400"/>
+            <a:ext cx="9144000" cy="822960"/>
           </a:xfrm>
           <a:prstGeom prst="rect">
             <a:avLst/>
@@ -6568,8 +6580,8 @@
         </p:nvSpPr>
         <p:spPr>
           <a:xfrm>
-            <a:off x="731520" y="137160"/>
-            <a:ext cx="9144000" cy="640080"/>
+            <a:off x="731520" y="109728"/>
+            <a:ext cx="8686800" cy="594360"/>
           </a:xfrm>
           <a:prstGeom prst="rect">
             <a:avLst/>
@@ -6585,14 +6597,14 @@
               <a:buNone/>
             </a:pPr>
             <a:r>
-              <a:rPr lang="en-US" sz="2400" b="1" dirty="0">
+              <a:rPr lang="en-US" sz="2200" b="1" dirty="0">
                 <a:solidFill>
                   <a:srgbClr val="FFFFFF"/>
                 </a:solidFill>
               </a:rPr>
               <a:t>Project Description &amp; Dataset Scope</a:t>
             </a:r>
-            <a:endParaRPr lang="en-US" sz="2400" dirty="0"/>
+            <a:endParaRPr lang="en-US" sz="2200" dirty="0"/>
           </a:p>
         </p:txBody>
       </p:sp>
@@ -6604,8 +6616,8 @@
         </p:nvSpPr>
         <p:spPr>
           <a:xfrm>
-            <a:off x="8686800" y="228600"/>
-            <a:ext cx="2926080" cy="457200"/>
+            <a:off x="8412480" y="182880"/>
+            <a:ext cx="3200400" cy="411480"/>
           </a:xfrm>
           <a:prstGeom prst="rect">
             <a:avLst/>
@@ -6640,7 +6652,7 @@
         </p:nvSpPr>
         <p:spPr>
           <a:xfrm>
-            <a:off x="731520" y="1188720"/>
+            <a:off x="731520" y="1097280"/>
             <a:ext cx="10698480" cy="5303520"/>
           </a:xfrm>
           <a:prstGeom prst="rect">
@@ -6807,7 +6819,7 @@
         <p:spPr>
           <a:xfrm>
             <a:off x="0" y="0"/>
-            <a:ext cx="9144000" cy="914400"/>
+            <a:ext cx="9144000" cy="822960"/>
           </a:xfrm>
           <a:prstGeom prst="rect">
             <a:avLst/>
@@ -6826,8 +6838,8 @@
         </p:nvSpPr>
         <p:spPr>
           <a:xfrm>
-            <a:off x="731520" y="137160"/>
-            <a:ext cx="9144000" cy="640080"/>
+            <a:off x="731520" y="109728"/>
+            <a:ext cx="8686800" cy="594360"/>
           </a:xfrm>
           <a:prstGeom prst="rect">
             <a:avLst/>
@@ -6843,14 +6855,14 @@
               <a:buNone/>
             </a:pPr>
             <a:r>
-              <a:rPr lang="en-US" sz="2400" b="1" dirty="0">
+              <a:rPr lang="en-US" sz="2200" b="1" dirty="0">
                 <a:solidFill>
                   <a:srgbClr val="FFFFFF"/>
                 </a:solidFill>
               </a:rPr>
               <a:t>Target Beneficiaries &amp; End Users</a:t>
             </a:r>
-            <a:endParaRPr lang="en-US" sz="2400" dirty="0"/>
+            <a:endParaRPr lang="en-US" sz="2200" dirty="0"/>
           </a:p>
         </p:txBody>
       </p:sp>
@@ -6862,8 +6874,8 @@
         </p:nvSpPr>
         <p:spPr>
           <a:xfrm>
-            <a:off x="8686800" y="228600"/>
-            <a:ext cx="2926080" cy="457200"/>
+            <a:off x="8412480" y="182880"/>
+            <a:ext cx="3200400" cy="411480"/>
           </a:xfrm>
           <a:prstGeom prst="rect">
             <a:avLst/>
@@ -6898,7 +6910,7 @@
         </p:nvSpPr>
         <p:spPr>
           <a:xfrm>
-            <a:off x="731520" y="1188720"/>
+            <a:off x="731520" y="1097280"/>
             <a:ext cx="10698480" cy="868680"/>
           </a:xfrm>
           <a:prstGeom prst="roundRect">
@@ -6923,7 +6935,7 @@
         </p:nvSpPr>
         <p:spPr>
           <a:xfrm>
-            <a:off x="914400" y="1234440"/>
+            <a:off x="914400" y="1143000"/>
             <a:ext cx="4389120" cy="365760"/>
           </a:xfrm>
           <a:prstGeom prst="rect">
@@ -6959,7 +6971,7 @@
         </p:nvSpPr>
         <p:spPr>
           <a:xfrm>
-            <a:off x="914400" y="1600200"/>
+            <a:off x="914400" y="1508760"/>
             <a:ext cx="10332720" cy="411480"/>
           </a:xfrm>
           <a:prstGeom prst="rect">
@@ -6995,7 +7007,7 @@
         </p:nvSpPr>
         <p:spPr>
           <a:xfrm>
-            <a:off x="731520" y="2194560"/>
+            <a:off x="731520" y="2103120"/>
             <a:ext cx="10698480" cy="868680"/>
           </a:xfrm>
           <a:prstGeom prst="roundRect">
@@ -7020,7 +7032,7 @@
         </p:nvSpPr>
         <p:spPr>
           <a:xfrm>
-            <a:off x="914400" y="2240280"/>
+            <a:off x="914400" y="2148840"/>
             <a:ext cx="4389120" cy="365760"/>
           </a:xfrm>
           <a:prstGeom prst="rect">
@@ -7056,7 +7068,7 @@
         </p:nvSpPr>
         <p:spPr>
           <a:xfrm>
-            <a:off x="914400" y="2606040"/>
+            <a:off x="914400" y="2514600"/>
             <a:ext cx="10332720" cy="411480"/>
           </a:xfrm>
           <a:prstGeom prst="rect">
@@ -7092,7 +7104,7 @@
         </p:nvSpPr>
         <p:spPr>
           <a:xfrm>
-            <a:off x="731520" y="3200400"/>
+            <a:off x="731520" y="3108960"/>
             <a:ext cx="10698480" cy="868680"/>
           </a:xfrm>
           <a:prstGeom prst="roundRect">
@@ -7117,7 +7129,7 @@
         </p:nvSpPr>
         <p:spPr>
           <a:xfrm>
-            <a:off x="914400" y="3246120"/>
+            <a:off x="914400" y="3154680"/>
             <a:ext cx="4389120" cy="365760"/>
           </a:xfrm>
           <a:prstGeom prst="rect">
@@ -7153,7 +7165,7 @@
         </p:nvSpPr>
         <p:spPr>
           <a:xfrm>
-            <a:off x="914400" y="3611880"/>
+            <a:off x="914400" y="3520440"/>
             <a:ext cx="10332720" cy="411480"/>
           </a:xfrm>
           <a:prstGeom prst="rect">
@@ -7189,7 +7201,7 @@
         </p:nvSpPr>
         <p:spPr>
           <a:xfrm>
-            <a:off x="731520" y="4206240"/>
+            <a:off x="731520" y="4114800"/>
             <a:ext cx="10698480" cy="868680"/>
           </a:xfrm>
           <a:prstGeom prst="roundRect">
@@ -7214,7 +7226,7 @@
         </p:nvSpPr>
         <p:spPr>
           <a:xfrm>
-            <a:off x="914400" y="4251960"/>
+            <a:off x="914400" y="4160520"/>
             <a:ext cx="4389120" cy="365760"/>
           </a:xfrm>
           <a:prstGeom prst="rect">
@@ -7250,7 +7262,7 @@
         </p:nvSpPr>
         <p:spPr>
           <a:xfrm>
-            <a:off x="914400" y="4617720"/>
+            <a:off x="914400" y="4526280"/>
             <a:ext cx="10332720" cy="411480"/>
           </a:xfrm>
           <a:prstGeom prst="rect">
@@ -7286,7 +7298,7 @@
         </p:nvSpPr>
         <p:spPr>
           <a:xfrm>
-            <a:off x="731520" y="5212080"/>
+            <a:off x="731520" y="5120640"/>
             <a:ext cx="10698480" cy="868680"/>
           </a:xfrm>
           <a:prstGeom prst="roundRect">
@@ -7311,7 +7323,7 @@
         </p:nvSpPr>
         <p:spPr>
           <a:xfrm>
-            <a:off x="914400" y="5257800"/>
+            <a:off x="914400" y="5166360"/>
             <a:ext cx="4389120" cy="365760"/>
           </a:xfrm>
           <a:prstGeom prst="rect">
@@ -7347,7 +7359,7 @@
         </p:nvSpPr>
         <p:spPr>
           <a:xfrm>
-            <a:off x="914400" y="5623560"/>
+            <a:off x="914400" y="5532120"/>
             <a:ext cx="10332720" cy="411480"/>
           </a:xfrm>
           <a:prstGeom prst="rect">
@@ -7416,7 +7428,7 @@
         <p:spPr>
           <a:xfrm>
             <a:off x="0" y="0"/>
-            <a:ext cx="9144000" cy="914400"/>
+            <a:ext cx="9144000" cy="822960"/>
           </a:xfrm>
           <a:prstGeom prst="rect">
             <a:avLst/>
@@ -7435,8 +7447,8 @@
         </p:nvSpPr>
         <p:spPr>
           <a:xfrm>
-            <a:off x="731520" y="137160"/>
-            <a:ext cx="9144000" cy="640080"/>
+            <a:off x="731520" y="109728"/>
+            <a:ext cx="8686800" cy="594360"/>
           </a:xfrm>
           <a:prstGeom prst="rect">
             <a:avLst/>
@@ -7452,14 +7464,14 @@
               <a:buNone/>
             </a:pPr>
             <a:r>
-              <a:rPr lang="en-US" sz="2400" b="1" dirty="0">
+              <a:rPr lang="en-US" sz="2200" b="1" dirty="0">
                 <a:solidFill>
                   <a:srgbClr val="FFFFFF"/>
                 </a:solidFill>
               </a:rPr>
               <a:t>Technology Stack &amp; Development Environment</a:t>
             </a:r>
-            <a:endParaRPr lang="en-US" sz="2400" dirty="0"/>
+            <a:endParaRPr lang="en-US" sz="2200" dirty="0"/>
           </a:p>
         </p:txBody>
       </p:sp>
@@ -7471,8 +7483,8 @@
         </p:nvSpPr>
         <p:spPr>
           <a:xfrm>
-            <a:off x="8686800" y="228600"/>
-            <a:ext cx="2926080" cy="457200"/>
+            <a:off x="8412480" y="182880"/>
+            <a:ext cx="3200400" cy="411480"/>
           </a:xfrm>
           <a:prstGeom prst="rect">
             <a:avLst/>
@@ -7507,7 +7519,7 @@
         </p:nvSpPr>
         <p:spPr>
           <a:xfrm>
-            <a:off x="731520" y="1280160"/>
+            <a:off x="731520" y="1188720"/>
             <a:ext cx="5212080" cy="1371600"/>
           </a:xfrm>
           <a:prstGeom prst="roundRect">
@@ -7532,7 +7544,7 @@
         </p:nvSpPr>
         <p:spPr>
           <a:xfrm>
-            <a:off x="914400" y="1417320"/>
+            <a:off x="914400" y="1325880"/>
             <a:ext cx="4846320" cy="320040"/>
           </a:xfrm>
           <a:prstGeom prst="rect">
@@ -7568,7 +7580,7 @@
         </p:nvSpPr>
         <p:spPr>
           <a:xfrm>
-            <a:off x="914400" y="1783080"/>
+            <a:off x="914400" y="1691640"/>
             <a:ext cx="4846320" cy="777240"/>
           </a:xfrm>
           <a:prstGeom prst="rect">
@@ -7604,7 +7616,7 @@
         </p:nvSpPr>
         <p:spPr>
           <a:xfrm>
-            <a:off x="6217920" y="1280160"/>
+            <a:off x="6217920" y="1188720"/>
             <a:ext cx="5212080" cy="1371600"/>
           </a:xfrm>
           <a:prstGeom prst="roundRect">
@@ -7629,7 +7641,7 @@
         </p:nvSpPr>
         <p:spPr>
           <a:xfrm>
-            <a:off x="6400800" y="1417320"/>
+            <a:off x="6400800" y="1325880"/>
             <a:ext cx="4846320" cy="320040"/>
           </a:xfrm>
           <a:prstGeom prst="rect">
@@ -7665,7 +7677,7 @@
         </p:nvSpPr>
         <p:spPr>
           <a:xfrm>
-            <a:off x="6400800" y="1783080"/>
+            <a:off x="6400800" y="1691640"/>
             <a:ext cx="4846320" cy="777240"/>
           </a:xfrm>
           <a:prstGeom prst="rect">
@@ -7701,7 +7713,7 @@
         </p:nvSpPr>
         <p:spPr>
           <a:xfrm>
-            <a:off x="731520" y="2926080"/>
+            <a:off x="731520" y="2834640"/>
             <a:ext cx="5212080" cy="1371600"/>
           </a:xfrm>
           <a:prstGeom prst="roundRect">
@@ -7726,7 +7738,7 @@
         </p:nvSpPr>
         <p:spPr>
           <a:xfrm>
-            <a:off x="914400" y="3063240"/>
+            <a:off x="914400" y="2971800"/>
             <a:ext cx="4846320" cy="320040"/>
           </a:xfrm>
           <a:prstGeom prst="rect">
@@ -7762,7 +7774,7 @@
         </p:nvSpPr>
         <p:spPr>
           <a:xfrm>
-            <a:off x="914400" y="3429000"/>
+            <a:off x="914400" y="3337560"/>
             <a:ext cx="4846320" cy="777240"/>
           </a:xfrm>
           <a:prstGeom prst="rect">
@@ -7798,7 +7810,7 @@
         </p:nvSpPr>
         <p:spPr>
           <a:xfrm>
-            <a:off x="6217920" y="2926080"/>
+            <a:off x="6217920" y="2834640"/>
             <a:ext cx="5212080" cy="1371600"/>
           </a:xfrm>
           <a:prstGeom prst="roundRect">
@@ -7823,7 +7835,7 @@
         </p:nvSpPr>
         <p:spPr>
           <a:xfrm>
-            <a:off x="6400800" y="3063240"/>
+            <a:off x="6400800" y="2971800"/>
             <a:ext cx="4846320" cy="320040"/>
           </a:xfrm>
           <a:prstGeom prst="rect">
@@ -7859,7 +7871,7 @@
         </p:nvSpPr>
         <p:spPr>
           <a:xfrm>
-            <a:off x="6400800" y="3429000"/>
+            <a:off x="6400800" y="3337560"/>
             <a:ext cx="4846320" cy="777240"/>
           </a:xfrm>
           <a:prstGeom prst="rect">
@@ -7895,7 +7907,7 @@
         </p:nvSpPr>
         <p:spPr>
           <a:xfrm>
-            <a:off x="731520" y="4572000"/>
+            <a:off x="731520" y="4480560"/>
             <a:ext cx="5212080" cy="1371600"/>
           </a:xfrm>
           <a:prstGeom prst="roundRect">
@@ -7920,7 +7932,7 @@
         </p:nvSpPr>
         <p:spPr>
           <a:xfrm>
-            <a:off x="914400" y="4709160"/>
+            <a:off x="914400" y="4617720"/>
             <a:ext cx="4846320" cy="320040"/>
           </a:xfrm>
           <a:prstGeom prst="rect">
@@ -7956,7 +7968,7 @@
         </p:nvSpPr>
         <p:spPr>
           <a:xfrm>
-            <a:off x="914400" y="5074920"/>
+            <a:off x="914400" y="4983480"/>
             <a:ext cx="4846320" cy="777240"/>
           </a:xfrm>
           <a:prstGeom prst="rect">
@@ -7992,7 +8004,7 @@
         </p:nvSpPr>
         <p:spPr>
           <a:xfrm>
-            <a:off x="6217920" y="4572000"/>
+            <a:off x="6217920" y="4480560"/>
             <a:ext cx="5212080" cy="1371600"/>
           </a:xfrm>
           <a:prstGeom prst="roundRect">
@@ -8017,7 +8029,7 @@
         </p:nvSpPr>
         <p:spPr>
           <a:xfrm>
-            <a:off x="6400800" y="4709160"/>
+            <a:off x="6400800" y="4617720"/>
             <a:ext cx="4846320" cy="320040"/>
           </a:xfrm>
           <a:prstGeom prst="rect">
@@ -8053,7 +8065,7 @@
         </p:nvSpPr>
         <p:spPr>
           <a:xfrm>
-            <a:off x="6400800" y="5074920"/>
+            <a:off x="6400800" y="4983480"/>
             <a:ext cx="4846320" cy="777240"/>
           </a:xfrm>
           <a:prstGeom prst="rect">
@@ -8122,7 +8134,7 @@
         <p:spPr>
           <a:xfrm>
             <a:off x="0" y="0"/>
-            <a:ext cx="9144000" cy="914400"/>
+            <a:ext cx="9144000" cy="822960"/>
           </a:xfrm>
           <a:prstGeom prst="rect">
             <a:avLst/>
@@ -8141,8 +8153,8 @@
         </p:nvSpPr>
         <p:spPr>
           <a:xfrm>
-            <a:off x="731520" y="137160"/>
-            <a:ext cx="9144000" cy="640080"/>
+            <a:off x="731520" y="109728"/>
+            <a:ext cx="8686800" cy="594360"/>
           </a:xfrm>
           <a:prstGeom prst="rect">
             <a:avLst/>
@@ -8158,14 +8170,14 @@
               <a:buNone/>
             </a:pPr>
             <a:r>
-              <a:rPr lang="en-US" sz="2400" b="1" dirty="0">
+              <a:rPr lang="en-US" sz="2200" b="1" dirty="0">
                 <a:solidFill>
                   <a:srgbClr val="FFFFFF"/>
                 </a:solidFill>
               </a:rPr>
-              <a:t>Results: Seasonal Performance &amp; Economics</a:t>
-            </a:r>
-            <a:endParaRPr lang="en-US" sz="2400" dirty="0"/>
+              <a:t>RESULTS: Seasonal Yield &amp; Crop Profitability Ranking</a:t>
+            </a:r>
+            <a:endParaRPr lang="en-US" sz="2200" dirty="0"/>
           </a:p>
         </p:txBody>
       </p:sp>
@@ -8177,8 +8189,8 @@
         </p:nvSpPr>
         <p:spPr>
           <a:xfrm>
-            <a:off x="8686800" y="228600"/>
-            <a:ext cx="2926080" cy="457200"/>
+            <a:off x="8412480" y="182880"/>
+            <a:ext cx="3200400" cy="411480"/>
           </a:xfrm>
           <a:prstGeom prst="rect">
             <a:avLst/>
@@ -8199,22 +8211,71 @@
                   <a:srgbClr val="BBDEFB"/>
                 </a:solidFill>
               </a:rPr>
-              <a:t>Slide 6 of 14</a:t>
+              <a:t>Slide 6 of 14 [Code Output]</a:t>
             </a:r>
             <a:endParaRPr lang="en-US" sz="1100" dirty="0"/>
           </a:p>
         </p:txBody>
       </p:sp>
-      <p:sp>
-        <p:nvSpPr>
-          <p:cNvPr id="5" name="Text 3"/>
+      <p:pic>
+        <p:nvPicPr>
+          <p:cNvPr id="5" name="Image 0" descr="C:/Users/ocotp/.gemini/antigravity/brain/2b64254e-8329-498c-9b37-019e1b1a9e41/.user_uploaded/media_1788676491579.png">    </p:cNvPr>
+          <p:cNvPicPr>
+            <a:picLocks noChangeAspect="1"/>
+          </p:cNvPicPr>
+          <p:nvPr/>
+        </p:nvPicPr>
+        <p:blipFill>
+          <a:blip r:embed="rId1"/>
+          <a:stretch>
+            <a:fillRect/>
+          </a:stretch>
+        </p:blipFill>
+        <p:spPr>
+          <a:xfrm>
+            <a:off x="731520" y="1005840"/>
+            <a:ext cx="6583680" cy="2926080"/>
+          </a:xfrm>
+          <a:prstGeom prst="rect">
+            <a:avLst/>
+          </a:prstGeom>
+        </p:spPr>
+      </p:pic>
+      <p:sp>
+        <p:nvSpPr>
+          <p:cNvPr id="6" name="Shape 3"/>
           <p:cNvSpPr/>
           <p:nvPr/>
         </p:nvSpPr>
         <p:spPr>
           <a:xfrm>
-            <a:off x="731520" y="1097280"/>
-            <a:ext cx="10698480" cy="365760"/>
+            <a:off x="7498080" y="1005840"/>
+            <a:ext cx="3931920" cy="5303520"/>
+          </a:xfrm>
+          <a:prstGeom prst="roundRect">
+            <a:avLst/>
+          </a:prstGeom>
+          <a:solidFill>
+            <a:srgbClr val="FFFFFF"/>
+          </a:solidFill>
+          <a:ln w="12700">
+            <a:solidFill>
+              <a:srgbClr val="B0BEC5"/>
+            </a:solidFill>
+            <a:prstDash val="solid"/>
+          </a:ln>
+        </p:spPr>
+      </p:sp>
+      <p:sp>
+        <p:nvSpPr>
+          <p:cNvPr id="7" name="Text 4"/>
+          <p:cNvSpPr/>
+          <p:nvPr/>
+        </p:nvSpPr>
+        <p:spPr>
+          <a:xfrm>
+            <a:off x="7635240" y="1143000"/>
+            <a:ext cx="3657600" cy="5029200"/>
           </a:xfrm>
           <a:prstGeom prst="rect">
             <a:avLst/>
@@ -8230,14 +8291,91 @@
               <a:buNone/>
             </a:pPr>
             <a:r>
-              <a:rPr lang="en-US" sz="1500" b="1" dirty="0">
+              <a:rPr lang="en-US" sz="1400" b="1" dirty="0">
                 <a:solidFill>
                   <a:srgbClr val="003366"/>
                 </a:solidFill>
               </a:rPr>
-              <a:t>Empirical Comparison Across 4,000 Farms (Kharif vs Rabi vs Zaid):</a:t>
-            </a:r>
-            <a:endParaRPr lang="en-US" sz="1500" dirty="0"/>
+              <a:t>Key Data Takeaways:
+</a:t>
+            </a:r>
+            <a:pPr indent="0" marL="0">
+              <a:buNone/>
+            </a:pPr>
+            <a:r>
+              <a:rPr lang="en-US" sz="1250" b="1" dirty="0">
+                <a:solidFill>
+                  <a:srgbClr val="006699"/>
+                </a:solidFill>
+              </a:rPr>
+              <a:t>• Figure 1A (Yield Boxplot):
+</a:t>
+            </a:r>
+            <a:pPr indent="0" marL="0">
+              <a:buNone/>
+            </a:pPr>
+            <a:r>
+              <a:rPr lang="en-US" sz="1150" dirty="0">
+                <a:solidFill>
+                  <a:srgbClr val="222222"/>
+                </a:solidFill>
+              </a:rPr>
+              <a:t>  - Kharif mean yield is highest at 5.64 t/ha, followed by Rabi (5.08 t/ha) and Zaid (4.67 t/ha).
+  - Outliers (&gt;40 t/ha) reflect sugarcane stalk harvest.
+</a:t>
+            </a:r>
+            <a:pPr indent="0" marL="0">
+              <a:buNone/>
+            </a:pPr>
+            <a:r>
+              <a:rPr lang="en-US" sz="1250" b="1" dirty="0">
+                <a:solidFill>
+                  <a:srgbClr val="006699"/>
+                </a:solidFill>
+              </a:rPr>
+              <a:t>• Figure 1B (Profit Ranking):
+</a:t>
+            </a:r>
+            <a:pPr indent="0" marL="0">
+              <a:buNone/>
+            </a:pPr>
+            <a:r>
+              <a:rPr lang="en-US" sz="1150" dirty="0">
+                <a:solidFill>
+                  <a:srgbClr val="222222"/>
+                </a:solidFill>
+              </a:rPr>
+              <a:t>  - Sugarcane (+₹96.8K/ha) and Chilli (+₹91.8K/ha) lead agricultural profitability.</a:t>
+            </a:r>
+            <a:endParaRPr lang="en-US" sz="1400" dirty="0"/>
+          </a:p>
+          <a:p>
+            <a:pPr indent="0" marL="0">
+              <a:buNone/>
+            </a:pPr>
+            <a:r>
+              <a:rPr lang="en-US" sz="1150" dirty="0">
+                <a:solidFill>
+                  <a:srgbClr val="222222"/>
+                </a:solidFill>
+              </a:rPr>
+              <a:t>  - Cotton (+₹16.2K/ha) and Groundnut (+₹7.4K/ha) remain solvent.</a:t>
+            </a:r>
+            <a:endParaRPr lang="en-US" sz="1400" dirty="0"/>
+          </a:p>
+          <a:p>
+            <a:pPr indent="0" marL="0">
+              <a:buNone/>
+            </a:pPr>
+            <a:r>
+              <a:rPr lang="en-US" sz="1150" dirty="0">
+                <a:solidFill>
+                  <a:srgbClr val="222222"/>
+                </a:solidFill>
+              </a:rPr>
+              <a:t>  - Severe Cereal Deficit: Pulses (-₹546/ha), Maize (-₹10.3K/ha), Rice (-₹13.4K/ha), and Wheat (-₹16.2K/ha) show negative net margins.</a:t>
+            </a:r>
+            <a:endParaRPr lang="en-US" sz="1400" dirty="0"/>
           </a:p>
         </p:txBody>
       </p:sp>
@@ -8256,23 +8394,21 @@
           </p:nvPr>
         </p:nvGraphicFramePr>
         <p:xfrm>
-          <a:off x="731520" y="1554480"/>
-          <a:ext cx="10698480" cy="2103120"/>
+          <a:off x="731520" y="4114800"/>
+          <a:ext cx="6583680" cy="2194560"/>
         </p:xfrm>
         <a:graphic>
           <a:graphicData uri="http://schemas.openxmlformats.org/drawingml/2006/table">
             <a:tbl>
               <a:tblPr/>
               <a:tblGrid>
-                <a:gridCol w="1528354"/>
-                <a:gridCol w="1528354"/>
-                <a:gridCol w="1528354"/>
-                <a:gridCol w="1528354"/>
-                <a:gridCol w="1528354"/>
-                <a:gridCol w="1528354"/>
-                <a:gridCol w="1528354"/>
+                <a:gridCol w="1316736"/>
+                <a:gridCol w="1316736"/>
+                <a:gridCol w="1316736"/>
+                <a:gridCol w="1316736"/>
+                <a:gridCol w="1316736"/>
               </a:tblGrid>
-              <a:tr h="525780">
+              <a:tr h="548640">
                 <a:tc>
                   <a:txBody>
                     <a:bodyPr/>
@@ -8282,14 +8418,14 @@
                         <a:buNone/>
                       </a:pPr>
                       <a:r>
-                        <a:rPr lang="en-US" sz="1200" b="1" dirty="0">
+                        <a:rPr lang="en-US" sz="1100" b="1" dirty="0">
                           <a:solidFill>
                             <a:srgbClr val="FFFFFF"/>
                           </a:solidFill>
                         </a:rPr>
                         <a:t>Cropping Season</a:t>
                       </a:r>
-                      <a:endParaRPr lang="en-US" sz="1200" dirty="0"/>
+                      <a:endParaRPr lang="en-US" sz="1100" dirty="0"/>
                     </a:p>
                   </a:txBody>
                   <a:tcPr marL="91440" marR="91440" marT="45720" marB="45720">
@@ -8343,14 +8479,14 @@
                         <a:buNone/>
                       </a:pPr>
                       <a:r>
-                        <a:rPr lang="en-US" sz="1200" b="1" dirty="0">
+                        <a:rPr lang="en-US" sz="1100" b="1" dirty="0">
                           <a:solidFill>
                             <a:srgbClr val="FFFFFF"/>
                           </a:solidFill>
                         </a:rPr>
                         <a:t>Sample (N)</a:t>
                       </a:r>
-                      <a:endParaRPr lang="en-US" sz="1200" dirty="0"/>
+                      <a:endParaRPr lang="en-US" sz="1100" dirty="0"/>
                     </a:p>
                   </a:txBody>
                   <a:tcPr marL="91440" marR="91440" marT="45720" marB="45720">
@@ -8404,14 +8540,14 @@
                         <a:buNone/>
                       </a:pPr>
                       <a:r>
-                        <a:rPr lang="en-US" sz="1200" b="1" dirty="0">
+                        <a:rPr lang="en-US" sz="1100" b="1" dirty="0">
                           <a:solidFill>
                             <a:srgbClr val="FFFFFF"/>
                           </a:solidFill>
                         </a:rPr>
-                        <a:t>Mean Yield (t/ha)</a:t>
+                        <a:t>Mean Yield</a:t>
                       </a:r>
-                      <a:endParaRPr lang="en-US" sz="1200" dirty="0"/>
+                      <a:endParaRPr lang="en-US" sz="1100" dirty="0"/>
                     </a:p>
                   </a:txBody>
                   <a:tcPr marL="91440" marR="91440" marT="45720" marB="45720">
@@ -8465,14 +8601,14 @@
                         <a:buNone/>
                       </a:pPr>
                       <a:r>
-                        <a:rPr lang="en-US" sz="1200" b="1" dirty="0">
+                        <a:rPr lang="en-US" sz="1100" b="1" dirty="0">
                           <a:solidFill>
                             <a:srgbClr val="FFFFFF"/>
                           </a:solidFill>
                         </a:rPr>
-                        <a:t>Avg Cost (INR)</a:t>
+                        <a:t>Avg Farm Profit</a:t>
                       </a:r>
-                      <a:endParaRPr lang="en-US" sz="1200" dirty="0"/>
+                      <a:endParaRPr lang="en-US" sz="1100" dirty="0"/>
                     </a:p>
                   </a:txBody>
                   <a:tcPr marL="91440" marR="91440" marT="45720" marB="45720">
@@ -8526,14 +8662,14 @@
                         <a:buNone/>
                       </a:pPr>
                       <a:r>
-                        <a:rPr lang="en-US" sz="1200" b="1" dirty="0">
+                        <a:rPr lang="en-US" sz="1100" b="1" dirty="0">
                           <a:solidFill>
                             <a:srgbClr val="FFFFFF"/>
                           </a:solidFill>
                         </a:rPr>
-                        <a:t>Avg Revenue (INR)</a:t>
+                        <a:t>Solvency (%)</a:t>
                       </a:r>
-                      <a:endParaRPr lang="en-US" sz="1200" dirty="0"/>
+                      <a:endParaRPr lang="en-US" sz="1100" dirty="0"/>
                     </a:p>
                   </a:txBody>
                   <a:tcPr marL="91440" marR="91440" marT="45720" marB="45720">
@@ -8578,6 +8714,8 @@
                     </a:solidFill>
                   </a:tcPr>
                 </a:tc>
+              </a:tr>
+              <a:tr h="548640">
                 <a:tc>
                   <a:txBody>
                     <a:bodyPr/>
@@ -8587,138 +8725,14 @@
                         <a:buNone/>
                       </a:pPr>
                       <a:r>
-                        <a:rPr lang="en-US" sz="1200" b="1" dirty="0">
-                          <a:solidFill>
-                            <a:srgbClr val="FFFFFF"/>
-                          </a:solidFill>
-                        </a:rPr>
-                        <a:t>Avg Net Profit (INR)</a:t>
-                      </a:r>
-                      <a:endParaRPr lang="en-US" sz="1200" dirty="0"/>
-                    </a:p>
-                  </a:txBody>
-                  <a:tcPr marL="91440" marR="91440" marT="45720" marB="45720">
-                    <a:lnL w="12700" cap="flat" cmpd="sng" algn="ctr">
-                      <a:solidFill>
-                        <a:srgbClr val="CCCCCC"/>
-                      </a:solidFill>
-                      <a:prstDash val="solid"/>
-                      <a:round/>
-                      <a:headEnd type="none" w="med" len="med"/>
-                      <a:tailEnd type="none" w="med" len="med"/>
-                    </a:lnL>
-                    <a:lnR w="12700" cap="flat" cmpd="sng" algn="ctr">
-                      <a:solidFill>
-                        <a:srgbClr val="CCCCCC"/>
-                      </a:solidFill>
-                      <a:prstDash val="solid"/>
-                      <a:round/>
-                      <a:headEnd type="none" w="med" len="med"/>
-                      <a:tailEnd type="none" w="med" len="med"/>
-                    </a:lnR>
-                    <a:lnT w="12700" cap="flat" cmpd="sng" algn="ctr">
-                      <a:solidFill>
-                        <a:srgbClr val="CCCCCC"/>
-                      </a:solidFill>
-                      <a:prstDash val="solid"/>
-                      <a:round/>
-                      <a:headEnd type="none" w="med" len="med"/>
-                      <a:tailEnd type="none" w="med" len="med"/>
-                    </a:lnT>
-                    <a:lnB w="12700" cap="flat" cmpd="sng" algn="ctr">
-                      <a:solidFill>
-                        <a:srgbClr val="CCCCCC"/>
-                      </a:solidFill>
-                      <a:prstDash val="solid"/>
-                      <a:round/>
-                      <a:headEnd type="none" w="med" len="med"/>
-                      <a:tailEnd type="none" w="med" len="med"/>
-                    </a:lnB>
-                    <a:solidFill>
-                      <a:srgbClr val="003366"/>
-                    </a:solidFill>
-                  </a:tcPr>
-                </a:tc>
-                <a:tc>
-                  <a:txBody>
-                    <a:bodyPr/>
-                    <a:lstStyle/>
-                    <a:p>
-                      <a:pPr algn="ctr" indent="0" marL="0">
-                        <a:buNone/>
-                      </a:pPr>
-                      <a:r>
-                        <a:rPr lang="en-US" sz="1200" b="1" dirty="0">
-                          <a:solidFill>
-                            <a:srgbClr val="FFFFFF"/>
-                          </a:solidFill>
-                        </a:rPr>
-                        <a:t>Solvency Rate (%)</a:t>
-                      </a:r>
-                      <a:endParaRPr lang="en-US" sz="1200" dirty="0"/>
-                    </a:p>
-                  </a:txBody>
-                  <a:tcPr marL="91440" marR="91440" marT="45720" marB="45720">
-                    <a:lnL w="12700" cap="flat" cmpd="sng" algn="ctr">
-                      <a:solidFill>
-                        <a:srgbClr val="CCCCCC"/>
-                      </a:solidFill>
-                      <a:prstDash val="solid"/>
-                      <a:round/>
-                      <a:headEnd type="none" w="med" len="med"/>
-                      <a:tailEnd type="none" w="med" len="med"/>
-                    </a:lnL>
-                    <a:lnR w="12700" cap="flat" cmpd="sng" algn="ctr">
-                      <a:solidFill>
-                        <a:srgbClr val="CCCCCC"/>
-                      </a:solidFill>
-                      <a:prstDash val="solid"/>
-                      <a:round/>
-                      <a:headEnd type="none" w="med" len="med"/>
-                      <a:tailEnd type="none" w="med" len="med"/>
-                    </a:lnR>
-                    <a:lnT w="12700" cap="flat" cmpd="sng" algn="ctr">
-                      <a:solidFill>
-                        <a:srgbClr val="CCCCCC"/>
-                      </a:solidFill>
-                      <a:prstDash val="solid"/>
-                      <a:round/>
-                      <a:headEnd type="none" w="med" len="med"/>
-                      <a:tailEnd type="none" w="med" len="med"/>
-                    </a:lnT>
-                    <a:lnB w="12700" cap="flat" cmpd="sng" algn="ctr">
-                      <a:solidFill>
-                        <a:srgbClr val="CCCCCC"/>
-                      </a:solidFill>
-                      <a:prstDash val="solid"/>
-                      <a:round/>
-                      <a:headEnd type="none" w="med" len="med"/>
-                      <a:tailEnd type="none" w="med" len="med"/>
-                    </a:lnB>
-                    <a:solidFill>
-                      <a:srgbClr val="003366"/>
-                    </a:solidFill>
-                  </a:tcPr>
-                </a:tc>
-              </a:tr>
-              <a:tr h="525780">
-                <a:tc>
-                  <a:txBody>
-                    <a:bodyPr/>
-                    <a:lstStyle/>
-                    <a:p>
-                      <a:pPr algn="ctr" indent="0" marL="0">
-                        <a:buNone/>
-                      </a:pPr>
-                      <a:r>
-                        <a:rPr lang="en-US" sz="1200" b="1" dirty="0">
+                        <a:rPr lang="en-US" sz="1100" dirty="0">
                           <a:solidFill>
                             <a:srgbClr val="000000"/>
                           </a:solidFill>
                         </a:rPr>
                         <a:t>Kharif (Monsoon)</a:t>
                       </a:r>
-                      <a:endParaRPr lang="en-US" sz="1200" dirty="0"/>
+                      <a:endParaRPr lang="en-US" sz="1100" dirty="0"/>
                     </a:p>
                   </a:txBody>
                   <a:tcPr marL="91440" marR="91440" marT="45720" marB="45720">
@@ -8769,14 +8783,14 @@
                         <a:buNone/>
                       </a:pPr>
                       <a:r>
-                        <a:rPr lang="en-US" sz="1200" dirty="0">
+                        <a:rPr lang="en-US" sz="1100" dirty="0">
                           <a:solidFill>
                             <a:srgbClr val="000000"/>
                           </a:solidFill>
                         </a:rPr>
                         <a:t>1,779 (44.5%)</a:t>
                       </a:r>
-                      <a:endParaRPr lang="en-US" sz="1200" dirty="0"/>
+                      <a:endParaRPr lang="en-US" sz="1100" dirty="0"/>
                     </a:p>
                   </a:txBody>
                   <a:tcPr marL="91440" marR="91440" marT="45720" marB="45720">
@@ -8827,14 +8841,14 @@
                         <a:buNone/>
                       </a:pPr>
                       <a:r>
-                        <a:rPr lang="en-US" sz="1200" dirty="0">
+                        <a:rPr lang="en-US" sz="1100" dirty="0">
                           <a:solidFill>
                             <a:srgbClr val="000000"/>
                           </a:solidFill>
                         </a:rPr>
                         <a:t>5.64 t/ha</a:t>
                       </a:r>
-                      <a:endParaRPr lang="en-US" sz="1200" dirty="0"/>
+                      <a:endParaRPr lang="en-US" sz="1100" dirty="0"/>
                     </a:p>
                   </a:txBody>
                   <a:tcPr marL="91440" marR="91440" marT="45720" marB="45720">
@@ -8885,14 +8899,14 @@
                         <a:buNone/>
                       </a:pPr>
                       <a:r>
-                        <a:rPr lang="en-US" sz="1200" dirty="0">
+                        <a:rPr lang="en-US" sz="1100" b="1" dirty="0">
                           <a:solidFill>
-                            <a:srgbClr val="000000"/>
+                            <a:srgbClr val="2E7D32"/>
                           </a:solidFill>
                         </a:rPr>
-                        <a:t>INR 5,31,804</a:t>
+                        <a:t>+₹1,78,915</a:t>
                       </a:r>
-                      <a:endParaRPr lang="en-US" sz="1200" dirty="0"/>
+                      <a:endParaRPr lang="en-US" sz="1100" dirty="0"/>
                     </a:p>
                   </a:txBody>
                   <a:tcPr marL="91440" marR="91440" marT="45720" marB="45720">
@@ -8943,14 +8957,74 @@
                         <a:buNone/>
                       </a:pPr>
                       <a:r>
-                        <a:rPr lang="en-US" sz="1200" dirty="0">
+                        <a:rPr lang="en-US" sz="1100" b="1" dirty="0">
+                          <a:solidFill>
+                            <a:srgbClr val="2E7D32"/>
+                          </a:solidFill>
+                        </a:rPr>
+                        <a:t>57.8%</a:t>
+                      </a:r>
+                      <a:endParaRPr lang="en-US" sz="1100" dirty="0"/>
+                    </a:p>
+                  </a:txBody>
+                  <a:tcPr marL="91440" marR="91440" marT="45720" marB="45720">
+                    <a:lnL w="12700" cap="flat" cmpd="sng" algn="ctr">
+                      <a:solidFill>
+                        <a:srgbClr val="CCCCCC"/>
+                      </a:solidFill>
+                      <a:prstDash val="solid"/>
+                      <a:round/>
+                      <a:headEnd type="none" w="med" len="med"/>
+                      <a:tailEnd type="none" w="med" len="med"/>
+                    </a:lnL>
+                    <a:lnR w="12700" cap="flat" cmpd="sng" algn="ctr">
+                      <a:solidFill>
+                        <a:srgbClr val="CCCCCC"/>
+                      </a:solidFill>
+                      <a:prstDash val="solid"/>
+                      <a:round/>
+                      <a:headEnd type="none" w="med" len="med"/>
+                      <a:tailEnd type="none" w="med" len="med"/>
+                    </a:lnR>
+                    <a:lnT w="12700" cap="flat" cmpd="sng" algn="ctr">
+                      <a:solidFill>
+                        <a:srgbClr val="CCCCCC"/>
+                      </a:solidFill>
+                      <a:prstDash val="solid"/>
+                      <a:round/>
+                      <a:headEnd type="none" w="med" len="med"/>
+                      <a:tailEnd type="none" w="med" len="med"/>
+                    </a:lnT>
+                    <a:lnB w="12700" cap="flat" cmpd="sng" algn="ctr">
+                      <a:solidFill>
+                        <a:srgbClr val="CCCCCC"/>
+                      </a:solidFill>
+                      <a:prstDash val="solid"/>
+                      <a:round/>
+                      <a:headEnd type="none" w="med" len="med"/>
+                      <a:tailEnd type="none" w="med" len="med"/>
+                    </a:lnB>
+                  </a:tcPr>
+                </a:tc>
+              </a:tr>
+              <a:tr h="548640">
+                <a:tc>
+                  <a:txBody>
+                    <a:bodyPr/>
+                    <a:lstStyle/>
+                    <a:p>
+                      <a:pPr algn="ctr" indent="0" marL="0">
+                        <a:buNone/>
+                      </a:pPr>
+                      <a:r>
+                        <a:rPr lang="en-US" sz="1100" dirty="0">
                           <a:solidFill>
                             <a:srgbClr val="000000"/>
                           </a:solidFill>
                         </a:rPr>
-                        <a:t>INR 7,10,719</a:t>
+                        <a:t>Rabi (Winter)</a:t>
                       </a:r>
-                      <a:endParaRPr lang="en-US" sz="1200" dirty="0"/>
+                      <a:endParaRPr lang="en-US" sz="1100" dirty="0"/>
                     </a:p>
                   </a:txBody>
                   <a:tcPr marL="91440" marR="91440" marT="45720" marB="45720">
@@ -9001,14 +9075,14 @@
                         <a:buNone/>
                       </a:pPr>
                       <a:r>
-                        <a:rPr lang="en-US" sz="1200" b="1" dirty="0">
+                        <a:rPr lang="en-US" sz="1100" dirty="0">
                           <a:solidFill>
-                            <a:srgbClr val="2E7D32"/>
+                            <a:srgbClr val="000000"/>
                           </a:solidFill>
                         </a:rPr>
-                        <a:t>+INR 1,78,915</a:t>
+                        <a:t>1,627 (40.7%)</a:t>
                       </a:r>
-                      <a:endParaRPr lang="en-US" sz="1200" dirty="0"/>
+                      <a:endParaRPr lang="en-US" sz="1100" dirty="0"/>
                     </a:p>
                   </a:txBody>
                   <a:tcPr marL="91440" marR="91440" marT="45720" marB="45720">
@@ -9059,74 +9133,14 @@
                         <a:buNone/>
                       </a:pPr>
                       <a:r>
-                        <a:rPr lang="en-US" sz="1200" b="1" dirty="0">
-                          <a:solidFill>
-                            <a:srgbClr val="2E7D32"/>
-                          </a:solidFill>
-                        </a:rPr>
-                        <a:t>57.8%</a:t>
-                      </a:r>
-                      <a:endParaRPr lang="en-US" sz="1200" dirty="0"/>
-                    </a:p>
-                  </a:txBody>
-                  <a:tcPr marL="91440" marR="91440" marT="45720" marB="45720">
-                    <a:lnL w="12700" cap="flat" cmpd="sng" algn="ctr">
-                      <a:solidFill>
-                        <a:srgbClr val="CCCCCC"/>
-                      </a:solidFill>
-                      <a:prstDash val="solid"/>
-                      <a:round/>
-                      <a:headEnd type="none" w="med" len="med"/>
-                      <a:tailEnd type="none" w="med" len="med"/>
-                    </a:lnL>
-                    <a:lnR w="12700" cap="flat" cmpd="sng" algn="ctr">
-                      <a:solidFill>
-                        <a:srgbClr val="CCCCCC"/>
-                      </a:solidFill>
-                      <a:prstDash val="solid"/>
-                      <a:round/>
-                      <a:headEnd type="none" w="med" len="med"/>
-                      <a:tailEnd type="none" w="med" len="med"/>
-                    </a:lnR>
-                    <a:lnT w="12700" cap="flat" cmpd="sng" algn="ctr">
-                      <a:solidFill>
-                        <a:srgbClr val="CCCCCC"/>
-                      </a:solidFill>
-                      <a:prstDash val="solid"/>
-                      <a:round/>
-                      <a:headEnd type="none" w="med" len="med"/>
-                      <a:tailEnd type="none" w="med" len="med"/>
-                    </a:lnT>
-                    <a:lnB w="12700" cap="flat" cmpd="sng" algn="ctr">
-                      <a:solidFill>
-                        <a:srgbClr val="CCCCCC"/>
-                      </a:solidFill>
-                      <a:prstDash val="solid"/>
-                      <a:round/>
-                      <a:headEnd type="none" w="med" len="med"/>
-                      <a:tailEnd type="none" w="med" len="med"/>
-                    </a:lnB>
-                  </a:tcPr>
-                </a:tc>
-              </a:tr>
-              <a:tr h="525780">
-                <a:tc>
-                  <a:txBody>
-                    <a:bodyPr/>
-                    <a:lstStyle/>
-                    <a:p>
-                      <a:pPr algn="ctr" indent="0" marL="0">
-                        <a:buNone/>
-                      </a:pPr>
-                      <a:r>
-                        <a:rPr lang="en-US" sz="1200" b="1" dirty="0">
+                        <a:rPr lang="en-US" sz="1100" dirty="0">
                           <a:solidFill>
                             <a:srgbClr val="000000"/>
                           </a:solidFill>
                         </a:rPr>
-                        <a:t>Rabi (Winter)</a:t>
+                        <a:t>5.08 t/ha</a:t>
                       </a:r>
-                      <a:endParaRPr lang="en-US" sz="1200" dirty="0"/>
+                      <a:endParaRPr lang="en-US" sz="1100" dirty="0"/>
                     </a:p>
                   </a:txBody>
                   <a:tcPr marL="91440" marR="91440" marT="45720" marB="45720">
@@ -9177,14 +9191,14 @@
                         <a:buNone/>
                       </a:pPr>
                       <a:r>
-                        <a:rPr lang="en-US" sz="1200" dirty="0">
+                        <a:rPr lang="en-US" sz="1100" b="1" dirty="0">
                           <a:solidFill>
-                            <a:srgbClr val="000000"/>
+                            <a:srgbClr val="2E7D32"/>
                           </a:solidFill>
                         </a:rPr>
-                        <a:t>1,627 (40.7%)</a:t>
+                        <a:t>+₹87,689</a:t>
                       </a:r>
-                      <a:endParaRPr lang="en-US" sz="1200" dirty="0"/>
+                      <a:endParaRPr lang="en-US" sz="1100" dirty="0"/>
                     </a:p>
                   </a:txBody>
                   <a:tcPr marL="91440" marR="91440" marT="45720" marB="45720">
@@ -9235,14 +9249,74 @@
                         <a:buNone/>
                       </a:pPr>
                       <a:r>
-                        <a:rPr lang="en-US" sz="1200" dirty="0">
+                        <a:rPr lang="en-US" sz="1100" dirty="0">
                           <a:solidFill>
                             <a:srgbClr val="000000"/>
                           </a:solidFill>
                         </a:rPr>
-                        <a:t>5.08 t/ha</a:t>
+                        <a:t>48.9%</a:t>
                       </a:r>
-                      <a:endParaRPr lang="en-US" sz="1200" dirty="0"/>
+                      <a:endParaRPr lang="en-US" sz="1100" dirty="0"/>
+                    </a:p>
+                  </a:txBody>
+                  <a:tcPr marL="91440" marR="91440" marT="45720" marB="45720">
+                    <a:lnL w="12700" cap="flat" cmpd="sng" algn="ctr">
+                      <a:solidFill>
+                        <a:srgbClr val="CCCCCC"/>
+                      </a:solidFill>
+                      <a:prstDash val="solid"/>
+                      <a:round/>
+                      <a:headEnd type="none" w="med" len="med"/>
+                      <a:tailEnd type="none" w="med" len="med"/>
+                    </a:lnL>
+                    <a:lnR w="12700" cap="flat" cmpd="sng" algn="ctr">
+                      <a:solidFill>
+                        <a:srgbClr val="CCCCCC"/>
+                      </a:solidFill>
+                      <a:prstDash val="solid"/>
+                      <a:round/>
+                      <a:headEnd type="none" w="med" len="med"/>
+                      <a:tailEnd type="none" w="med" len="med"/>
+                    </a:lnR>
+                    <a:lnT w="12700" cap="flat" cmpd="sng" algn="ctr">
+                      <a:solidFill>
+                        <a:srgbClr val="CCCCCC"/>
+                      </a:solidFill>
+                      <a:prstDash val="solid"/>
+                      <a:round/>
+                      <a:headEnd type="none" w="med" len="med"/>
+                      <a:tailEnd type="none" w="med" len="med"/>
+                    </a:lnT>
+                    <a:lnB w="12700" cap="flat" cmpd="sng" algn="ctr">
+                      <a:solidFill>
+                        <a:srgbClr val="CCCCCC"/>
+                      </a:solidFill>
+                      <a:prstDash val="solid"/>
+                      <a:round/>
+                      <a:headEnd type="none" w="med" len="med"/>
+                      <a:tailEnd type="none" w="med" len="med"/>
+                    </a:lnB>
+                  </a:tcPr>
+                </a:tc>
+              </a:tr>
+              <a:tr h="548640">
+                <a:tc>
+                  <a:txBody>
+                    <a:bodyPr/>
+                    <a:lstStyle/>
+                    <a:p>
+                      <a:pPr algn="ctr" indent="0" marL="0">
+                        <a:buNone/>
+                      </a:pPr>
+                      <a:r>
+                        <a:rPr lang="en-US" sz="1100" dirty="0">
+                          <a:solidFill>
+                            <a:srgbClr val="000000"/>
+                          </a:solidFill>
+                        </a:rPr>
+                        <a:t>Zaid (Summer)</a:t>
+                      </a:r>
+                      <a:endParaRPr lang="en-US" sz="1100" dirty="0"/>
                     </a:p>
                   </a:txBody>
                   <a:tcPr marL="91440" marR="91440" marT="45720" marB="45720">
@@ -9293,14 +9367,14 @@
                         <a:buNone/>
                       </a:pPr>
                       <a:r>
-                        <a:rPr lang="en-US" sz="1200" dirty="0">
+                        <a:rPr lang="en-US" sz="1100" dirty="0">
                           <a:solidFill>
                             <a:srgbClr val="000000"/>
                           </a:solidFill>
                         </a:rPr>
-                        <a:t>INR 5,13,837</a:t>
+                        <a:t>594 (14.8%)</a:t>
                       </a:r>
-                      <a:endParaRPr lang="en-US" sz="1200" dirty="0"/>
+                      <a:endParaRPr lang="en-US" sz="1100" dirty="0"/>
                     </a:p>
                   </a:txBody>
                   <a:tcPr marL="91440" marR="91440" marT="45720" marB="45720">
@@ -9351,14 +9425,14 @@
                         <a:buNone/>
                       </a:pPr>
                       <a:r>
-                        <a:rPr lang="en-US" sz="1200" dirty="0">
+                        <a:rPr lang="en-US" sz="1100" dirty="0">
                           <a:solidFill>
                             <a:srgbClr val="000000"/>
                           </a:solidFill>
                         </a:rPr>
-                        <a:t>INR 6,01,526</a:t>
+                        <a:t>4.67 t/ha</a:t>
                       </a:r>
-                      <a:endParaRPr lang="en-US" sz="1200" dirty="0"/>
+                      <a:endParaRPr lang="en-US" sz="1100" dirty="0"/>
                     </a:p>
                   </a:txBody>
                   <a:tcPr marL="91440" marR="91440" marT="45720" marB="45720">
@@ -9409,14 +9483,14 @@
                         <a:buNone/>
                       </a:pPr>
                       <a:r>
-                        <a:rPr lang="en-US" sz="1200" b="1" dirty="0">
+                        <a:rPr lang="en-US" sz="1100" b="1" dirty="0">
                           <a:solidFill>
-                            <a:srgbClr val="2E7D32"/>
+                            <a:srgbClr val="C62828"/>
                           </a:solidFill>
                         </a:rPr>
-                        <a:t>+INR 87,689</a:t>
+                        <a:t>-₹24,805</a:t>
                       </a:r>
-                      <a:endParaRPr lang="en-US" sz="1200" dirty="0"/>
+                      <a:endParaRPr lang="en-US" sz="1100" dirty="0"/>
                     </a:p>
                   </a:txBody>
                   <a:tcPr marL="91440" marR="91440" marT="45720" marB="45720">
@@ -9467,422 +9541,14 @@
                         <a:buNone/>
                       </a:pPr>
                       <a:r>
-                        <a:rPr lang="en-US" sz="1200" dirty="0">
-                          <a:solidFill>
-                            <a:srgbClr val="000000"/>
-                          </a:solidFill>
-                        </a:rPr>
-                        <a:t>48.9%</a:t>
-                      </a:r>
-                      <a:endParaRPr lang="en-US" sz="1200" dirty="0"/>
-                    </a:p>
-                  </a:txBody>
-                  <a:tcPr marL="91440" marR="91440" marT="45720" marB="45720">
-                    <a:lnL w="12700" cap="flat" cmpd="sng" algn="ctr">
-                      <a:solidFill>
-                        <a:srgbClr val="CCCCCC"/>
-                      </a:solidFill>
-                      <a:prstDash val="solid"/>
-                      <a:round/>
-                      <a:headEnd type="none" w="med" len="med"/>
-                      <a:tailEnd type="none" w="med" len="med"/>
-                    </a:lnL>
-                    <a:lnR w="12700" cap="flat" cmpd="sng" algn="ctr">
-                      <a:solidFill>
-                        <a:srgbClr val="CCCCCC"/>
-                      </a:solidFill>
-                      <a:prstDash val="solid"/>
-                      <a:round/>
-                      <a:headEnd type="none" w="med" len="med"/>
-                      <a:tailEnd type="none" w="med" len="med"/>
-                    </a:lnR>
-                    <a:lnT w="12700" cap="flat" cmpd="sng" algn="ctr">
-                      <a:solidFill>
-                        <a:srgbClr val="CCCCCC"/>
-                      </a:solidFill>
-                      <a:prstDash val="solid"/>
-                      <a:round/>
-                      <a:headEnd type="none" w="med" len="med"/>
-                      <a:tailEnd type="none" w="med" len="med"/>
-                    </a:lnT>
-                    <a:lnB w="12700" cap="flat" cmpd="sng" algn="ctr">
-                      <a:solidFill>
-                        <a:srgbClr val="CCCCCC"/>
-                      </a:solidFill>
-                      <a:prstDash val="solid"/>
-                      <a:round/>
-                      <a:headEnd type="none" w="med" len="med"/>
-                      <a:tailEnd type="none" w="med" len="med"/>
-                    </a:lnB>
-                  </a:tcPr>
-                </a:tc>
-              </a:tr>
-              <a:tr h="525780">
-                <a:tc>
-                  <a:txBody>
-                    <a:bodyPr/>
-                    <a:lstStyle/>
-                    <a:p>
-                      <a:pPr algn="ctr" indent="0" marL="0">
-                        <a:buNone/>
-                      </a:pPr>
-                      <a:r>
-                        <a:rPr lang="en-US" sz="1200" b="1" dirty="0">
-                          <a:solidFill>
-                            <a:srgbClr val="000000"/>
-                          </a:solidFill>
-                        </a:rPr>
-                        <a:t>Zaid (Summer)</a:t>
-                      </a:r>
-                      <a:endParaRPr lang="en-US" sz="1200" dirty="0"/>
-                    </a:p>
-                  </a:txBody>
-                  <a:tcPr marL="91440" marR="91440" marT="45720" marB="45720">
-                    <a:lnL w="12700" cap="flat" cmpd="sng" algn="ctr">
-                      <a:solidFill>
-                        <a:srgbClr val="CCCCCC"/>
-                      </a:solidFill>
-                      <a:prstDash val="solid"/>
-                      <a:round/>
-                      <a:headEnd type="none" w="med" len="med"/>
-                      <a:tailEnd type="none" w="med" len="med"/>
-                    </a:lnL>
-                    <a:lnR w="12700" cap="flat" cmpd="sng" algn="ctr">
-                      <a:solidFill>
-                        <a:srgbClr val="CCCCCC"/>
-                      </a:solidFill>
-                      <a:prstDash val="solid"/>
-                      <a:round/>
-                      <a:headEnd type="none" w="med" len="med"/>
-                      <a:tailEnd type="none" w="med" len="med"/>
-                    </a:lnR>
-                    <a:lnT w="12700" cap="flat" cmpd="sng" algn="ctr">
-                      <a:solidFill>
-                        <a:srgbClr val="CCCCCC"/>
-                      </a:solidFill>
-                      <a:prstDash val="solid"/>
-                      <a:round/>
-                      <a:headEnd type="none" w="med" len="med"/>
-                      <a:tailEnd type="none" w="med" len="med"/>
-                    </a:lnT>
-                    <a:lnB w="12700" cap="flat" cmpd="sng" algn="ctr">
-                      <a:solidFill>
-                        <a:srgbClr val="CCCCCC"/>
-                      </a:solidFill>
-                      <a:prstDash val="solid"/>
-                      <a:round/>
-                      <a:headEnd type="none" w="med" len="med"/>
-                      <a:tailEnd type="none" w="med" len="med"/>
-                    </a:lnB>
-                  </a:tcPr>
-                </a:tc>
-                <a:tc>
-                  <a:txBody>
-                    <a:bodyPr/>
-                    <a:lstStyle/>
-                    <a:p>
-                      <a:pPr algn="ctr" indent="0" marL="0">
-                        <a:buNone/>
-                      </a:pPr>
-                      <a:r>
-                        <a:rPr lang="en-US" sz="1200" dirty="0">
-                          <a:solidFill>
-                            <a:srgbClr val="000000"/>
-                          </a:solidFill>
-                        </a:rPr>
-                        <a:t>594 (14.8%)</a:t>
-                      </a:r>
-                      <a:endParaRPr lang="en-US" sz="1200" dirty="0"/>
-                    </a:p>
-                  </a:txBody>
-                  <a:tcPr marL="91440" marR="91440" marT="45720" marB="45720">
-                    <a:lnL w="12700" cap="flat" cmpd="sng" algn="ctr">
-                      <a:solidFill>
-                        <a:srgbClr val="CCCCCC"/>
-                      </a:solidFill>
-                      <a:prstDash val="solid"/>
-                      <a:round/>
-                      <a:headEnd type="none" w="med" len="med"/>
-                      <a:tailEnd type="none" w="med" len="med"/>
-                    </a:lnL>
-                    <a:lnR w="12700" cap="flat" cmpd="sng" algn="ctr">
-                      <a:solidFill>
-                        <a:srgbClr val="CCCCCC"/>
-                      </a:solidFill>
-                      <a:prstDash val="solid"/>
-                      <a:round/>
-                      <a:headEnd type="none" w="med" len="med"/>
-                      <a:tailEnd type="none" w="med" len="med"/>
-                    </a:lnR>
-                    <a:lnT w="12700" cap="flat" cmpd="sng" algn="ctr">
-                      <a:solidFill>
-                        <a:srgbClr val="CCCCCC"/>
-                      </a:solidFill>
-                      <a:prstDash val="solid"/>
-                      <a:round/>
-                      <a:headEnd type="none" w="med" len="med"/>
-                      <a:tailEnd type="none" w="med" len="med"/>
-                    </a:lnT>
-                    <a:lnB w="12700" cap="flat" cmpd="sng" algn="ctr">
-                      <a:solidFill>
-                        <a:srgbClr val="CCCCCC"/>
-                      </a:solidFill>
-                      <a:prstDash val="solid"/>
-                      <a:round/>
-                      <a:headEnd type="none" w="med" len="med"/>
-                      <a:tailEnd type="none" w="med" len="med"/>
-                    </a:lnB>
-                  </a:tcPr>
-                </a:tc>
-                <a:tc>
-                  <a:txBody>
-                    <a:bodyPr/>
-                    <a:lstStyle/>
-                    <a:p>
-                      <a:pPr algn="ctr" indent="0" marL="0">
-                        <a:buNone/>
-                      </a:pPr>
-                      <a:r>
-                        <a:rPr lang="en-US" sz="1200" dirty="0">
-                          <a:solidFill>
-                            <a:srgbClr val="000000"/>
-                          </a:solidFill>
-                        </a:rPr>
-                        <a:t>4.67 t/ha</a:t>
-                      </a:r>
-                      <a:endParaRPr lang="en-US" sz="1200" dirty="0"/>
-                    </a:p>
-                  </a:txBody>
-                  <a:tcPr marL="91440" marR="91440" marT="45720" marB="45720">
-                    <a:lnL w="12700" cap="flat" cmpd="sng" algn="ctr">
-                      <a:solidFill>
-                        <a:srgbClr val="CCCCCC"/>
-                      </a:solidFill>
-                      <a:prstDash val="solid"/>
-                      <a:round/>
-                      <a:headEnd type="none" w="med" len="med"/>
-                      <a:tailEnd type="none" w="med" len="med"/>
-                    </a:lnL>
-                    <a:lnR w="12700" cap="flat" cmpd="sng" algn="ctr">
-                      <a:solidFill>
-                        <a:srgbClr val="CCCCCC"/>
-                      </a:solidFill>
-                      <a:prstDash val="solid"/>
-                      <a:round/>
-                      <a:headEnd type="none" w="med" len="med"/>
-                      <a:tailEnd type="none" w="med" len="med"/>
-                    </a:lnR>
-                    <a:lnT w="12700" cap="flat" cmpd="sng" algn="ctr">
-                      <a:solidFill>
-                        <a:srgbClr val="CCCCCC"/>
-                      </a:solidFill>
-                      <a:prstDash val="solid"/>
-                      <a:round/>
-                      <a:headEnd type="none" w="med" len="med"/>
-                      <a:tailEnd type="none" w="med" len="med"/>
-                    </a:lnT>
-                    <a:lnB w="12700" cap="flat" cmpd="sng" algn="ctr">
-                      <a:solidFill>
-                        <a:srgbClr val="CCCCCC"/>
-                      </a:solidFill>
-                      <a:prstDash val="solid"/>
-                      <a:round/>
-                      <a:headEnd type="none" w="med" len="med"/>
-                      <a:tailEnd type="none" w="med" len="med"/>
-                    </a:lnB>
-                  </a:tcPr>
-                </a:tc>
-                <a:tc>
-                  <a:txBody>
-                    <a:bodyPr/>
-                    <a:lstStyle/>
-                    <a:p>
-                      <a:pPr algn="ctr" indent="0" marL="0">
-                        <a:buNone/>
-                      </a:pPr>
-                      <a:r>
-                        <a:rPr lang="en-US" sz="1200" dirty="0">
-                          <a:solidFill>
-                            <a:srgbClr val="000000"/>
-                          </a:solidFill>
-                        </a:rPr>
-                        <a:t>INR 5,43,977</a:t>
-                      </a:r>
-                      <a:endParaRPr lang="en-US" sz="1200" dirty="0"/>
-                    </a:p>
-                  </a:txBody>
-                  <a:tcPr marL="91440" marR="91440" marT="45720" marB="45720">
-                    <a:lnL w="12700" cap="flat" cmpd="sng" algn="ctr">
-                      <a:solidFill>
-                        <a:srgbClr val="CCCCCC"/>
-                      </a:solidFill>
-                      <a:prstDash val="solid"/>
-                      <a:round/>
-                      <a:headEnd type="none" w="med" len="med"/>
-                      <a:tailEnd type="none" w="med" len="med"/>
-                    </a:lnL>
-                    <a:lnR w="12700" cap="flat" cmpd="sng" algn="ctr">
-                      <a:solidFill>
-                        <a:srgbClr val="CCCCCC"/>
-                      </a:solidFill>
-                      <a:prstDash val="solid"/>
-                      <a:round/>
-                      <a:headEnd type="none" w="med" len="med"/>
-                      <a:tailEnd type="none" w="med" len="med"/>
-                    </a:lnR>
-                    <a:lnT w="12700" cap="flat" cmpd="sng" algn="ctr">
-                      <a:solidFill>
-                        <a:srgbClr val="CCCCCC"/>
-                      </a:solidFill>
-                      <a:prstDash val="solid"/>
-                      <a:round/>
-                      <a:headEnd type="none" w="med" len="med"/>
-                      <a:tailEnd type="none" w="med" len="med"/>
-                    </a:lnT>
-                    <a:lnB w="12700" cap="flat" cmpd="sng" algn="ctr">
-                      <a:solidFill>
-                        <a:srgbClr val="CCCCCC"/>
-                      </a:solidFill>
-                      <a:prstDash val="solid"/>
-                      <a:round/>
-                      <a:headEnd type="none" w="med" len="med"/>
-                      <a:tailEnd type="none" w="med" len="med"/>
-                    </a:lnB>
-                  </a:tcPr>
-                </a:tc>
-                <a:tc>
-                  <a:txBody>
-                    <a:bodyPr/>
-                    <a:lstStyle/>
-                    <a:p>
-                      <a:pPr algn="ctr" indent="0" marL="0">
-                        <a:buNone/>
-                      </a:pPr>
-                      <a:r>
-                        <a:rPr lang="en-US" sz="1200" dirty="0">
-                          <a:solidFill>
-                            <a:srgbClr val="000000"/>
-                          </a:solidFill>
-                        </a:rPr>
-                        <a:t>INR 5,19,172</a:t>
-                      </a:r>
-                      <a:endParaRPr lang="en-US" sz="1200" dirty="0"/>
-                    </a:p>
-                  </a:txBody>
-                  <a:tcPr marL="91440" marR="91440" marT="45720" marB="45720">
-                    <a:lnL w="12700" cap="flat" cmpd="sng" algn="ctr">
-                      <a:solidFill>
-                        <a:srgbClr val="CCCCCC"/>
-                      </a:solidFill>
-                      <a:prstDash val="solid"/>
-                      <a:round/>
-                      <a:headEnd type="none" w="med" len="med"/>
-                      <a:tailEnd type="none" w="med" len="med"/>
-                    </a:lnL>
-                    <a:lnR w="12700" cap="flat" cmpd="sng" algn="ctr">
-                      <a:solidFill>
-                        <a:srgbClr val="CCCCCC"/>
-                      </a:solidFill>
-                      <a:prstDash val="solid"/>
-                      <a:round/>
-                      <a:headEnd type="none" w="med" len="med"/>
-                      <a:tailEnd type="none" w="med" len="med"/>
-                    </a:lnR>
-                    <a:lnT w="12700" cap="flat" cmpd="sng" algn="ctr">
-                      <a:solidFill>
-                        <a:srgbClr val="CCCCCC"/>
-                      </a:solidFill>
-                      <a:prstDash val="solid"/>
-                      <a:round/>
-                      <a:headEnd type="none" w="med" len="med"/>
-                      <a:tailEnd type="none" w="med" len="med"/>
-                    </a:lnT>
-                    <a:lnB w="12700" cap="flat" cmpd="sng" algn="ctr">
-                      <a:solidFill>
-                        <a:srgbClr val="CCCCCC"/>
-                      </a:solidFill>
-                      <a:prstDash val="solid"/>
-                      <a:round/>
-                      <a:headEnd type="none" w="med" len="med"/>
-                      <a:tailEnd type="none" w="med" len="med"/>
-                    </a:lnB>
-                  </a:tcPr>
-                </a:tc>
-                <a:tc>
-                  <a:txBody>
-                    <a:bodyPr/>
-                    <a:lstStyle/>
-                    <a:p>
-                      <a:pPr algn="ctr" indent="0" marL="0">
-                        <a:buNone/>
-                      </a:pPr>
-                      <a:r>
-                        <a:rPr lang="en-US" sz="1200" b="1" dirty="0">
-                          <a:solidFill>
-                            <a:srgbClr val="C62828"/>
-                          </a:solidFill>
-                        </a:rPr>
-                        <a:t>-INR 24,805</a:t>
-                      </a:r>
-                      <a:endParaRPr lang="en-US" sz="1200" dirty="0"/>
-                    </a:p>
-                  </a:txBody>
-                  <a:tcPr marL="91440" marR="91440" marT="45720" marB="45720">
-                    <a:lnL w="12700" cap="flat" cmpd="sng" algn="ctr">
-                      <a:solidFill>
-                        <a:srgbClr val="CCCCCC"/>
-                      </a:solidFill>
-                      <a:prstDash val="solid"/>
-                      <a:round/>
-                      <a:headEnd type="none" w="med" len="med"/>
-                      <a:tailEnd type="none" w="med" len="med"/>
-                    </a:lnL>
-                    <a:lnR w="12700" cap="flat" cmpd="sng" algn="ctr">
-                      <a:solidFill>
-                        <a:srgbClr val="CCCCCC"/>
-                      </a:solidFill>
-                      <a:prstDash val="solid"/>
-                      <a:round/>
-                      <a:headEnd type="none" w="med" len="med"/>
-                      <a:tailEnd type="none" w="med" len="med"/>
-                    </a:lnR>
-                    <a:lnT w="12700" cap="flat" cmpd="sng" algn="ctr">
-                      <a:solidFill>
-                        <a:srgbClr val="CCCCCC"/>
-                      </a:solidFill>
-                      <a:prstDash val="solid"/>
-                      <a:round/>
-                      <a:headEnd type="none" w="med" len="med"/>
-                      <a:tailEnd type="none" w="med" len="med"/>
-                    </a:lnT>
-                    <a:lnB w="12700" cap="flat" cmpd="sng" algn="ctr">
-                      <a:solidFill>
-                        <a:srgbClr val="CCCCCC"/>
-                      </a:solidFill>
-                      <a:prstDash val="solid"/>
-                      <a:round/>
-                      <a:headEnd type="none" w="med" len="med"/>
-                      <a:tailEnd type="none" w="med" len="med"/>
-                    </a:lnB>
-                  </a:tcPr>
-                </a:tc>
-                <a:tc>
-                  <a:txBody>
-                    <a:bodyPr/>
-                    <a:lstStyle/>
-                    <a:p>
-                      <a:pPr algn="ctr" indent="0" marL="0">
-                        <a:buNone/>
-                      </a:pPr>
-                      <a:r>
-                        <a:rPr lang="en-US" sz="1200" b="1" dirty="0">
+                        <a:rPr lang="en-US" sz="1100" b="1" dirty="0">
                           <a:solidFill>
                             <a:srgbClr val="C62828"/>
                           </a:solidFill>
                         </a:rPr>
                         <a:t>35.5%</a:t>
                       </a:r>
-                      <a:endParaRPr lang="en-US" sz="1200" dirty="0"/>
+                      <a:endParaRPr lang="en-US" sz="1100" dirty="0"/>
                     </a:p>
                   </a:txBody>
                   <a:tcPr marL="91440" marR="91440" marT="45720" marB="45720">
@@ -9929,78 +9595,6 @@
           </a:graphicData>
         </a:graphic>
       </p:graphicFrame>
-      <p:sp>
-        <p:nvSpPr>
-          <p:cNvPr id="7" name="Text 4"/>
-          <p:cNvSpPr/>
-          <p:nvPr/>
-        </p:nvSpPr>
-        <p:spPr>
-          <a:xfrm>
-            <a:off x="731520" y="3931920"/>
-            <a:ext cx="10698480" cy="2560320"/>
-          </a:xfrm>
-          <a:prstGeom prst="rect">
-            <a:avLst/>
-          </a:prstGeom>
-          <a:noFill/>
-          <a:ln/>
-        </p:spPr>
-        <p:txBody>
-          <a:bodyPr wrap="square" rtlCol="0" anchor="ctr"/>
-          <a:lstStyle/>
-          <a:p>
-            <a:pPr indent="0" marL="0">
-              <a:buNone/>
-            </a:pPr>
-            <a:r>
-              <a:rPr lang="en-US" sz="1450" b="1" dirty="0">
-                <a:solidFill>
-                  <a:srgbClr val="003366"/>
-                </a:solidFill>
-              </a:rPr>
-              <a:t>Key Findings:
-</a:t>
-            </a:r>
-            <a:pPr indent="0" marL="0">
-              <a:buNone/>
-            </a:pPr>
-            <a:r>
-              <a:rPr lang="en-US" sz="1300" dirty="0">
-                <a:solidFill>
-                  <a:srgbClr val="222222"/>
-                </a:solidFill>
-              </a:rPr>
-              <a:t>• Kharif generates the highest average net return (+INR 1.79 Lakh) driven by sugarcane tonnage and monsoon rainwater availability.
-</a:t>
-            </a:r>
-            <a:pPr indent="0" marL="0">
-              <a:buNone/>
-            </a:pPr>
-            <a:r>
-              <a:rPr lang="en-US" sz="1300" dirty="0">
-                <a:solidFill>
-                  <a:srgbClr val="222222"/>
-                </a:solidFill>
-              </a:rPr>
-              <a:t>• Rabi delivers stable economic performance (+INR 87.7K) with low temperature variability, though cereal margins are compressed.
-</a:t>
-            </a:r>
-            <a:pPr indent="0" marL="0">
-              <a:buNone/>
-            </a:pPr>
-            <a:r>
-              <a:rPr lang="en-US" sz="1300" b="1" dirty="0">
-                <a:solidFill>
-                  <a:srgbClr val="C62828"/>
-                </a:solidFill>
-              </a:rPr>
-              <a:t>• Critical Zaid Deficit: Summer season records an average NET LOSS (-INR 24.8K). Almost two-thirds of summer farms (64.5%) lose money due to high irrigation pumping bills and heat-induced yield suppression.</a:t>
-            </a:r>
-            <a:endParaRPr lang="en-US" sz="1450" dirty="0"/>
-          </a:p>
-        </p:txBody>
-      </p:sp>
     </p:spTree>
   </p:cSld>
   <p:clrMapOvr>
@@ -10042,7 +9636,7 @@
         <p:spPr>
           <a:xfrm>
             <a:off x="0" y="0"/>
-            <a:ext cx="9144000" cy="914400"/>
+            <a:ext cx="9144000" cy="822960"/>
           </a:xfrm>
           <a:prstGeom prst="rect">
             <a:avLst/>
@@ -10061,8 +9655,8 @@
         </p:nvSpPr>
         <p:spPr>
           <a:xfrm>
-            <a:off x="731520" y="137160"/>
-            <a:ext cx="9144000" cy="640080"/>
+            <a:off x="731520" y="109728"/>
+            <a:ext cx="8686800" cy="594360"/>
           </a:xfrm>
           <a:prstGeom prst="rect">
             <a:avLst/>
@@ -10078,14 +9672,14 @@
               <a:buNone/>
             </a:pPr>
             <a:r>
-              <a:rPr lang="en-US" sz="2400" b="1" dirty="0">
+              <a:rPr lang="en-US" sz="2200" b="1" dirty="0">
                 <a:solidFill>
                   <a:srgbClr val="FFFFFF"/>
                 </a:solidFill>
               </a:rPr>
-              <a:t>Results: Environmental &amp; Soil Dynamics</a:t>
-            </a:r>
-            <a:endParaRPr lang="en-US" sz="2400" dirty="0"/>
+              <a:t>RESULTS: Climatological Dynamics &amp; Correlation Analysis</a:t>
+            </a:r>
+            <a:endParaRPr lang="en-US" sz="2200" dirty="0"/>
           </a:p>
         </p:txBody>
       </p:sp>
@@ -10097,8 +9691,8 @@
         </p:nvSpPr>
         <p:spPr>
           <a:xfrm>
-            <a:off x="8686800" y="228600"/>
-            <a:ext cx="2926080" cy="457200"/>
+            <a:off x="8412480" y="182880"/>
+            <a:ext cx="3200400" cy="411480"/>
           </a:xfrm>
           <a:prstGeom prst="rect">
             <a:avLst/>
@@ -10119,22 +9713,46 @@
                   <a:srgbClr val="BBDEFB"/>
                 </a:solidFill>
               </a:rPr>
-              <a:t>Slide 7 of 14</a:t>
+              <a:t>Slide 7 of 14 [Code Output]</a:t>
             </a:r>
             <a:endParaRPr lang="en-US" sz="1100" dirty="0"/>
           </a:p>
         </p:txBody>
       </p:sp>
-      <p:sp>
-        <p:nvSpPr>
-          <p:cNvPr id="5" name="Shape 3"/>
+      <p:pic>
+        <p:nvPicPr>
+          <p:cNvPr id="5" name="Image 0" descr="C:/Users/ocotp/.gemini/antigravity/brain/2b64254e-8329-498c-9b37-019e1b1a9e41/.user_uploaded/media_1788676491659.png">    </p:cNvPr>
+          <p:cNvPicPr>
+            <a:picLocks noChangeAspect="1"/>
+          </p:cNvPicPr>
+          <p:nvPr/>
+        </p:nvPicPr>
+        <p:blipFill>
+          <a:blip r:embed="rId1"/>
+          <a:stretch>
+            <a:fillRect/>
+          </a:stretch>
+        </p:blipFill>
+        <p:spPr>
+          <a:xfrm>
+            <a:off x="731520" y="1005840"/>
+            <a:ext cx="6583680" cy="2926080"/>
+          </a:xfrm>
+          <a:prstGeom prst="rect">
+            <a:avLst/>
+          </a:prstGeom>
+        </p:spPr>
+      </p:pic>
+      <p:sp>
+        <p:nvSpPr>
+          <p:cNvPr id="6" name="Shape 3"/>
           <p:cNvSpPr/>
           <p:nvPr/>
         </p:nvSpPr>
         <p:spPr>
           <a:xfrm>
-            <a:off x="731520" y="1188720"/>
-            <a:ext cx="5212080" cy="2377440"/>
+            <a:off x="7498080" y="1005840"/>
+            <a:ext cx="3931920" cy="5303520"/>
           </a:xfrm>
           <a:prstGeom prst="roundRect">
             <a:avLst/>
@@ -10152,14 +9770,14 @@
       </p:sp>
       <p:sp>
         <p:nvSpPr>
-          <p:cNvPr id="6" name="Text 4"/>
+          <p:cNvPr id="7" name="Text 4"/>
           <p:cNvSpPr/>
           <p:nvPr/>
         </p:nvSpPr>
         <p:spPr>
           <a:xfrm>
-            <a:off x="914400" y="1325880"/>
-            <a:ext cx="4846320" cy="365760"/>
+            <a:off x="7635240" y="1143000"/>
+            <a:ext cx="3657600" cy="5029200"/>
           </a:xfrm>
           <a:prstGeom prst="rect">
             <a:avLst/>
@@ -10175,484 +9793,1533 @@
               <a:buNone/>
             </a:pPr>
             <a:r>
-              <a:rPr lang="en-US" sz="1500" b="1" dirty="0">
+              <a:rPr lang="en-US" sz="1400" b="1" dirty="0">
                 <a:solidFill>
                   <a:srgbClr val="003366"/>
                 </a:solidFill>
               </a:rPr>
-              <a:t>🌧️ Rainfall Dynamics</a:t>
-            </a:r>
-            <a:endParaRPr lang="en-US" sz="1500" dirty="0"/>
-          </a:p>
-        </p:txBody>
-      </p:sp>
-      <p:sp>
-        <p:nvSpPr>
-          <p:cNvPr id="7" name="Text 5"/>
-          <p:cNvSpPr/>
-          <p:nvPr/>
-        </p:nvSpPr>
-        <p:spPr>
-          <a:xfrm>
-            <a:off x="914400" y="1737360"/>
-            <a:ext cx="4846320" cy="1645920"/>
-          </a:xfrm>
-          <a:prstGeom prst="rect">
-            <a:avLst/>
-          </a:prstGeom>
-          <a:noFill/>
-          <a:ln/>
-        </p:spPr>
-        <p:txBody>
-          <a:bodyPr wrap="square" rtlCol="0" anchor="ctr"/>
-          <a:lstStyle/>
-          <a:p>
+              <a:t>Correlation &amp; Climate Insights:
+</a:t>
+            </a:r>
             <a:pPr indent="0" marL="0">
               <a:buNone/>
             </a:pPr>
             <a:r>
-              <a:rPr lang="en-US" sz="1250" dirty="0">
+              <a:rPr lang="en-US" sz="1250" b="1" dirty="0">
+                <a:solidFill>
+                  <a:srgbClr val="006699"/>
+                </a:solidFill>
+              </a:rPr>
+              <a:t>• Figure 2A (Correlation Heatmap):
+</a:t>
+            </a:r>
+            <a:pPr indent="0" marL="0">
+              <a:buNone/>
+            </a:pPr>
+            <a:r>
+              <a:rPr lang="en-US" sz="1150" dirty="0">
                 <a:solidFill>
                   <a:srgbClr val="222222"/>
                 </a:solidFill>
               </a:rPr>
-              <a:t>• Kharif: 852.1 mm average (peaks up to 1,395 mm).</a:t>
-            </a:r>
-            <a:endParaRPr lang="en-US" sz="1250" dirty="0"/>
+              <a:t>  - Rainfall vs Pest Risk (r = +0.62) &amp; Humidity vs Pest Risk (r = +0.55): Confirms moist monsoon conditions trigger disease outbreaks.
+  - Soil Moisture vs Rainfall (r = +0.52): Strong hydrologic coupling.
+  - Pesticide vs Pest Risk (r = -0.47): Protective effect of timely chemical control.
+</a:t>
+            </a:r>
+            <a:pPr indent="0" marL="0">
+              <a:buNone/>
+            </a:pPr>
+            <a:r>
+              <a:rPr lang="en-US" sz="1250" b="1" dirty="0">
+                <a:solidFill>
+                  <a:srgbClr val="006699"/>
+                </a:solidFill>
+              </a:rPr>
+              <a:t>• Figure 2B (Rainfall vs Yield Scatter):
+</a:t>
+            </a:r>
+            <a:pPr indent="0" marL="0">
+              <a:buNone/>
+            </a:pPr>
+            <a:r>
+              <a:rPr lang="en-US" sz="1150" dirty="0">
+                <a:solidFill>
+                  <a:srgbClr val="222222"/>
+                </a:solidFill>
+              </a:rPr>
+              <a:t>  - Flat regression slope indicates that sheer rainfall volume alone does not guarantee higher yield—drainage and crop choice are critical.</a:t>
+            </a:r>
+            <a:endParaRPr lang="en-US" sz="1400" dirty="0"/>
           </a:p>
           <a:p>
             <a:pPr indent="0" marL="0">
               <a:buNone/>
             </a:pPr>
             <a:r>
-              <a:rPr lang="en-US" sz="1250" dirty="0">
+              <a:rPr lang="en-US" sz="1150" dirty="0">
                 <a:solidFill>
                   <a:srgbClr val="222222"/>
                 </a:solidFill>
               </a:rPr>
-              <a:t>• Rabi: 436.0 mm average.</a:t>
-            </a:r>
-            <a:endParaRPr lang="en-US" sz="1250" dirty="0"/>
-          </a:p>
-          <a:p>
-            <a:pPr indent="0" marL="0">
-              <a:buNone/>
-            </a:pPr>
-            <a:r>
-              <a:rPr lang="en-US" sz="1250" dirty="0">
-                <a:solidFill>
-                  <a:srgbClr val="222222"/>
-                </a:solidFill>
-              </a:rPr>
-              <a:t>• Zaid: 299.4 mm average.</a:t>
-            </a:r>
-            <a:endParaRPr lang="en-US" sz="1250" dirty="0"/>
-          </a:p>
-          <a:p>
-            <a:pPr indent="0" marL="0">
-              <a:buNone/>
-            </a:pPr>
-            <a:r>
-              <a:rPr lang="en-US" sz="1250" dirty="0">
-                <a:solidFill>
-                  <a:srgbClr val="222222"/>
-                </a:solidFill>
-              </a:rPr>
-              <a:t>Insight: Summer agriculture cannot rely on ambient precipitation; irrigation is 100% compulsory.</a:t>
-            </a:r>
-            <a:endParaRPr lang="en-US" sz="1250" dirty="0"/>
+              <a:t>  - Sugarcane (points at top) thrives in Kharif (&gt;800 mm rain).</a:t>
+            </a:r>
+            <a:endParaRPr lang="en-US" sz="1400" dirty="0"/>
           </a:p>
         </p:txBody>
       </p:sp>
-      <p:sp>
-        <p:nvSpPr>
-          <p:cNvPr id="8" name="Shape 6"/>
-          <p:cNvSpPr/>
-          <p:nvPr/>
-        </p:nvSpPr>
-        <p:spPr>
-          <a:xfrm>
-            <a:off x="6217920" y="1188720"/>
-            <a:ext cx="5212080" cy="2377440"/>
-          </a:xfrm>
-          <a:prstGeom prst="roundRect">
-            <a:avLst/>
-          </a:prstGeom>
-          <a:solidFill>
-            <a:srgbClr val="FFFFFF"/>
-          </a:solidFill>
-          <a:ln w="12700">
-            <a:solidFill>
-              <a:srgbClr val="B0BEC5"/>
-            </a:solidFill>
-            <a:prstDash val="solid"/>
-          </a:ln>
-        </p:spPr>
-      </p:sp>
-      <p:sp>
-        <p:nvSpPr>
-          <p:cNvPr id="9" name="Text 7"/>
-          <p:cNvSpPr/>
-          <p:nvPr/>
-        </p:nvSpPr>
-        <p:spPr>
-          <a:xfrm>
-            <a:off x="6400800" y="1325880"/>
-            <a:ext cx="4846320" cy="365760"/>
-          </a:xfrm>
-          <a:prstGeom prst="rect">
-            <a:avLst/>
-          </a:prstGeom>
-          <a:noFill/>
-          <a:ln/>
-        </p:spPr>
-        <p:txBody>
-          <a:bodyPr wrap="square" rtlCol="0" anchor="ctr"/>
-          <a:lstStyle/>
-          <a:p>
-            <a:pPr indent="0" marL="0">
-              <a:buNone/>
-            </a:pPr>
-            <a:r>
-              <a:rPr lang="en-US" sz="1500" b="1" dirty="0">
-                <a:solidFill>
-                  <a:srgbClr val="003366"/>
-                </a:solidFill>
-              </a:rPr>
-              <a:t>🌡️ Thermal &amp; Solar Patterns</a:t>
-            </a:r>
-            <a:endParaRPr lang="en-US" sz="1500" dirty="0"/>
-          </a:p>
-        </p:txBody>
-      </p:sp>
-      <p:sp>
-        <p:nvSpPr>
-          <p:cNvPr id="10" name="Text 8"/>
-          <p:cNvSpPr/>
-          <p:nvPr/>
-        </p:nvSpPr>
-        <p:spPr>
-          <a:xfrm>
-            <a:off x="6400800" y="1737360"/>
-            <a:ext cx="4846320" cy="1645920"/>
-          </a:xfrm>
-          <a:prstGeom prst="rect">
-            <a:avLst/>
-          </a:prstGeom>
-          <a:noFill/>
-          <a:ln/>
-        </p:spPr>
-        <p:txBody>
-          <a:bodyPr wrap="square" rtlCol="0" anchor="ctr"/>
-          <a:lstStyle/>
-          <a:p>
-            <a:pPr indent="0" marL="0">
-              <a:buNone/>
-            </a:pPr>
-            <a:r>
-              <a:rPr lang="en-US" sz="1250" dirty="0">
-                <a:solidFill>
-                  <a:srgbClr val="222222"/>
-                </a:solidFill>
-              </a:rPr>
-              <a:t>• Temperature: Zaid averages 31.0°C (peaks at 39.7°C) vs Rabi at 23.5°C.</a:t>
-            </a:r>
-            <a:endParaRPr lang="en-US" sz="1250" dirty="0"/>
-          </a:p>
-          <a:p>
-            <a:pPr indent="0" marL="0">
-              <a:buNone/>
-            </a:pPr>
-            <a:r>
-              <a:rPr lang="en-US" sz="1250" dirty="0">
-                <a:solidFill>
-                  <a:srgbClr val="222222"/>
-                </a:solidFill>
-              </a:rPr>
-              <a:t>• Sunlight Hours: Zaid receives 8.18 hrs/day vs Kharif at 6.79 hrs/day.</a:t>
-            </a:r>
-            <a:endParaRPr lang="en-US" sz="1250" dirty="0"/>
-          </a:p>
-          <a:p>
-            <a:pPr indent="0" marL="0">
-              <a:buNone/>
-            </a:pPr>
-            <a:r>
-              <a:rPr lang="en-US" sz="1250" dirty="0">
-                <a:solidFill>
-                  <a:srgbClr val="222222"/>
-                </a:solidFill>
-              </a:rPr>
-              <a:t>Insight: Zaid crops suffer high evapotranspiration and thermal stress.</a:t>
-            </a:r>
-            <a:endParaRPr lang="en-US" sz="1250" dirty="0"/>
-          </a:p>
-        </p:txBody>
-      </p:sp>
-      <p:sp>
-        <p:nvSpPr>
-          <p:cNvPr id="11" name="Shape 9"/>
-          <p:cNvSpPr/>
-          <p:nvPr/>
-        </p:nvSpPr>
-        <p:spPr>
-          <a:xfrm>
-            <a:off x="731520" y="3749040"/>
-            <a:ext cx="5212080" cy="2377440"/>
-          </a:xfrm>
-          <a:prstGeom prst="roundRect">
-            <a:avLst/>
-          </a:prstGeom>
-          <a:solidFill>
-            <a:srgbClr val="FFFFFF"/>
-          </a:solidFill>
-          <a:ln w="12700">
-            <a:solidFill>
-              <a:srgbClr val="B0BEC5"/>
-            </a:solidFill>
-            <a:prstDash val="solid"/>
-          </a:ln>
-        </p:spPr>
-      </p:sp>
-      <p:sp>
-        <p:nvSpPr>
-          <p:cNvPr id="12" name="Text 10"/>
-          <p:cNvSpPr/>
-          <p:nvPr/>
-        </p:nvSpPr>
-        <p:spPr>
-          <a:xfrm>
-            <a:off x="914400" y="3886200"/>
-            <a:ext cx="4846320" cy="365760"/>
-          </a:xfrm>
-          <a:prstGeom prst="rect">
-            <a:avLst/>
-          </a:prstGeom>
-          <a:noFill/>
-          <a:ln/>
-        </p:spPr>
-        <p:txBody>
-          <a:bodyPr wrap="square" rtlCol="0" anchor="ctr"/>
-          <a:lstStyle/>
-          <a:p>
-            <a:pPr indent="0" marL="0">
-              <a:buNone/>
-            </a:pPr>
-            <a:r>
-              <a:rPr lang="en-US" sz="1500" b="1" dirty="0">
-                <a:solidFill>
-                  <a:srgbClr val="003366"/>
-                </a:solidFill>
-              </a:rPr>
-              <a:t>💧 Soil Moisture &amp; pH</a:t>
-            </a:r>
-            <a:endParaRPr lang="en-US" sz="1500" dirty="0"/>
-          </a:p>
-        </p:txBody>
-      </p:sp>
-      <p:sp>
-        <p:nvSpPr>
-          <p:cNvPr id="13" name="Text 11"/>
-          <p:cNvSpPr/>
-          <p:nvPr/>
-        </p:nvSpPr>
-        <p:spPr>
-          <a:xfrm>
-            <a:off x="914400" y="4297680"/>
-            <a:ext cx="4846320" cy="1645920"/>
-          </a:xfrm>
-          <a:prstGeom prst="rect">
-            <a:avLst/>
-          </a:prstGeom>
-          <a:noFill/>
-          <a:ln/>
-        </p:spPr>
-        <p:txBody>
-          <a:bodyPr wrap="square" rtlCol="0" anchor="ctr"/>
-          <a:lstStyle/>
-          <a:p>
-            <a:pPr indent="0" marL="0">
-              <a:buNone/>
-            </a:pPr>
-            <a:r>
-              <a:rPr lang="en-US" sz="1250" dirty="0">
-                <a:solidFill>
-                  <a:srgbClr val="222222"/>
-                </a:solidFill>
-              </a:rPr>
-              <a:t>• Soil Moisture: Peaks during Kharif (30.8%) due to monsoon soaking; drops to 18.6% in Zaid.</a:t>
-            </a:r>
-            <a:endParaRPr lang="en-US" sz="1250" dirty="0"/>
-          </a:p>
-          <a:p>
-            <a:pPr indent="0" marL="0">
-              <a:buNone/>
-            </a:pPr>
-            <a:r>
-              <a:rPr lang="en-US" sz="1250" dirty="0">
-                <a:solidFill>
-                  <a:srgbClr val="222222"/>
-                </a:solidFill>
-              </a:rPr>
-              <a:t>• Soil pH: Relatively neutral across seasons (6.7–6.8 mean).</a:t>
-            </a:r>
-            <a:endParaRPr lang="en-US" sz="1250" dirty="0"/>
-          </a:p>
-          <a:p>
-            <a:pPr indent="0" marL="0">
-              <a:buNone/>
-            </a:pPr>
-            <a:r>
-              <a:rPr lang="en-US" sz="1250" dirty="0">
-                <a:solidFill>
-                  <a:srgbClr val="222222"/>
-                </a:solidFill>
-              </a:rPr>
-              <a:t>Insight: Moisture retention (mulching/drip) is mandatory in summer.</a:t>
-            </a:r>
-            <a:endParaRPr lang="en-US" sz="1250" dirty="0"/>
-          </a:p>
-        </p:txBody>
-      </p:sp>
-      <p:sp>
-        <p:nvSpPr>
-          <p:cNvPr id="14" name="Shape 12"/>
-          <p:cNvSpPr/>
-          <p:nvPr/>
-        </p:nvSpPr>
-        <p:spPr>
-          <a:xfrm>
-            <a:off x="6217920" y="3749040"/>
-            <a:ext cx="5212080" cy="2377440"/>
-          </a:xfrm>
-          <a:prstGeom prst="roundRect">
-            <a:avLst/>
-          </a:prstGeom>
-          <a:solidFill>
-            <a:srgbClr val="FFFFFF"/>
-          </a:solidFill>
-          <a:ln w="12700">
-            <a:solidFill>
-              <a:srgbClr val="B0BEC5"/>
-            </a:solidFill>
-            <a:prstDash val="solid"/>
-          </a:ln>
-        </p:spPr>
-      </p:sp>
-      <p:sp>
-        <p:nvSpPr>
-          <p:cNvPr id="15" name="Text 13"/>
-          <p:cNvSpPr/>
-          <p:nvPr/>
-        </p:nvSpPr>
-        <p:spPr>
-          <a:xfrm>
-            <a:off x="6400800" y="3886200"/>
-            <a:ext cx="4846320" cy="365760"/>
-          </a:xfrm>
-          <a:prstGeom prst="rect">
-            <a:avLst/>
-          </a:prstGeom>
-          <a:noFill/>
-          <a:ln/>
-        </p:spPr>
-        <p:txBody>
-          <a:bodyPr wrap="square" rtlCol="0" anchor="ctr"/>
-          <a:lstStyle/>
-          <a:p>
-            <a:pPr indent="0" marL="0">
-              <a:buNone/>
-            </a:pPr>
-            <a:r>
-              <a:rPr lang="en-US" sz="1500" b="1" dirty="0">
-                <a:solidFill>
-                  <a:srgbClr val="003366"/>
-                </a:solidFill>
-              </a:rPr>
-              <a:t>🐛 Disease &amp; Pest Risk</a:t>
-            </a:r>
-            <a:endParaRPr lang="en-US" sz="1500" dirty="0"/>
-          </a:p>
-        </p:txBody>
-      </p:sp>
-      <p:sp>
-        <p:nvSpPr>
-          <p:cNvPr id="16" name="Text 14"/>
-          <p:cNvSpPr/>
-          <p:nvPr/>
-        </p:nvSpPr>
-        <p:spPr>
-          <a:xfrm>
-            <a:off x="6400800" y="4297680"/>
-            <a:ext cx="4846320" cy="1645920"/>
-          </a:xfrm>
-          <a:prstGeom prst="rect">
-            <a:avLst/>
-          </a:prstGeom>
-          <a:noFill/>
-          <a:ln/>
-        </p:spPr>
-        <p:txBody>
-          <a:bodyPr wrap="square" rtlCol="0" anchor="ctr"/>
-          <a:lstStyle/>
-          <a:p>
-            <a:pPr indent="0" marL="0">
-              <a:buNone/>
-            </a:pPr>
-            <a:r>
-              <a:rPr lang="en-US" sz="1250" dirty="0">
-                <a:solidFill>
-                  <a:srgbClr val="222222"/>
-                </a:solidFill>
-              </a:rPr>
-              <a:t>• Kharif: 54.5% average pest risk (high humidity &gt;71.8% promotes fungal/insect vectors).</a:t>
-            </a:r>
-            <a:endParaRPr lang="en-US" sz="1250" dirty="0"/>
-          </a:p>
-          <a:p>
-            <a:pPr indent="0" marL="0">
-              <a:buNone/>
-            </a:pPr>
-            <a:r>
-              <a:rPr lang="en-US" sz="1250" dirty="0">
-                <a:solidFill>
-                  <a:srgbClr val="222222"/>
-                </a:solidFill>
-              </a:rPr>
-              <a:t>• Rabi: 40.5% average pest risk.</a:t>
-            </a:r>
-            <a:endParaRPr lang="en-US" sz="1250" dirty="0"/>
-          </a:p>
-          <a:p>
-            <a:pPr indent="0" marL="0">
-              <a:buNone/>
-            </a:pPr>
-            <a:r>
-              <a:rPr lang="en-US" sz="1250" dirty="0">
-                <a:solidFill>
-                  <a:srgbClr val="222222"/>
-                </a:solidFill>
-              </a:rPr>
-              <a:t>• Zaid: 38.2% average pest risk.</a:t>
-            </a:r>
-            <a:endParaRPr lang="en-US" sz="1250" dirty="0"/>
-          </a:p>
-          <a:p>
-            <a:pPr indent="0" marL="0">
-              <a:buNone/>
-            </a:pPr>
-            <a:r>
-              <a:rPr lang="en-US" sz="1250" dirty="0">
-                <a:solidFill>
-                  <a:srgbClr val="222222"/>
-                </a:solidFill>
-              </a:rPr>
-              <a:t>Insight: Monsoons demand proactive pest management.</a:t>
-            </a:r>
-            <a:endParaRPr lang="en-US" sz="1250" dirty="0"/>
-          </a:p>
-        </p:txBody>
-      </p:sp>
+      <p:graphicFrame>
+        <p:nvGraphicFramePr>
+          <p:cNvPr id="8" name="Table 0"/>
+          <p:cNvGraphicFramePr>
+            <a:graphicFrameLocks noGrp="1"/>
+          </p:cNvGraphicFramePr>
+          <p:nvPr>
+            <p:extLst>
+              <p:ext uri="{D42A27DB-BD31-4B8C-83A1-F6EECF244321}">
+                <p14:modId xmlns:p14="http://schemas.microsoft.com/office/powerpoint/2010/main" val="1579011935"/>
+              </p:ext>
+            </p:extLst>
+          </p:nvPr>
+        </p:nvGraphicFramePr>
+        <p:xfrm>
+          <a:off x="731520" y="4114800"/>
+          <a:ext cx="6583680" cy="2194560"/>
+        </p:xfrm>
+        <a:graphic>
+          <a:graphicData uri="http://schemas.openxmlformats.org/drawingml/2006/table">
+            <a:tbl>
+              <a:tblPr/>
+              <a:tblGrid>
+                <a:gridCol w="1097280"/>
+                <a:gridCol w="1097280"/>
+                <a:gridCol w="1097280"/>
+                <a:gridCol w="1097280"/>
+                <a:gridCol w="1097280"/>
+                <a:gridCol w="1097280"/>
+              </a:tblGrid>
+              <a:tr h="548640">
+                <a:tc>
+                  <a:txBody>
+                    <a:bodyPr/>
+                    <a:lstStyle/>
+                    <a:p>
+                      <a:pPr algn="ctr" indent="0" marL="0">
+                        <a:buNone/>
+                      </a:pPr>
+                      <a:r>
+                        <a:rPr lang="en-US" sz="1100" b="1" dirty="0">
+                          <a:solidFill>
+                            <a:srgbClr val="FFFFFF"/>
+                          </a:solidFill>
+                        </a:rPr>
+                        <a:t>Season</a:t>
+                      </a:r>
+                      <a:endParaRPr lang="en-US" sz="1100" dirty="0"/>
+                    </a:p>
+                  </a:txBody>
+                  <a:tcPr marL="91440" marR="91440" marT="45720" marB="45720">
+                    <a:lnL w="12700" cap="flat" cmpd="sng" algn="ctr">
+                      <a:solidFill>
+                        <a:srgbClr val="CCCCCC"/>
+                      </a:solidFill>
+                      <a:prstDash val="solid"/>
+                      <a:round/>
+                      <a:headEnd type="none" w="med" len="med"/>
+                      <a:tailEnd type="none" w="med" len="med"/>
+                    </a:lnL>
+                    <a:lnR w="12700" cap="flat" cmpd="sng" algn="ctr">
+                      <a:solidFill>
+                        <a:srgbClr val="CCCCCC"/>
+                      </a:solidFill>
+                      <a:prstDash val="solid"/>
+                      <a:round/>
+                      <a:headEnd type="none" w="med" len="med"/>
+                      <a:tailEnd type="none" w="med" len="med"/>
+                    </a:lnR>
+                    <a:lnT w="12700" cap="flat" cmpd="sng" algn="ctr">
+                      <a:solidFill>
+                        <a:srgbClr val="CCCCCC"/>
+                      </a:solidFill>
+                      <a:prstDash val="solid"/>
+                      <a:round/>
+                      <a:headEnd type="none" w="med" len="med"/>
+                      <a:tailEnd type="none" w="med" len="med"/>
+                    </a:lnT>
+                    <a:lnB w="12700" cap="flat" cmpd="sng" algn="ctr">
+                      <a:solidFill>
+                        <a:srgbClr val="CCCCCC"/>
+                      </a:solidFill>
+                      <a:prstDash val="solid"/>
+                      <a:round/>
+                      <a:headEnd type="none" w="med" len="med"/>
+                      <a:tailEnd type="none" w="med" len="med"/>
+                    </a:lnB>
+                    <a:solidFill>
+                      <a:srgbClr val="003366"/>
+                    </a:solidFill>
+                  </a:tcPr>
+                </a:tc>
+                <a:tc>
+                  <a:txBody>
+                    <a:bodyPr/>
+                    <a:lstStyle/>
+                    <a:p>
+                      <a:pPr algn="ctr" indent="0" marL="0">
+                        <a:buNone/>
+                      </a:pPr>
+                      <a:r>
+                        <a:rPr lang="en-US" sz="1100" b="1" dirty="0">
+                          <a:solidFill>
+                            <a:srgbClr val="FFFFFF"/>
+                          </a:solidFill>
+                        </a:rPr>
+                        <a:t>Rainfall (mm)</a:t>
+                      </a:r>
+                      <a:endParaRPr lang="en-US" sz="1100" dirty="0"/>
+                    </a:p>
+                  </a:txBody>
+                  <a:tcPr marL="91440" marR="91440" marT="45720" marB="45720">
+                    <a:lnL w="12700" cap="flat" cmpd="sng" algn="ctr">
+                      <a:solidFill>
+                        <a:srgbClr val="CCCCCC"/>
+                      </a:solidFill>
+                      <a:prstDash val="solid"/>
+                      <a:round/>
+                      <a:headEnd type="none" w="med" len="med"/>
+                      <a:tailEnd type="none" w="med" len="med"/>
+                    </a:lnL>
+                    <a:lnR w="12700" cap="flat" cmpd="sng" algn="ctr">
+                      <a:solidFill>
+                        <a:srgbClr val="CCCCCC"/>
+                      </a:solidFill>
+                      <a:prstDash val="solid"/>
+                      <a:round/>
+                      <a:headEnd type="none" w="med" len="med"/>
+                      <a:tailEnd type="none" w="med" len="med"/>
+                    </a:lnR>
+                    <a:lnT w="12700" cap="flat" cmpd="sng" algn="ctr">
+                      <a:solidFill>
+                        <a:srgbClr val="CCCCCC"/>
+                      </a:solidFill>
+                      <a:prstDash val="solid"/>
+                      <a:round/>
+                      <a:headEnd type="none" w="med" len="med"/>
+                      <a:tailEnd type="none" w="med" len="med"/>
+                    </a:lnT>
+                    <a:lnB w="12700" cap="flat" cmpd="sng" algn="ctr">
+                      <a:solidFill>
+                        <a:srgbClr val="CCCCCC"/>
+                      </a:solidFill>
+                      <a:prstDash val="solid"/>
+                      <a:round/>
+                      <a:headEnd type="none" w="med" len="med"/>
+                      <a:tailEnd type="none" w="med" len="med"/>
+                    </a:lnB>
+                    <a:solidFill>
+                      <a:srgbClr val="003366"/>
+                    </a:solidFill>
+                  </a:tcPr>
+                </a:tc>
+                <a:tc>
+                  <a:txBody>
+                    <a:bodyPr/>
+                    <a:lstStyle/>
+                    <a:p>
+                      <a:pPr algn="ctr" indent="0" marL="0">
+                        <a:buNone/>
+                      </a:pPr>
+                      <a:r>
+                        <a:rPr lang="en-US" sz="1100" b="1" dirty="0">
+                          <a:solidFill>
+                            <a:srgbClr val="FFFFFF"/>
+                          </a:solidFill>
+                        </a:rPr>
+                        <a:t>Temperature (°C)</a:t>
+                      </a:r>
+                      <a:endParaRPr lang="en-US" sz="1100" dirty="0"/>
+                    </a:p>
+                  </a:txBody>
+                  <a:tcPr marL="91440" marR="91440" marT="45720" marB="45720">
+                    <a:lnL w="12700" cap="flat" cmpd="sng" algn="ctr">
+                      <a:solidFill>
+                        <a:srgbClr val="CCCCCC"/>
+                      </a:solidFill>
+                      <a:prstDash val="solid"/>
+                      <a:round/>
+                      <a:headEnd type="none" w="med" len="med"/>
+                      <a:tailEnd type="none" w="med" len="med"/>
+                    </a:lnL>
+                    <a:lnR w="12700" cap="flat" cmpd="sng" algn="ctr">
+                      <a:solidFill>
+                        <a:srgbClr val="CCCCCC"/>
+                      </a:solidFill>
+                      <a:prstDash val="solid"/>
+                      <a:round/>
+                      <a:headEnd type="none" w="med" len="med"/>
+                      <a:tailEnd type="none" w="med" len="med"/>
+                    </a:lnR>
+                    <a:lnT w="12700" cap="flat" cmpd="sng" algn="ctr">
+                      <a:solidFill>
+                        <a:srgbClr val="CCCCCC"/>
+                      </a:solidFill>
+                      <a:prstDash val="solid"/>
+                      <a:round/>
+                      <a:headEnd type="none" w="med" len="med"/>
+                      <a:tailEnd type="none" w="med" len="med"/>
+                    </a:lnT>
+                    <a:lnB w="12700" cap="flat" cmpd="sng" algn="ctr">
+                      <a:solidFill>
+                        <a:srgbClr val="CCCCCC"/>
+                      </a:solidFill>
+                      <a:prstDash val="solid"/>
+                      <a:round/>
+                      <a:headEnd type="none" w="med" len="med"/>
+                      <a:tailEnd type="none" w="med" len="med"/>
+                    </a:lnB>
+                    <a:solidFill>
+                      <a:srgbClr val="003366"/>
+                    </a:solidFill>
+                  </a:tcPr>
+                </a:tc>
+                <a:tc>
+                  <a:txBody>
+                    <a:bodyPr/>
+                    <a:lstStyle/>
+                    <a:p>
+                      <a:pPr algn="ctr" indent="0" marL="0">
+                        <a:buNone/>
+                      </a:pPr>
+                      <a:r>
+                        <a:rPr lang="en-US" sz="1100" b="1" dirty="0">
+                          <a:solidFill>
+                            <a:srgbClr val="FFFFFF"/>
+                          </a:solidFill>
+                        </a:rPr>
+                        <a:t>Humidity (%)</a:t>
+                      </a:r>
+                      <a:endParaRPr lang="en-US" sz="1100" dirty="0"/>
+                    </a:p>
+                  </a:txBody>
+                  <a:tcPr marL="91440" marR="91440" marT="45720" marB="45720">
+                    <a:lnL w="12700" cap="flat" cmpd="sng" algn="ctr">
+                      <a:solidFill>
+                        <a:srgbClr val="CCCCCC"/>
+                      </a:solidFill>
+                      <a:prstDash val="solid"/>
+                      <a:round/>
+                      <a:headEnd type="none" w="med" len="med"/>
+                      <a:tailEnd type="none" w="med" len="med"/>
+                    </a:lnL>
+                    <a:lnR w="12700" cap="flat" cmpd="sng" algn="ctr">
+                      <a:solidFill>
+                        <a:srgbClr val="CCCCCC"/>
+                      </a:solidFill>
+                      <a:prstDash val="solid"/>
+                      <a:round/>
+                      <a:headEnd type="none" w="med" len="med"/>
+                      <a:tailEnd type="none" w="med" len="med"/>
+                    </a:lnR>
+                    <a:lnT w="12700" cap="flat" cmpd="sng" algn="ctr">
+                      <a:solidFill>
+                        <a:srgbClr val="CCCCCC"/>
+                      </a:solidFill>
+                      <a:prstDash val="solid"/>
+                      <a:round/>
+                      <a:headEnd type="none" w="med" len="med"/>
+                      <a:tailEnd type="none" w="med" len="med"/>
+                    </a:lnT>
+                    <a:lnB w="12700" cap="flat" cmpd="sng" algn="ctr">
+                      <a:solidFill>
+                        <a:srgbClr val="CCCCCC"/>
+                      </a:solidFill>
+                      <a:prstDash val="solid"/>
+                      <a:round/>
+                      <a:headEnd type="none" w="med" len="med"/>
+                      <a:tailEnd type="none" w="med" len="med"/>
+                    </a:lnB>
+                    <a:solidFill>
+                      <a:srgbClr val="003366"/>
+                    </a:solidFill>
+                  </a:tcPr>
+                </a:tc>
+                <a:tc>
+                  <a:txBody>
+                    <a:bodyPr/>
+                    <a:lstStyle/>
+                    <a:p>
+                      <a:pPr algn="ctr" indent="0" marL="0">
+                        <a:buNone/>
+                      </a:pPr>
+                      <a:r>
+                        <a:rPr lang="en-US" sz="1100" b="1" dirty="0">
+                          <a:solidFill>
+                            <a:srgbClr val="FFFFFF"/>
+                          </a:solidFill>
+                        </a:rPr>
+                        <a:t>Sunlight (hrs/day)</a:t>
+                      </a:r>
+                      <a:endParaRPr lang="en-US" sz="1100" dirty="0"/>
+                    </a:p>
+                  </a:txBody>
+                  <a:tcPr marL="91440" marR="91440" marT="45720" marB="45720">
+                    <a:lnL w="12700" cap="flat" cmpd="sng" algn="ctr">
+                      <a:solidFill>
+                        <a:srgbClr val="CCCCCC"/>
+                      </a:solidFill>
+                      <a:prstDash val="solid"/>
+                      <a:round/>
+                      <a:headEnd type="none" w="med" len="med"/>
+                      <a:tailEnd type="none" w="med" len="med"/>
+                    </a:lnL>
+                    <a:lnR w="12700" cap="flat" cmpd="sng" algn="ctr">
+                      <a:solidFill>
+                        <a:srgbClr val="CCCCCC"/>
+                      </a:solidFill>
+                      <a:prstDash val="solid"/>
+                      <a:round/>
+                      <a:headEnd type="none" w="med" len="med"/>
+                      <a:tailEnd type="none" w="med" len="med"/>
+                    </a:lnR>
+                    <a:lnT w="12700" cap="flat" cmpd="sng" algn="ctr">
+                      <a:solidFill>
+                        <a:srgbClr val="CCCCCC"/>
+                      </a:solidFill>
+                      <a:prstDash val="solid"/>
+                      <a:round/>
+                      <a:headEnd type="none" w="med" len="med"/>
+                      <a:tailEnd type="none" w="med" len="med"/>
+                    </a:lnT>
+                    <a:lnB w="12700" cap="flat" cmpd="sng" algn="ctr">
+                      <a:solidFill>
+                        <a:srgbClr val="CCCCCC"/>
+                      </a:solidFill>
+                      <a:prstDash val="solid"/>
+                      <a:round/>
+                      <a:headEnd type="none" w="med" len="med"/>
+                      <a:tailEnd type="none" w="med" len="med"/>
+                    </a:lnB>
+                    <a:solidFill>
+                      <a:srgbClr val="003366"/>
+                    </a:solidFill>
+                  </a:tcPr>
+                </a:tc>
+                <a:tc>
+                  <a:txBody>
+                    <a:bodyPr/>
+                    <a:lstStyle/>
+                    <a:p>
+                      <a:pPr algn="ctr" indent="0" marL="0">
+                        <a:buNone/>
+                      </a:pPr>
+                      <a:r>
+                        <a:rPr lang="en-US" sz="1100" b="1" dirty="0">
+                          <a:solidFill>
+                            <a:srgbClr val="FFFFFF"/>
+                          </a:solidFill>
+                        </a:rPr>
+                        <a:t>Pest Risk (%)</a:t>
+                      </a:r>
+                      <a:endParaRPr lang="en-US" sz="1100" dirty="0"/>
+                    </a:p>
+                  </a:txBody>
+                  <a:tcPr marL="91440" marR="91440" marT="45720" marB="45720">
+                    <a:lnL w="12700" cap="flat" cmpd="sng" algn="ctr">
+                      <a:solidFill>
+                        <a:srgbClr val="CCCCCC"/>
+                      </a:solidFill>
+                      <a:prstDash val="solid"/>
+                      <a:round/>
+                      <a:headEnd type="none" w="med" len="med"/>
+                      <a:tailEnd type="none" w="med" len="med"/>
+                    </a:lnL>
+                    <a:lnR w="12700" cap="flat" cmpd="sng" algn="ctr">
+                      <a:solidFill>
+                        <a:srgbClr val="CCCCCC"/>
+                      </a:solidFill>
+                      <a:prstDash val="solid"/>
+                      <a:round/>
+                      <a:headEnd type="none" w="med" len="med"/>
+                      <a:tailEnd type="none" w="med" len="med"/>
+                    </a:lnR>
+                    <a:lnT w="12700" cap="flat" cmpd="sng" algn="ctr">
+                      <a:solidFill>
+                        <a:srgbClr val="CCCCCC"/>
+                      </a:solidFill>
+                      <a:prstDash val="solid"/>
+                      <a:round/>
+                      <a:headEnd type="none" w="med" len="med"/>
+                      <a:tailEnd type="none" w="med" len="med"/>
+                    </a:lnT>
+                    <a:lnB w="12700" cap="flat" cmpd="sng" algn="ctr">
+                      <a:solidFill>
+                        <a:srgbClr val="CCCCCC"/>
+                      </a:solidFill>
+                      <a:prstDash val="solid"/>
+                      <a:round/>
+                      <a:headEnd type="none" w="med" len="med"/>
+                      <a:tailEnd type="none" w="med" len="med"/>
+                    </a:lnB>
+                    <a:solidFill>
+                      <a:srgbClr val="003366"/>
+                    </a:solidFill>
+                  </a:tcPr>
+                </a:tc>
+              </a:tr>
+              <a:tr h="548640">
+                <a:tc>
+                  <a:txBody>
+                    <a:bodyPr/>
+                    <a:lstStyle/>
+                    <a:p>
+                      <a:pPr algn="ctr" indent="0" marL="0">
+                        <a:buNone/>
+                      </a:pPr>
+                      <a:r>
+                        <a:rPr lang="en-US" sz="1100" dirty="0">
+                          <a:solidFill>
+                            <a:srgbClr val="000000"/>
+                          </a:solidFill>
+                        </a:rPr>
+                        <a:t>Kharif</a:t>
+                      </a:r>
+                      <a:endParaRPr lang="en-US" sz="1100" dirty="0"/>
+                    </a:p>
+                  </a:txBody>
+                  <a:tcPr marL="91440" marR="91440" marT="45720" marB="45720">
+                    <a:lnL w="12700" cap="flat" cmpd="sng" algn="ctr">
+                      <a:solidFill>
+                        <a:srgbClr val="CCCCCC"/>
+                      </a:solidFill>
+                      <a:prstDash val="solid"/>
+                      <a:round/>
+                      <a:headEnd type="none" w="med" len="med"/>
+                      <a:tailEnd type="none" w="med" len="med"/>
+                    </a:lnL>
+                    <a:lnR w="12700" cap="flat" cmpd="sng" algn="ctr">
+                      <a:solidFill>
+                        <a:srgbClr val="CCCCCC"/>
+                      </a:solidFill>
+                      <a:prstDash val="solid"/>
+                      <a:round/>
+                      <a:headEnd type="none" w="med" len="med"/>
+                      <a:tailEnd type="none" w="med" len="med"/>
+                    </a:lnR>
+                    <a:lnT w="12700" cap="flat" cmpd="sng" algn="ctr">
+                      <a:solidFill>
+                        <a:srgbClr val="CCCCCC"/>
+                      </a:solidFill>
+                      <a:prstDash val="solid"/>
+                      <a:round/>
+                      <a:headEnd type="none" w="med" len="med"/>
+                      <a:tailEnd type="none" w="med" len="med"/>
+                    </a:lnT>
+                    <a:lnB w="12700" cap="flat" cmpd="sng" algn="ctr">
+                      <a:solidFill>
+                        <a:srgbClr val="CCCCCC"/>
+                      </a:solidFill>
+                      <a:prstDash val="solid"/>
+                      <a:round/>
+                      <a:headEnd type="none" w="med" len="med"/>
+                      <a:tailEnd type="none" w="med" len="med"/>
+                    </a:lnB>
+                  </a:tcPr>
+                </a:tc>
+                <a:tc>
+                  <a:txBody>
+                    <a:bodyPr/>
+                    <a:lstStyle/>
+                    <a:p>
+                      <a:pPr algn="ctr" indent="0" marL="0">
+                        <a:buNone/>
+                      </a:pPr>
+                      <a:r>
+                        <a:rPr lang="en-US" sz="1100" dirty="0">
+                          <a:solidFill>
+                            <a:srgbClr val="000000"/>
+                          </a:solidFill>
+                        </a:rPr>
+                        <a:t>852.1 mm</a:t>
+                      </a:r>
+                      <a:endParaRPr lang="en-US" sz="1100" dirty="0"/>
+                    </a:p>
+                  </a:txBody>
+                  <a:tcPr marL="91440" marR="91440" marT="45720" marB="45720">
+                    <a:lnL w="12700" cap="flat" cmpd="sng" algn="ctr">
+                      <a:solidFill>
+                        <a:srgbClr val="CCCCCC"/>
+                      </a:solidFill>
+                      <a:prstDash val="solid"/>
+                      <a:round/>
+                      <a:headEnd type="none" w="med" len="med"/>
+                      <a:tailEnd type="none" w="med" len="med"/>
+                    </a:lnL>
+                    <a:lnR w="12700" cap="flat" cmpd="sng" algn="ctr">
+                      <a:solidFill>
+                        <a:srgbClr val="CCCCCC"/>
+                      </a:solidFill>
+                      <a:prstDash val="solid"/>
+                      <a:round/>
+                      <a:headEnd type="none" w="med" len="med"/>
+                      <a:tailEnd type="none" w="med" len="med"/>
+                    </a:lnR>
+                    <a:lnT w="12700" cap="flat" cmpd="sng" algn="ctr">
+                      <a:solidFill>
+                        <a:srgbClr val="CCCCCC"/>
+                      </a:solidFill>
+                      <a:prstDash val="solid"/>
+                      <a:round/>
+                      <a:headEnd type="none" w="med" len="med"/>
+                      <a:tailEnd type="none" w="med" len="med"/>
+                    </a:lnT>
+                    <a:lnB w="12700" cap="flat" cmpd="sng" algn="ctr">
+                      <a:solidFill>
+                        <a:srgbClr val="CCCCCC"/>
+                      </a:solidFill>
+                      <a:prstDash val="solid"/>
+                      <a:round/>
+                      <a:headEnd type="none" w="med" len="med"/>
+                      <a:tailEnd type="none" w="med" len="med"/>
+                    </a:lnB>
+                  </a:tcPr>
+                </a:tc>
+                <a:tc>
+                  <a:txBody>
+                    <a:bodyPr/>
+                    <a:lstStyle/>
+                    <a:p>
+                      <a:pPr algn="ctr" indent="0" marL="0">
+                        <a:buNone/>
+                      </a:pPr>
+                      <a:r>
+                        <a:rPr lang="en-US" sz="1100" dirty="0">
+                          <a:solidFill>
+                            <a:srgbClr val="000000"/>
+                          </a:solidFill>
+                        </a:rPr>
+                        <a:t>28.5°C</a:t>
+                      </a:r>
+                      <a:endParaRPr lang="en-US" sz="1100" dirty="0"/>
+                    </a:p>
+                  </a:txBody>
+                  <a:tcPr marL="91440" marR="91440" marT="45720" marB="45720">
+                    <a:lnL w="12700" cap="flat" cmpd="sng" algn="ctr">
+                      <a:solidFill>
+                        <a:srgbClr val="CCCCCC"/>
+                      </a:solidFill>
+                      <a:prstDash val="solid"/>
+                      <a:round/>
+                      <a:headEnd type="none" w="med" len="med"/>
+                      <a:tailEnd type="none" w="med" len="med"/>
+                    </a:lnL>
+                    <a:lnR w="12700" cap="flat" cmpd="sng" algn="ctr">
+                      <a:solidFill>
+                        <a:srgbClr val="CCCCCC"/>
+                      </a:solidFill>
+                      <a:prstDash val="solid"/>
+                      <a:round/>
+                      <a:headEnd type="none" w="med" len="med"/>
+                      <a:tailEnd type="none" w="med" len="med"/>
+                    </a:lnR>
+                    <a:lnT w="12700" cap="flat" cmpd="sng" algn="ctr">
+                      <a:solidFill>
+                        <a:srgbClr val="CCCCCC"/>
+                      </a:solidFill>
+                      <a:prstDash val="solid"/>
+                      <a:round/>
+                      <a:headEnd type="none" w="med" len="med"/>
+                      <a:tailEnd type="none" w="med" len="med"/>
+                    </a:lnT>
+                    <a:lnB w="12700" cap="flat" cmpd="sng" algn="ctr">
+                      <a:solidFill>
+                        <a:srgbClr val="CCCCCC"/>
+                      </a:solidFill>
+                      <a:prstDash val="solid"/>
+                      <a:round/>
+                      <a:headEnd type="none" w="med" len="med"/>
+                      <a:tailEnd type="none" w="med" len="med"/>
+                    </a:lnB>
+                  </a:tcPr>
+                </a:tc>
+                <a:tc>
+                  <a:txBody>
+                    <a:bodyPr/>
+                    <a:lstStyle/>
+                    <a:p>
+                      <a:pPr algn="ctr" indent="0" marL="0">
+                        <a:buNone/>
+                      </a:pPr>
+                      <a:r>
+                        <a:rPr lang="en-US" sz="1100" dirty="0">
+                          <a:solidFill>
+                            <a:srgbClr val="000000"/>
+                          </a:solidFill>
+                        </a:rPr>
+                        <a:t>71.8%</a:t>
+                      </a:r>
+                      <a:endParaRPr lang="en-US" sz="1100" dirty="0"/>
+                    </a:p>
+                  </a:txBody>
+                  <a:tcPr marL="91440" marR="91440" marT="45720" marB="45720">
+                    <a:lnL w="12700" cap="flat" cmpd="sng" algn="ctr">
+                      <a:solidFill>
+                        <a:srgbClr val="CCCCCC"/>
+                      </a:solidFill>
+                      <a:prstDash val="solid"/>
+                      <a:round/>
+                      <a:headEnd type="none" w="med" len="med"/>
+                      <a:tailEnd type="none" w="med" len="med"/>
+                    </a:lnL>
+                    <a:lnR w="12700" cap="flat" cmpd="sng" algn="ctr">
+                      <a:solidFill>
+                        <a:srgbClr val="CCCCCC"/>
+                      </a:solidFill>
+                      <a:prstDash val="solid"/>
+                      <a:round/>
+                      <a:headEnd type="none" w="med" len="med"/>
+                      <a:tailEnd type="none" w="med" len="med"/>
+                    </a:lnR>
+                    <a:lnT w="12700" cap="flat" cmpd="sng" algn="ctr">
+                      <a:solidFill>
+                        <a:srgbClr val="CCCCCC"/>
+                      </a:solidFill>
+                      <a:prstDash val="solid"/>
+                      <a:round/>
+                      <a:headEnd type="none" w="med" len="med"/>
+                      <a:tailEnd type="none" w="med" len="med"/>
+                    </a:lnT>
+                    <a:lnB w="12700" cap="flat" cmpd="sng" algn="ctr">
+                      <a:solidFill>
+                        <a:srgbClr val="CCCCCC"/>
+                      </a:solidFill>
+                      <a:prstDash val="solid"/>
+                      <a:round/>
+                      <a:headEnd type="none" w="med" len="med"/>
+                      <a:tailEnd type="none" w="med" len="med"/>
+                    </a:lnB>
+                  </a:tcPr>
+                </a:tc>
+                <a:tc>
+                  <a:txBody>
+                    <a:bodyPr/>
+                    <a:lstStyle/>
+                    <a:p>
+                      <a:pPr algn="ctr" indent="0" marL="0">
+                        <a:buNone/>
+                      </a:pPr>
+                      <a:r>
+                        <a:rPr lang="en-US" sz="1100" dirty="0">
+                          <a:solidFill>
+                            <a:srgbClr val="000000"/>
+                          </a:solidFill>
+                        </a:rPr>
+                        <a:t>6.79 hrs</a:t>
+                      </a:r>
+                      <a:endParaRPr lang="en-US" sz="1100" dirty="0"/>
+                    </a:p>
+                  </a:txBody>
+                  <a:tcPr marL="91440" marR="91440" marT="45720" marB="45720">
+                    <a:lnL w="12700" cap="flat" cmpd="sng" algn="ctr">
+                      <a:solidFill>
+                        <a:srgbClr val="CCCCCC"/>
+                      </a:solidFill>
+                      <a:prstDash val="solid"/>
+                      <a:round/>
+                      <a:headEnd type="none" w="med" len="med"/>
+                      <a:tailEnd type="none" w="med" len="med"/>
+                    </a:lnL>
+                    <a:lnR w="12700" cap="flat" cmpd="sng" algn="ctr">
+                      <a:solidFill>
+                        <a:srgbClr val="CCCCCC"/>
+                      </a:solidFill>
+                      <a:prstDash val="solid"/>
+                      <a:round/>
+                      <a:headEnd type="none" w="med" len="med"/>
+                      <a:tailEnd type="none" w="med" len="med"/>
+                    </a:lnR>
+                    <a:lnT w="12700" cap="flat" cmpd="sng" algn="ctr">
+                      <a:solidFill>
+                        <a:srgbClr val="CCCCCC"/>
+                      </a:solidFill>
+                      <a:prstDash val="solid"/>
+                      <a:round/>
+                      <a:headEnd type="none" w="med" len="med"/>
+                      <a:tailEnd type="none" w="med" len="med"/>
+                    </a:lnT>
+                    <a:lnB w="12700" cap="flat" cmpd="sng" algn="ctr">
+                      <a:solidFill>
+                        <a:srgbClr val="CCCCCC"/>
+                      </a:solidFill>
+                      <a:prstDash val="solid"/>
+                      <a:round/>
+                      <a:headEnd type="none" w="med" len="med"/>
+                      <a:tailEnd type="none" w="med" len="med"/>
+                    </a:lnB>
+                  </a:tcPr>
+                </a:tc>
+                <a:tc>
+                  <a:txBody>
+                    <a:bodyPr/>
+                    <a:lstStyle/>
+                    <a:p>
+                      <a:pPr algn="ctr" indent="0" marL="0">
+                        <a:buNone/>
+                      </a:pPr>
+                      <a:r>
+                        <a:rPr lang="en-US" sz="1100" b="1" dirty="0">
+                          <a:solidFill>
+                            <a:srgbClr val="C62828"/>
+                          </a:solidFill>
+                        </a:rPr>
+                        <a:t>54.5%</a:t>
+                      </a:r>
+                      <a:endParaRPr lang="en-US" sz="1100" dirty="0"/>
+                    </a:p>
+                  </a:txBody>
+                  <a:tcPr marL="91440" marR="91440" marT="45720" marB="45720">
+                    <a:lnL w="12700" cap="flat" cmpd="sng" algn="ctr">
+                      <a:solidFill>
+                        <a:srgbClr val="CCCCCC"/>
+                      </a:solidFill>
+                      <a:prstDash val="solid"/>
+                      <a:round/>
+                      <a:headEnd type="none" w="med" len="med"/>
+                      <a:tailEnd type="none" w="med" len="med"/>
+                    </a:lnL>
+                    <a:lnR w="12700" cap="flat" cmpd="sng" algn="ctr">
+                      <a:solidFill>
+                        <a:srgbClr val="CCCCCC"/>
+                      </a:solidFill>
+                      <a:prstDash val="solid"/>
+                      <a:round/>
+                      <a:headEnd type="none" w="med" len="med"/>
+                      <a:tailEnd type="none" w="med" len="med"/>
+                    </a:lnR>
+                    <a:lnT w="12700" cap="flat" cmpd="sng" algn="ctr">
+                      <a:solidFill>
+                        <a:srgbClr val="CCCCCC"/>
+                      </a:solidFill>
+                      <a:prstDash val="solid"/>
+                      <a:round/>
+                      <a:headEnd type="none" w="med" len="med"/>
+                      <a:tailEnd type="none" w="med" len="med"/>
+                    </a:lnT>
+                    <a:lnB w="12700" cap="flat" cmpd="sng" algn="ctr">
+                      <a:solidFill>
+                        <a:srgbClr val="CCCCCC"/>
+                      </a:solidFill>
+                      <a:prstDash val="solid"/>
+                      <a:round/>
+                      <a:headEnd type="none" w="med" len="med"/>
+                      <a:tailEnd type="none" w="med" len="med"/>
+                    </a:lnB>
+                  </a:tcPr>
+                </a:tc>
+              </a:tr>
+              <a:tr h="548640">
+                <a:tc>
+                  <a:txBody>
+                    <a:bodyPr/>
+                    <a:lstStyle/>
+                    <a:p>
+                      <a:pPr algn="ctr" indent="0" marL="0">
+                        <a:buNone/>
+                      </a:pPr>
+                      <a:r>
+                        <a:rPr lang="en-US" sz="1100" dirty="0">
+                          <a:solidFill>
+                            <a:srgbClr val="000000"/>
+                          </a:solidFill>
+                        </a:rPr>
+                        <a:t>Rabi</a:t>
+                      </a:r>
+                      <a:endParaRPr lang="en-US" sz="1100" dirty="0"/>
+                    </a:p>
+                  </a:txBody>
+                  <a:tcPr marL="91440" marR="91440" marT="45720" marB="45720">
+                    <a:lnL w="12700" cap="flat" cmpd="sng" algn="ctr">
+                      <a:solidFill>
+                        <a:srgbClr val="CCCCCC"/>
+                      </a:solidFill>
+                      <a:prstDash val="solid"/>
+                      <a:round/>
+                      <a:headEnd type="none" w="med" len="med"/>
+                      <a:tailEnd type="none" w="med" len="med"/>
+                    </a:lnL>
+                    <a:lnR w="12700" cap="flat" cmpd="sng" algn="ctr">
+                      <a:solidFill>
+                        <a:srgbClr val="CCCCCC"/>
+                      </a:solidFill>
+                      <a:prstDash val="solid"/>
+                      <a:round/>
+                      <a:headEnd type="none" w="med" len="med"/>
+                      <a:tailEnd type="none" w="med" len="med"/>
+                    </a:lnR>
+                    <a:lnT w="12700" cap="flat" cmpd="sng" algn="ctr">
+                      <a:solidFill>
+                        <a:srgbClr val="CCCCCC"/>
+                      </a:solidFill>
+                      <a:prstDash val="solid"/>
+                      <a:round/>
+                      <a:headEnd type="none" w="med" len="med"/>
+                      <a:tailEnd type="none" w="med" len="med"/>
+                    </a:lnT>
+                    <a:lnB w="12700" cap="flat" cmpd="sng" algn="ctr">
+                      <a:solidFill>
+                        <a:srgbClr val="CCCCCC"/>
+                      </a:solidFill>
+                      <a:prstDash val="solid"/>
+                      <a:round/>
+                      <a:headEnd type="none" w="med" len="med"/>
+                      <a:tailEnd type="none" w="med" len="med"/>
+                    </a:lnB>
+                  </a:tcPr>
+                </a:tc>
+                <a:tc>
+                  <a:txBody>
+                    <a:bodyPr/>
+                    <a:lstStyle/>
+                    <a:p>
+                      <a:pPr algn="ctr" indent="0" marL="0">
+                        <a:buNone/>
+                      </a:pPr>
+                      <a:r>
+                        <a:rPr lang="en-US" sz="1100" dirty="0">
+                          <a:solidFill>
+                            <a:srgbClr val="000000"/>
+                          </a:solidFill>
+                        </a:rPr>
+                        <a:t>436.0 mm</a:t>
+                      </a:r>
+                      <a:endParaRPr lang="en-US" sz="1100" dirty="0"/>
+                    </a:p>
+                  </a:txBody>
+                  <a:tcPr marL="91440" marR="91440" marT="45720" marB="45720">
+                    <a:lnL w="12700" cap="flat" cmpd="sng" algn="ctr">
+                      <a:solidFill>
+                        <a:srgbClr val="CCCCCC"/>
+                      </a:solidFill>
+                      <a:prstDash val="solid"/>
+                      <a:round/>
+                      <a:headEnd type="none" w="med" len="med"/>
+                      <a:tailEnd type="none" w="med" len="med"/>
+                    </a:lnL>
+                    <a:lnR w="12700" cap="flat" cmpd="sng" algn="ctr">
+                      <a:solidFill>
+                        <a:srgbClr val="CCCCCC"/>
+                      </a:solidFill>
+                      <a:prstDash val="solid"/>
+                      <a:round/>
+                      <a:headEnd type="none" w="med" len="med"/>
+                      <a:tailEnd type="none" w="med" len="med"/>
+                    </a:lnR>
+                    <a:lnT w="12700" cap="flat" cmpd="sng" algn="ctr">
+                      <a:solidFill>
+                        <a:srgbClr val="CCCCCC"/>
+                      </a:solidFill>
+                      <a:prstDash val="solid"/>
+                      <a:round/>
+                      <a:headEnd type="none" w="med" len="med"/>
+                      <a:tailEnd type="none" w="med" len="med"/>
+                    </a:lnT>
+                    <a:lnB w="12700" cap="flat" cmpd="sng" algn="ctr">
+                      <a:solidFill>
+                        <a:srgbClr val="CCCCCC"/>
+                      </a:solidFill>
+                      <a:prstDash val="solid"/>
+                      <a:round/>
+                      <a:headEnd type="none" w="med" len="med"/>
+                      <a:tailEnd type="none" w="med" len="med"/>
+                    </a:lnB>
+                  </a:tcPr>
+                </a:tc>
+                <a:tc>
+                  <a:txBody>
+                    <a:bodyPr/>
+                    <a:lstStyle/>
+                    <a:p>
+                      <a:pPr algn="ctr" indent="0" marL="0">
+                        <a:buNone/>
+                      </a:pPr>
+                      <a:r>
+                        <a:rPr lang="en-US" sz="1100" dirty="0">
+                          <a:solidFill>
+                            <a:srgbClr val="000000"/>
+                          </a:solidFill>
+                        </a:rPr>
+                        <a:t>23.5°C</a:t>
+                      </a:r>
+                      <a:endParaRPr lang="en-US" sz="1100" dirty="0"/>
+                    </a:p>
+                  </a:txBody>
+                  <a:tcPr marL="91440" marR="91440" marT="45720" marB="45720">
+                    <a:lnL w="12700" cap="flat" cmpd="sng" algn="ctr">
+                      <a:solidFill>
+                        <a:srgbClr val="CCCCCC"/>
+                      </a:solidFill>
+                      <a:prstDash val="solid"/>
+                      <a:round/>
+                      <a:headEnd type="none" w="med" len="med"/>
+                      <a:tailEnd type="none" w="med" len="med"/>
+                    </a:lnL>
+                    <a:lnR w="12700" cap="flat" cmpd="sng" algn="ctr">
+                      <a:solidFill>
+                        <a:srgbClr val="CCCCCC"/>
+                      </a:solidFill>
+                      <a:prstDash val="solid"/>
+                      <a:round/>
+                      <a:headEnd type="none" w="med" len="med"/>
+                      <a:tailEnd type="none" w="med" len="med"/>
+                    </a:lnR>
+                    <a:lnT w="12700" cap="flat" cmpd="sng" algn="ctr">
+                      <a:solidFill>
+                        <a:srgbClr val="CCCCCC"/>
+                      </a:solidFill>
+                      <a:prstDash val="solid"/>
+                      <a:round/>
+                      <a:headEnd type="none" w="med" len="med"/>
+                      <a:tailEnd type="none" w="med" len="med"/>
+                    </a:lnT>
+                    <a:lnB w="12700" cap="flat" cmpd="sng" algn="ctr">
+                      <a:solidFill>
+                        <a:srgbClr val="CCCCCC"/>
+                      </a:solidFill>
+                      <a:prstDash val="solid"/>
+                      <a:round/>
+                      <a:headEnd type="none" w="med" len="med"/>
+                      <a:tailEnd type="none" w="med" len="med"/>
+                    </a:lnB>
+                  </a:tcPr>
+                </a:tc>
+                <a:tc>
+                  <a:txBody>
+                    <a:bodyPr/>
+                    <a:lstStyle/>
+                    <a:p>
+                      <a:pPr algn="ctr" indent="0" marL="0">
+                        <a:buNone/>
+                      </a:pPr>
+                      <a:r>
+                        <a:rPr lang="en-US" sz="1100" dirty="0">
+                          <a:solidFill>
+                            <a:srgbClr val="000000"/>
+                          </a:solidFill>
+                        </a:rPr>
+                        <a:t>57.9%</a:t>
+                      </a:r>
+                      <a:endParaRPr lang="en-US" sz="1100" dirty="0"/>
+                    </a:p>
+                  </a:txBody>
+                  <a:tcPr marL="91440" marR="91440" marT="45720" marB="45720">
+                    <a:lnL w="12700" cap="flat" cmpd="sng" algn="ctr">
+                      <a:solidFill>
+                        <a:srgbClr val="CCCCCC"/>
+                      </a:solidFill>
+                      <a:prstDash val="solid"/>
+                      <a:round/>
+                      <a:headEnd type="none" w="med" len="med"/>
+                      <a:tailEnd type="none" w="med" len="med"/>
+                    </a:lnL>
+                    <a:lnR w="12700" cap="flat" cmpd="sng" algn="ctr">
+                      <a:solidFill>
+                        <a:srgbClr val="CCCCCC"/>
+                      </a:solidFill>
+                      <a:prstDash val="solid"/>
+                      <a:round/>
+                      <a:headEnd type="none" w="med" len="med"/>
+                      <a:tailEnd type="none" w="med" len="med"/>
+                    </a:lnR>
+                    <a:lnT w="12700" cap="flat" cmpd="sng" algn="ctr">
+                      <a:solidFill>
+                        <a:srgbClr val="CCCCCC"/>
+                      </a:solidFill>
+                      <a:prstDash val="solid"/>
+                      <a:round/>
+                      <a:headEnd type="none" w="med" len="med"/>
+                      <a:tailEnd type="none" w="med" len="med"/>
+                    </a:lnT>
+                    <a:lnB w="12700" cap="flat" cmpd="sng" algn="ctr">
+                      <a:solidFill>
+                        <a:srgbClr val="CCCCCC"/>
+                      </a:solidFill>
+                      <a:prstDash val="solid"/>
+                      <a:round/>
+                      <a:headEnd type="none" w="med" len="med"/>
+                      <a:tailEnd type="none" w="med" len="med"/>
+                    </a:lnB>
+                  </a:tcPr>
+                </a:tc>
+                <a:tc>
+                  <a:txBody>
+                    <a:bodyPr/>
+                    <a:lstStyle/>
+                    <a:p>
+                      <a:pPr algn="ctr" indent="0" marL="0">
+                        <a:buNone/>
+                      </a:pPr>
+                      <a:r>
+                        <a:rPr lang="en-US" sz="1100" dirty="0">
+                          <a:solidFill>
+                            <a:srgbClr val="000000"/>
+                          </a:solidFill>
+                        </a:rPr>
+                        <a:t>7.59 hrs</a:t>
+                      </a:r>
+                      <a:endParaRPr lang="en-US" sz="1100" dirty="0"/>
+                    </a:p>
+                  </a:txBody>
+                  <a:tcPr marL="91440" marR="91440" marT="45720" marB="45720">
+                    <a:lnL w="12700" cap="flat" cmpd="sng" algn="ctr">
+                      <a:solidFill>
+                        <a:srgbClr val="CCCCCC"/>
+                      </a:solidFill>
+                      <a:prstDash val="solid"/>
+                      <a:round/>
+                      <a:headEnd type="none" w="med" len="med"/>
+                      <a:tailEnd type="none" w="med" len="med"/>
+                    </a:lnL>
+                    <a:lnR w="12700" cap="flat" cmpd="sng" algn="ctr">
+                      <a:solidFill>
+                        <a:srgbClr val="CCCCCC"/>
+                      </a:solidFill>
+                      <a:prstDash val="solid"/>
+                      <a:round/>
+                      <a:headEnd type="none" w="med" len="med"/>
+                      <a:tailEnd type="none" w="med" len="med"/>
+                    </a:lnR>
+                    <a:lnT w="12700" cap="flat" cmpd="sng" algn="ctr">
+                      <a:solidFill>
+                        <a:srgbClr val="CCCCCC"/>
+                      </a:solidFill>
+                      <a:prstDash val="solid"/>
+                      <a:round/>
+                      <a:headEnd type="none" w="med" len="med"/>
+                      <a:tailEnd type="none" w="med" len="med"/>
+                    </a:lnT>
+                    <a:lnB w="12700" cap="flat" cmpd="sng" algn="ctr">
+                      <a:solidFill>
+                        <a:srgbClr val="CCCCCC"/>
+                      </a:solidFill>
+                      <a:prstDash val="solid"/>
+                      <a:round/>
+                      <a:headEnd type="none" w="med" len="med"/>
+                      <a:tailEnd type="none" w="med" len="med"/>
+                    </a:lnB>
+                  </a:tcPr>
+                </a:tc>
+                <a:tc>
+                  <a:txBody>
+                    <a:bodyPr/>
+                    <a:lstStyle/>
+                    <a:p>
+                      <a:pPr algn="ctr" indent="0" marL="0">
+                        <a:buNone/>
+                      </a:pPr>
+                      <a:r>
+                        <a:rPr lang="en-US" sz="1100" dirty="0">
+                          <a:solidFill>
+                            <a:srgbClr val="000000"/>
+                          </a:solidFill>
+                        </a:rPr>
+                        <a:t>40.5%</a:t>
+                      </a:r>
+                      <a:endParaRPr lang="en-US" sz="1100" dirty="0"/>
+                    </a:p>
+                  </a:txBody>
+                  <a:tcPr marL="91440" marR="91440" marT="45720" marB="45720">
+                    <a:lnL w="12700" cap="flat" cmpd="sng" algn="ctr">
+                      <a:solidFill>
+                        <a:srgbClr val="CCCCCC"/>
+                      </a:solidFill>
+                      <a:prstDash val="solid"/>
+                      <a:round/>
+                      <a:headEnd type="none" w="med" len="med"/>
+                      <a:tailEnd type="none" w="med" len="med"/>
+                    </a:lnL>
+                    <a:lnR w="12700" cap="flat" cmpd="sng" algn="ctr">
+                      <a:solidFill>
+                        <a:srgbClr val="CCCCCC"/>
+                      </a:solidFill>
+                      <a:prstDash val="solid"/>
+                      <a:round/>
+                      <a:headEnd type="none" w="med" len="med"/>
+                      <a:tailEnd type="none" w="med" len="med"/>
+                    </a:lnR>
+                    <a:lnT w="12700" cap="flat" cmpd="sng" algn="ctr">
+                      <a:solidFill>
+                        <a:srgbClr val="CCCCCC"/>
+                      </a:solidFill>
+                      <a:prstDash val="solid"/>
+                      <a:round/>
+                      <a:headEnd type="none" w="med" len="med"/>
+                      <a:tailEnd type="none" w="med" len="med"/>
+                    </a:lnT>
+                    <a:lnB w="12700" cap="flat" cmpd="sng" algn="ctr">
+                      <a:solidFill>
+                        <a:srgbClr val="CCCCCC"/>
+                      </a:solidFill>
+                      <a:prstDash val="solid"/>
+                      <a:round/>
+                      <a:headEnd type="none" w="med" len="med"/>
+                      <a:tailEnd type="none" w="med" len="med"/>
+                    </a:lnB>
+                  </a:tcPr>
+                </a:tc>
+              </a:tr>
+              <a:tr h="548640">
+                <a:tc>
+                  <a:txBody>
+                    <a:bodyPr/>
+                    <a:lstStyle/>
+                    <a:p>
+                      <a:pPr algn="ctr" indent="0" marL="0">
+                        <a:buNone/>
+                      </a:pPr>
+                      <a:r>
+                        <a:rPr lang="en-US" sz="1100" dirty="0">
+                          <a:solidFill>
+                            <a:srgbClr val="000000"/>
+                          </a:solidFill>
+                        </a:rPr>
+                        <a:t>Zaid</a:t>
+                      </a:r>
+                      <a:endParaRPr lang="en-US" sz="1100" dirty="0"/>
+                    </a:p>
+                  </a:txBody>
+                  <a:tcPr marL="91440" marR="91440" marT="45720" marB="45720">
+                    <a:lnL w="12700" cap="flat" cmpd="sng" algn="ctr">
+                      <a:solidFill>
+                        <a:srgbClr val="CCCCCC"/>
+                      </a:solidFill>
+                      <a:prstDash val="solid"/>
+                      <a:round/>
+                      <a:headEnd type="none" w="med" len="med"/>
+                      <a:tailEnd type="none" w="med" len="med"/>
+                    </a:lnL>
+                    <a:lnR w="12700" cap="flat" cmpd="sng" algn="ctr">
+                      <a:solidFill>
+                        <a:srgbClr val="CCCCCC"/>
+                      </a:solidFill>
+                      <a:prstDash val="solid"/>
+                      <a:round/>
+                      <a:headEnd type="none" w="med" len="med"/>
+                      <a:tailEnd type="none" w="med" len="med"/>
+                    </a:lnR>
+                    <a:lnT w="12700" cap="flat" cmpd="sng" algn="ctr">
+                      <a:solidFill>
+                        <a:srgbClr val="CCCCCC"/>
+                      </a:solidFill>
+                      <a:prstDash val="solid"/>
+                      <a:round/>
+                      <a:headEnd type="none" w="med" len="med"/>
+                      <a:tailEnd type="none" w="med" len="med"/>
+                    </a:lnT>
+                    <a:lnB w="12700" cap="flat" cmpd="sng" algn="ctr">
+                      <a:solidFill>
+                        <a:srgbClr val="CCCCCC"/>
+                      </a:solidFill>
+                      <a:prstDash val="solid"/>
+                      <a:round/>
+                      <a:headEnd type="none" w="med" len="med"/>
+                      <a:tailEnd type="none" w="med" len="med"/>
+                    </a:lnB>
+                  </a:tcPr>
+                </a:tc>
+                <a:tc>
+                  <a:txBody>
+                    <a:bodyPr/>
+                    <a:lstStyle/>
+                    <a:p>
+                      <a:pPr algn="ctr" indent="0" marL="0">
+                        <a:buNone/>
+                      </a:pPr>
+                      <a:r>
+                        <a:rPr lang="en-US" sz="1100" dirty="0">
+                          <a:solidFill>
+                            <a:srgbClr val="000000"/>
+                          </a:solidFill>
+                        </a:rPr>
+                        <a:t>299.4 mm</a:t>
+                      </a:r>
+                      <a:endParaRPr lang="en-US" sz="1100" dirty="0"/>
+                    </a:p>
+                  </a:txBody>
+                  <a:tcPr marL="91440" marR="91440" marT="45720" marB="45720">
+                    <a:lnL w="12700" cap="flat" cmpd="sng" algn="ctr">
+                      <a:solidFill>
+                        <a:srgbClr val="CCCCCC"/>
+                      </a:solidFill>
+                      <a:prstDash val="solid"/>
+                      <a:round/>
+                      <a:headEnd type="none" w="med" len="med"/>
+                      <a:tailEnd type="none" w="med" len="med"/>
+                    </a:lnL>
+                    <a:lnR w="12700" cap="flat" cmpd="sng" algn="ctr">
+                      <a:solidFill>
+                        <a:srgbClr val="CCCCCC"/>
+                      </a:solidFill>
+                      <a:prstDash val="solid"/>
+                      <a:round/>
+                      <a:headEnd type="none" w="med" len="med"/>
+                      <a:tailEnd type="none" w="med" len="med"/>
+                    </a:lnR>
+                    <a:lnT w="12700" cap="flat" cmpd="sng" algn="ctr">
+                      <a:solidFill>
+                        <a:srgbClr val="CCCCCC"/>
+                      </a:solidFill>
+                      <a:prstDash val="solid"/>
+                      <a:round/>
+                      <a:headEnd type="none" w="med" len="med"/>
+                      <a:tailEnd type="none" w="med" len="med"/>
+                    </a:lnT>
+                    <a:lnB w="12700" cap="flat" cmpd="sng" algn="ctr">
+                      <a:solidFill>
+                        <a:srgbClr val="CCCCCC"/>
+                      </a:solidFill>
+                      <a:prstDash val="solid"/>
+                      <a:round/>
+                      <a:headEnd type="none" w="med" len="med"/>
+                      <a:tailEnd type="none" w="med" len="med"/>
+                    </a:lnB>
+                  </a:tcPr>
+                </a:tc>
+                <a:tc>
+                  <a:txBody>
+                    <a:bodyPr/>
+                    <a:lstStyle/>
+                    <a:p>
+                      <a:pPr algn="ctr" indent="0" marL="0">
+                        <a:buNone/>
+                      </a:pPr>
+                      <a:r>
+                        <a:rPr lang="en-US" sz="1100" dirty="0">
+                          <a:solidFill>
+                            <a:srgbClr val="000000"/>
+                          </a:solidFill>
+                        </a:rPr>
+                        <a:t>31.0°C</a:t>
+                      </a:r>
+                      <a:endParaRPr lang="en-US" sz="1100" dirty="0"/>
+                    </a:p>
+                  </a:txBody>
+                  <a:tcPr marL="91440" marR="91440" marT="45720" marB="45720">
+                    <a:lnL w="12700" cap="flat" cmpd="sng" algn="ctr">
+                      <a:solidFill>
+                        <a:srgbClr val="CCCCCC"/>
+                      </a:solidFill>
+                      <a:prstDash val="solid"/>
+                      <a:round/>
+                      <a:headEnd type="none" w="med" len="med"/>
+                      <a:tailEnd type="none" w="med" len="med"/>
+                    </a:lnL>
+                    <a:lnR w="12700" cap="flat" cmpd="sng" algn="ctr">
+                      <a:solidFill>
+                        <a:srgbClr val="CCCCCC"/>
+                      </a:solidFill>
+                      <a:prstDash val="solid"/>
+                      <a:round/>
+                      <a:headEnd type="none" w="med" len="med"/>
+                      <a:tailEnd type="none" w="med" len="med"/>
+                    </a:lnR>
+                    <a:lnT w="12700" cap="flat" cmpd="sng" algn="ctr">
+                      <a:solidFill>
+                        <a:srgbClr val="CCCCCC"/>
+                      </a:solidFill>
+                      <a:prstDash val="solid"/>
+                      <a:round/>
+                      <a:headEnd type="none" w="med" len="med"/>
+                      <a:tailEnd type="none" w="med" len="med"/>
+                    </a:lnT>
+                    <a:lnB w="12700" cap="flat" cmpd="sng" algn="ctr">
+                      <a:solidFill>
+                        <a:srgbClr val="CCCCCC"/>
+                      </a:solidFill>
+                      <a:prstDash val="solid"/>
+                      <a:round/>
+                      <a:headEnd type="none" w="med" len="med"/>
+                      <a:tailEnd type="none" w="med" len="med"/>
+                    </a:lnB>
+                  </a:tcPr>
+                </a:tc>
+                <a:tc>
+                  <a:txBody>
+                    <a:bodyPr/>
+                    <a:lstStyle/>
+                    <a:p>
+                      <a:pPr algn="ctr" indent="0" marL="0">
+                        <a:buNone/>
+                      </a:pPr>
+                      <a:r>
+                        <a:rPr lang="en-US" sz="1100" dirty="0">
+                          <a:solidFill>
+                            <a:srgbClr val="000000"/>
+                          </a:solidFill>
+                        </a:rPr>
+                        <a:t>52.0%</a:t>
+                      </a:r>
+                      <a:endParaRPr lang="en-US" sz="1100" dirty="0"/>
+                    </a:p>
+                  </a:txBody>
+                  <a:tcPr marL="91440" marR="91440" marT="45720" marB="45720">
+                    <a:lnL w="12700" cap="flat" cmpd="sng" algn="ctr">
+                      <a:solidFill>
+                        <a:srgbClr val="CCCCCC"/>
+                      </a:solidFill>
+                      <a:prstDash val="solid"/>
+                      <a:round/>
+                      <a:headEnd type="none" w="med" len="med"/>
+                      <a:tailEnd type="none" w="med" len="med"/>
+                    </a:lnL>
+                    <a:lnR w="12700" cap="flat" cmpd="sng" algn="ctr">
+                      <a:solidFill>
+                        <a:srgbClr val="CCCCCC"/>
+                      </a:solidFill>
+                      <a:prstDash val="solid"/>
+                      <a:round/>
+                      <a:headEnd type="none" w="med" len="med"/>
+                      <a:tailEnd type="none" w="med" len="med"/>
+                    </a:lnR>
+                    <a:lnT w="12700" cap="flat" cmpd="sng" algn="ctr">
+                      <a:solidFill>
+                        <a:srgbClr val="CCCCCC"/>
+                      </a:solidFill>
+                      <a:prstDash val="solid"/>
+                      <a:round/>
+                      <a:headEnd type="none" w="med" len="med"/>
+                      <a:tailEnd type="none" w="med" len="med"/>
+                    </a:lnT>
+                    <a:lnB w="12700" cap="flat" cmpd="sng" algn="ctr">
+                      <a:solidFill>
+                        <a:srgbClr val="CCCCCC"/>
+                      </a:solidFill>
+                      <a:prstDash val="solid"/>
+                      <a:round/>
+                      <a:headEnd type="none" w="med" len="med"/>
+                      <a:tailEnd type="none" w="med" len="med"/>
+                    </a:lnB>
+                  </a:tcPr>
+                </a:tc>
+                <a:tc>
+                  <a:txBody>
+                    <a:bodyPr/>
+                    <a:lstStyle/>
+                    <a:p>
+                      <a:pPr algn="ctr" indent="0" marL="0">
+                        <a:buNone/>
+                      </a:pPr>
+                      <a:r>
+                        <a:rPr lang="en-US" sz="1100" dirty="0">
+                          <a:solidFill>
+                            <a:srgbClr val="000000"/>
+                          </a:solidFill>
+                        </a:rPr>
+                        <a:t>8.18 hrs</a:t>
+                      </a:r>
+                      <a:endParaRPr lang="en-US" sz="1100" dirty="0"/>
+                    </a:p>
+                  </a:txBody>
+                  <a:tcPr marL="91440" marR="91440" marT="45720" marB="45720">
+                    <a:lnL w="12700" cap="flat" cmpd="sng" algn="ctr">
+                      <a:solidFill>
+                        <a:srgbClr val="CCCCCC"/>
+                      </a:solidFill>
+                      <a:prstDash val="solid"/>
+                      <a:round/>
+                      <a:headEnd type="none" w="med" len="med"/>
+                      <a:tailEnd type="none" w="med" len="med"/>
+                    </a:lnL>
+                    <a:lnR w="12700" cap="flat" cmpd="sng" algn="ctr">
+                      <a:solidFill>
+                        <a:srgbClr val="CCCCCC"/>
+                      </a:solidFill>
+                      <a:prstDash val="solid"/>
+                      <a:round/>
+                      <a:headEnd type="none" w="med" len="med"/>
+                      <a:tailEnd type="none" w="med" len="med"/>
+                    </a:lnR>
+                    <a:lnT w="12700" cap="flat" cmpd="sng" algn="ctr">
+                      <a:solidFill>
+                        <a:srgbClr val="CCCCCC"/>
+                      </a:solidFill>
+                      <a:prstDash val="solid"/>
+                      <a:round/>
+                      <a:headEnd type="none" w="med" len="med"/>
+                      <a:tailEnd type="none" w="med" len="med"/>
+                    </a:lnT>
+                    <a:lnB w="12700" cap="flat" cmpd="sng" algn="ctr">
+                      <a:solidFill>
+                        <a:srgbClr val="CCCCCC"/>
+                      </a:solidFill>
+                      <a:prstDash val="solid"/>
+                      <a:round/>
+                      <a:headEnd type="none" w="med" len="med"/>
+                      <a:tailEnd type="none" w="med" len="med"/>
+                    </a:lnB>
+                  </a:tcPr>
+                </a:tc>
+                <a:tc>
+                  <a:txBody>
+                    <a:bodyPr/>
+                    <a:lstStyle/>
+                    <a:p>
+                      <a:pPr algn="ctr" indent="0" marL="0">
+                        <a:buNone/>
+                      </a:pPr>
+                      <a:r>
+                        <a:rPr lang="en-US" sz="1100" dirty="0">
+                          <a:solidFill>
+                            <a:srgbClr val="000000"/>
+                          </a:solidFill>
+                        </a:rPr>
+                        <a:t>38.2%</a:t>
+                      </a:r>
+                      <a:endParaRPr lang="en-US" sz="1100" dirty="0"/>
+                    </a:p>
+                  </a:txBody>
+                  <a:tcPr marL="91440" marR="91440" marT="45720" marB="45720">
+                    <a:lnL w="12700" cap="flat" cmpd="sng" algn="ctr">
+                      <a:solidFill>
+                        <a:srgbClr val="CCCCCC"/>
+                      </a:solidFill>
+                      <a:prstDash val="solid"/>
+                      <a:round/>
+                      <a:headEnd type="none" w="med" len="med"/>
+                      <a:tailEnd type="none" w="med" len="med"/>
+                    </a:lnL>
+                    <a:lnR w="12700" cap="flat" cmpd="sng" algn="ctr">
+                      <a:solidFill>
+                        <a:srgbClr val="CCCCCC"/>
+                      </a:solidFill>
+                      <a:prstDash val="solid"/>
+                      <a:round/>
+                      <a:headEnd type="none" w="med" len="med"/>
+                      <a:tailEnd type="none" w="med" len="med"/>
+                    </a:lnR>
+                    <a:lnT w="12700" cap="flat" cmpd="sng" algn="ctr">
+                      <a:solidFill>
+                        <a:srgbClr val="CCCCCC"/>
+                      </a:solidFill>
+                      <a:prstDash val="solid"/>
+                      <a:round/>
+                      <a:headEnd type="none" w="med" len="med"/>
+                      <a:tailEnd type="none" w="med" len="med"/>
+                    </a:lnT>
+                    <a:lnB w="12700" cap="flat" cmpd="sng" algn="ctr">
+                      <a:solidFill>
+                        <a:srgbClr val="CCCCCC"/>
+                      </a:solidFill>
+                      <a:prstDash val="solid"/>
+                      <a:round/>
+                      <a:headEnd type="none" w="med" len="med"/>
+                      <a:tailEnd type="none" w="med" len="med"/>
+                    </a:lnB>
+                  </a:tcPr>
+                </a:tc>
+              </a:tr>
+            </a:tbl>
+          </a:graphicData>
+        </a:graphic>
+      </p:graphicFrame>
     </p:spTree>
   </p:cSld>
   <p:clrMapOvr>
@@ -10694,7 +11361,7 @@
         <p:spPr>
           <a:xfrm>
             <a:off x="0" y="0"/>
-            <a:ext cx="9144000" cy="914400"/>
+            <a:ext cx="9144000" cy="822960"/>
           </a:xfrm>
           <a:prstGeom prst="rect">
             <a:avLst/>
@@ -10713,8 +11380,8 @@
         </p:nvSpPr>
         <p:spPr>
           <a:xfrm>
-            <a:off x="731520" y="137160"/>
-            <a:ext cx="9144000" cy="640080"/>
+            <a:off x="731520" y="109728"/>
+            <a:ext cx="8686800" cy="594360"/>
           </a:xfrm>
           <a:prstGeom prst="rect">
             <a:avLst/>
@@ -10730,14 +11397,14 @@
               <a:buNone/>
             </a:pPr>
             <a:r>
-              <a:rPr lang="en-US" sz="2400" b="1" dirty="0">
+              <a:rPr lang="en-US" sz="2200" b="1" dirty="0">
                 <a:solidFill>
                   <a:srgbClr val="FFFFFF"/>
                 </a:solidFill>
               </a:rPr>
-              <a:t>Results: Irrigation Methods &amp; Efficiency Benchmark</a:t>
-            </a:r>
-            <a:endParaRPr lang="en-US" sz="2400" dirty="0"/>
+              <a:t>RESULTS: Irrigation Systems &amp; Water Efficiency Distributions</a:t>
+            </a:r>
+            <a:endParaRPr lang="en-US" sz="2200" dirty="0"/>
           </a:p>
         </p:txBody>
       </p:sp>
@@ -10749,8 +11416,8 @@
         </p:nvSpPr>
         <p:spPr>
           <a:xfrm>
-            <a:off x="8686800" y="228600"/>
-            <a:ext cx="2926080" cy="457200"/>
+            <a:off x="8412480" y="182880"/>
+            <a:ext cx="3200400" cy="411480"/>
           </a:xfrm>
           <a:prstGeom prst="rect">
             <a:avLst/>
@@ -10771,9 +11438,185 @@
                   <a:srgbClr val="BBDEFB"/>
                 </a:solidFill>
               </a:rPr>
-              <a:t>Slide 8 of 14</a:t>
+              <a:t>Slide 8 of 14 [Code Output]</a:t>
             </a:r>
             <a:endParaRPr lang="en-US" sz="1100" dirty="0"/>
+          </a:p>
+        </p:txBody>
+      </p:sp>
+      <p:pic>
+        <p:nvPicPr>
+          <p:cNvPr id="5" name="Image 0" descr="C:/Users/ocotp/.gemini/antigravity/brain/2b64254e-8329-498c-9b37-019e1b1a9e41/.user_uploaded/media_1788676491577.png">    </p:cNvPr>
+          <p:cNvPicPr>
+            <a:picLocks noChangeAspect="1"/>
+          </p:cNvPicPr>
+          <p:nvPr/>
+        </p:nvPicPr>
+        <p:blipFill>
+          <a:blip r:embed="rId1"/>
+          <a:stretch>
+            <a:fillRect/>
+          </a:stretch>
+        </p:blipFill>
+        <p:spPr>
+          <a:xfrm>
+            <a:off x="731520" y="1005840"/>
+            <a:ext cx="6583680" cy="2926080"/>
+          </a:xfrm>
+          <a:prstGeom prst="rect">
+            <a:avLst/>
+          </a:prstGeom>
+        </p:spPr>
+      </p:pic>
+      <p:sp>
+        <p:nvSpPr>
+          <p:cNvPr id="6" name="Shape 3"/>
+          <p:cNvSpPr/>
+          <p:nvPr/>
+        </p:nvSpPr>
+        <p:spPr>
+          <a:xfrm>
+            <a:off x="7498080" y="1005840"/>
+            <a:ext cx="3931920" cy="5303520"/>
+          </a:xfrm>
+          <a:prstGeom prst="roundRect">
+            <a:avLst/>
+          </a:prstGeom>
+          <a:solidFill>
+            <a:srgbClr val="FFFFFF"/>
+          </a:solidFill>
+          <a:ln w="12700">
+            <a:solidFill>
+              <a:srgbClr val="B0BEC5"/>
+            </a:solidFill>
+            <a:prstDash val="solid"/>
+          </a:ln>
+        </p:spPr>
+      </p:sp>
+      <p:sp>
+        <p:nvSpPr>
+          <p:cNvPr id="7" name="Text 4"/>
+          <p:cNvSpPr/>
+          <p:nvPr/>
+        </p:nvSpPr>
+        <p:spPr>
+          <a:xfrm>
+            <a:off x="7635240" y="1143000"/>
+            <a:ext cx="3657600" cy="5029200"/>
+          </a:xfrm>
+          <a:prstGeom prst="rect">
+            <a:avLst/>
+          </a:prstGeom>
+          <a:noFill/>
+          <a:ln/>
+        </p:spPr>
+        <p:txBody>
+          <a:bodyPr wrap="square" rtlCol="0" anchor="ctr"/>
+          <a:lstStyle/>
+          <a:p>
+            <a:pPr indent="0" marL="0">
+              <a:buNone/>
+            </a:pPr>
+            <a:r>
+              <a:rPr lang="en-US" sz="1400" b="1" dirty="0">
+                <a:solidFill>
+                  <a:srgbClr val="003366"/>
+                </a:solidFill>
+              </a:rPr>
+              <a:t>Irrigation &amp; Hydrologic Insights:
+</a:t>
+            </a:r>
+            <a:pPr indent="0" marL="0">
+              <a:buNone/>
+            </a:pPr>
+            <a:r>
+              <a:rPr lang="en-US" sz="1250" b="1" dirty="0">
+                <a:solidFill>
+                  <a:srgbClr val="006699"/>
+                </a:solidFill>
+              </a:rPr>
+              <a:t>• Figure 1C (Efficiency Distributions):
+</a:t>
+            </a:r>
+            <a:pPr indent="0" marL="0">
+              <a:buNone/>
+            </a:pPr>
+            <a:r>
+              <a:rPr lang="en-US" sz="1150" dirty="0">
+                <a:solidFill>
+                  <a:srgbClr val="222222"/>
+                </a:solidFill>
+              </a:rPr>
+              <a:t>  - Zaid water efficiency curve is shifted leftwards (mean 4.41 t/1000m³) due to high evaporative demand.
+  - Kharif and Rabi exhibit long right tails reflecting micro-drip irrigated sugarcane/maize farms (&gt;20 t/1000m³).
+</a:t>
+            </a:r>
+            <a:pPr indent="0" marL="0">
+              <a:buNone/>
+            </a:pPr>
+            <a:r>
+              <a:rPr lang="en-US" sz="1250" b="1" dirty="0">
+                <a:solidFill>
+                  <a:srgbClr val="006699"/>
+                </a:solidFill>
+              </a:rPr>
+              <a:t>• Figure 1D (Irrigation Proportions):
+</a:t>
+            </a:r>
+            <a:pPr indent="0" marL="0">
+              <a:buNone/>
+            </a:pPr>
+            <a:r>
+              <a:rPr lang="en-US" sz="1150" dirty="0">
+                <a:solidFill>
+                  <a:srgbClr val="222222"/>
+                </a:solidFill>
+              </a:rPr>
+              <a:t>  - Flood irrigation (orange) accounts for 32–33% across all seasons.</a:t>
+            </a:r>
+            <a:endParaRPr lang="en-US" sz="1400" dirty="0"/>
+          </a:p>
+          <a:p>
+            <a:pPr indent="0" marL="0">
+              <a:buNone/>
+            </a:pPr>
+            <a:r>
+              <a:rPr lang="en-US" sz="1150" dirty="0">
+                <a:solidFill>
+                  <a:srgbClr val="222222"/>
+                </a:solidFill>
+              </a:rPr>
+              <a:t>  - Drip (red) represents 23% of farms.</a:t>
+            </a:r>
+            <a:endParaRPr lang="en-US" sz="1400" dirty="0"/>
+          </a:p>
+          <a:p>
+            <a:pPr indent="0" marL="0">
+              <a:buNone/>
+            </a:pPr>
+            <a:r>
+              <a:rPr lang="en-US" sz="1150" dirty="0">
+                <a:solidFill>
+                  <a:srgbClr val="222222"/>
+                </a:solidFill>
+              </a:rPr>
+              <a:t>  - Sprinkler (purple) represents 18–20% of farms.</a:t>
+            </a:r>
+            <a:endParaRPr lang="en-US" sz="1400" dirty="0"/>
+          </a:p>
+          <a:p>
+            <a:pPr indent="0" marL="0">
+              <a:buNone/>
+            </a:pPr>
+            <a:r>
+              <a:rPr lang="en-US" sz="1150" dirty="0">
+                <a:solidFill>
+                  <a:srgbClr val="222222"/>
+                </a:solidFill>
+              </a:rPr>
+              <a:t>  - Rainfed (green) represents 26% in Kharif/Rabi, dropping in summer.</a:t>
+            </a:r>
+            <a:endParaRPr lang="en-US" sz="1400" dirty="0"/>
           </a:p>
         </p:txBody>
       </p:sp>
@@ -10792,21 +11635,21 @@
           </p:nvPr>
         </p:nvGraphicFramePr>
         <p:xfrm>
-          <a:off x="731520" y="1280160"/>
-          <a:ext cx="10698480" cy="2377440"/>
+          <a:off x="731520" y="4114800"/>
+          <a:ext cx="6583680" cy="2194560"/>
         </p:xfrm>
         <a:graphic>
           <a:graphicData uri="http://schemas.openxmlformats.org/drawingml/2006/table">
             <a:tbl>
               <a:tblPr/>
               <a:tblGrid>
-                <a:gridCol w="2139696"/>
-                <a:gridCol w="2139696"/>
-                <a:gridCol w="2139696"/>
-                <a:gridCol w="2139696"/>
-                <a:gridCol w="2139696"/>
+                <a:gridCol w="1316736"/>
+                <a:gridCol w="1316736"/>
+                <a:gridCol w="1316736"/>
+                <a:gridCol w="1316736"/>
+                <a:gridCol w="1316736"/>
               </a:tblGrid>
-              <a:tr h="475488">
+              <a:tr h="438912">
                 <a:tc>
                   <a:txBody>
                     <a:bodyPr/>
@@ -10816,14 +11659,14 @@
                         <a:buNone/>
                       </a:pPr>
                       <a:r>
-                        <a:rPr lang="en-US" sz="1250" b="1" dirty="0">
+                        <a:rPr lang="en-US" sz="1050" b="1" dirty="0">
                           <a:solidFill>
                             <a:srgbClr val="FFFFFF"/>
                           </a:solidFill>
                         </a:rPr>
                         <a:t>Irrigation Method</a:t>
                       </a:r>
-                      <a:endParaRPr lang="en-US" sz="1250" dirty="0"/>
+                      <a:endParaRPr lang="en-US" sz="1050" dirty="0"/>
                     </a:p>
                   </a:txBody>
                   <a:tcPr marL="91440" marR="91440" marT="45720" marB="45720">
@@ -10877,14 +11720,14 @@
                         <a:buNone/>
                       </a:pPr>
                       <a:r>
-                        <a:rPr lang="en-US" sz="1250" b="1" dirty="0">
+                        <a:rPr lang="en-US" sz="1050" b="1" dirty="0">
                           <a:solidFill>
                             <a:srgbClr val="FFFFFF"/>
                           </a:solidFill>
                         </a:rPr>
-                        <a:t>Sample (N)</a:t>
+                        <a:t>Observations (N)</a:t>
                       </a:r>
-                      <a:endParaRPr lang="en-US" sz="1250" dirty="0"/>
+                      <a:endParaRPr lang="en-US" sz="1050" dirty="0"/>
                     </a:p>
                   </a:txBody>
                   <a:tcPr marL="91440" marR="91440" marT="45720" marB="45720">
@@ -10938,14 +11781,14 @@
                         <a:buNone/>
                       </a:pPr>
                       <a:r>
-                        <a:rPr lang="en-US" sz="1250" b="1" dirty="0">
+                        <a:rPr lang="en-US" sz="1050" b="1" dirty="0">
                           <a:solidFill>
                             <a:srgbClr val="FFFFFF"/>
                           </a:solidFill>
                         </a:rPr>
-                        <a:t>Water Efficiency (t/1000m³)</a:t>
+                        <a:t>Water Efficiency</a:t>
                       </a:r>
-                      <a:endParaRPr lang="en-US" sz="1250" dirty="0"/>
+                      <a:endParaRPr lang="en-US" sz="1050" dirty="0"/>
                     </a:p>
                   </a:txBody>
                   <a:tcPr marL="91440" marR="91440" marT="45720" marB="45720">
@@ -10999,14 +11842,14 @@
                         <a:buNone/>
                       </a:pPr>
                       <a:r>
-                        <a:rPr lang="en-US" sz="1250" b="1" dirty="0">
+                        <a:rPr lang="en-US" sz="1050" b="1" dirty="0">
                           <a:solidFill>
                             <a:srgbClr val="FFFFFF"/>
                           </a:solidFill>
                         </a:rPr>
-                        <a:t>Mean Water Used (m³)</a:t>
+                        <a:t>Mean Groundwater Used</a:t>
                       </a:r>
-                      <a:endParaRPr lang="en-US" sz="1250" dirty="0"/>
+                      <a:endParaRPr lang="en-US" sz="1050" dirty="0"/>
                     </a:p>
                   </a:txBody>
                   <a:tcPr marL="91440" marR="91440" marT="45720" marB="45720">
@@ -11060,14 +11903,14 @@
                         <a:buNone/>
                       </a:pPr>
                       <a:r>
-                        <a:rPr lang="en-US" sz="1250" b="1" dirty="0">
+                        <a:rPr lang="en-US" sz="1050" b="1" dirty="0">
                           <a:solidFill>
                             <a:srgbClr val="FFFFFF"/>
                           </a:solidFill>
                         </a:rPr>
-                        <a:t>Mean Farm Profit (INR)</a:t>
+                        <a:t>Mean Net Profit</a:t>
                       </a:r>
-                      <a:endParaRPr lang="en-US" sz="1250" dirty="0"/>
+                      <a:endParaRPr lang="en-US" sz="1050" dirty="0"/>
                     </a:p>
                   </a:txBody>
                   <a:tcPr marL="91440" marR="91440" marT="45720" marB="45720">
@@ -11113,7 +11956,7 @@
                   </a:tcPr>
                 </a:tc>
               </a:tr>
-              <a:tr h="475488">
+              <a:tr h="438912">
                 <a:tc>
                   <a:txBody>
                     <a:bodyPr/>
@@ -11123,14 +11966,14 @@
                         <a:buNone/>
                       </a:pPr>
                       <a:r>
-                        <a:rPr lang="en-US" sz="1250" b="1" dirty="0">
+                        <a:rPr lang="en-US" sz="1050" b="1" dirty="0">
                           <a:solidFill>
                             <a:srgbClr val="000000"/>
                           </a:solidFill>
                         </a:rPr>
                         <a:t>Drip Irrigation</a:t>
                       </a:r>
-                      <a:endParaRPr lang="en-US" sz="1250" dirty="0"/>
+                      <a:endParaRPr lang="en-US" sz="1050" dirty="0"/>
                     </a:p>
                   </a:txBody>
                   <a:tcPr marL="91440" marR="91440" marT="45720" marB="45720">
@@ -11181,14 +12024,14 @@
                         <a:buNone/>
                       </a:pPr>
                       <a:r>
-                        <a:rPr lang="en-US" sz="1250" dirty="0">
+                        <a:rPr lang="en-US" sz="1050" dirty="0">
                           <a:solidFill>
                             <a:srgbClr val="000000"/>
                           </a:solidFill>
                         </a:rPr>
                         <a:t>915 (22.9%)</a:t>
                       </a:r>
-                      <a:endParaRPr lang="en-US" sz="1250" dirty="0"/>
+                      <a:endParaRPr lang="en-US" sz="1050" dirty="0"/>
                     </a:p>
                   </a:txBody>
                   <a:tcPr marL="91440" marR="91440" marT="45720" marB="45720">
@@ -11239,14 +12082,14 @@
                         <a:buNone/>
                       </a:pPr>
                       <a:r>
-                        <a:rPr lang="en-US" sz="1250" b="1" dirty="0">
+                        <a:rPr lang="en-US" sz="1050" b="1" dirty="0">
                           <a:solidFill>
                             <a:srgbClr val="2E7D32"/>
                           </a:solidFill>
                         </a:rPr>
                         <a:t>6.27 t/1000m³</a:t>
                       </a:r>
-                      <a:endParaRPr lang="en-US" sz="1250" dirty="0"/>
+                      <a:endParaRPr lang="en-US" sz="1050" dirty="0"/>
                     </a:p>
                   </a:txBody>
                   <a:tcPr marL="91440" marR="91440" marT="45720" marB="45720">
@@ -11297,14 +12140,14 @@
                         <a:buNone/>
                       </a:pPr>
                       <a:r>
-                        <a:rPr lang="en-US" sz="1250" dirty="0">
+                        <a:rPr lang="en-US" sz="1050" dirty="0">
                           <a:solidFill>
                             <a:srgbClr val="000000"/>
                           </a:solidFill>
                         </a:rPr>
                         <a:t>6,009 m³</a:t>
                       </a:r>
-                      <a:endParaRPr lang="en-US" sz="1250" dirty="0"/>
+                      <a:endParaRPr lang="en-US" sz="1050" dirty="0"/>
                     </a:p>
                   </a:txBody>
                   <a:tcPr marL="91440" marR="91440" marT="45720" marB="45720">
@@ -11355,14 +12198,14 @@
                         <a:buNone/>
                       </a:pPr>
                       <a:r>
-                        <a:rPr lang="en-US" sz="1250" b="1" dirty="0">
+                        <a:rPr lang="en-US" sz="1050" b="1" dirty="0">
                           <a:solidFill>
                             <a:srgbClr val="2E7D32"/>
                           </a:solidFill>
                         </a:rPr>
-                        <a:t>+INR 2,19,626</a:t>
+                        <a:t>+₹2,19,626</a:t>
                       </a:r>
-                      <a:endParaRPr lang="en-US" sz="1250" dirty="0"/>
+                      <a:endParaRPr lang="en-US" sz="1050" dirty="0"/>
                     </a:p>
                   </a:txBody>
                   <a:tcPr marL="91440" marR="91440" marT="45720" marB="45720">
@@ -11405,7 +12248,7 @@
                   </a:tcPr>
                 </a:tc>
               </a:tr>
-              <a:tr h="475488">
+              <a:tr h="438912">
                 <a:tc>
                   <a:txBody>
                     <a:bodyPr/>
@@ -11415,14 +12258,14 @@
                         <a:buNone/>
                       </a:pPr>
                       <a:r>
-                        <a:rPr lang="en-US" sz="1250" b="1" dirty="0">
+                        <a:rPr lang="en-US" sz="1050" b="1" dirty="0">
                           <a:solidFill>
                             <a:srgbClr val="000000"/>
                           </a:solidFill>
                         </a:rPr>
                         <a:t>Sprinkler Irrigation</a:t>
                       </a:r>
-                      <a:endParaRPr lang="en-US" sz="1250" dirty="0"/>
+                      <a:endParaRPr lang="en-US" sz="1050" dirty="0"/>
                     </a:p>
                   </a:txBody>
                   <a:tcPr marL="91440" marR="91440" marT="45720" marB="45720">
@@ -11473,14 +12316,14 @@
                         <a:buNone/>
                       </a:pPr>
                       <a:r>
-                        <a:rPr lang="en-US" sz="1250" dirty="0">
+                        <a:rPr lang="en-US" sz="1050" dirty="0">
                           <a:solidFill>
                             <a:srgbClr val="000000"/>
                           </a:solidFill>
                         </a:rPr>
                         <a:t>734 (18.4%)</a:t>
                       </a:r>
-                      <a:endParaRPr lang="en-US" sz="1250" dirty="0"/>
+                      <a:endParaRPr lang="en-US" sz="1050" dirty="0"/>
                     </a:p>
                   </a:txBody>
                   <a:tcPr marL="91440" marR="91440" marT="45720" marB="45720">
@@ -11531,14 +12374,14 @@
                         <a:buNone/>
                       </a:pPr>
                       <a:r>
-                        <a:rPr lang="en-US" sz="1250" dirty="0">
+                        <a:rPr lang="en-US" sz="1050" dirty="0">
                           <a:solidFill>
                             <a:srgbClr val="000000"/>
                           </a:solidFill>
                         </a:rPr>
                         <a:t>4.67 t/1000m³</a:t>
                       </a:r>
-                      <a:endParaRPr lang="en-US" sz="1250" dirty="0"/>
+                      <a:endParaRPr lang="en-US" sz="1050" dirty="0"/>
                     </a:p>
                   </a:txBody>
                   <a:tcPr marL="91440" marR="91440" marT="45720" marB="45720">
@@ -11589,14 +12432,14 @@
                         <a:buNone/>
                       </a:pPr>
                       <a:r>
-                        <a:rPr lang="en-US" sz="1250" dirty="0">
+                        <a:rPr lang="en-US" sz="1050" dirty="0">
                           <a:solidFill>
                             <a:srgbClr val="000000"/>
                           </a:solidFill>
                         </a:rPr>
                         <a:t>5,885 m³</a:t>
                       </a:r>
-                      <a:endParaRPr lang="en-US" sz="1250" dirty="0"/>
+                      <a:endParaRPr lang="en-US" sz="1050" dirty="0"/>
                     </a:p>
                   </a:txBody>
                   <a:tcPr marL="91440" marR="91440" marT="45720" marB="45720">
@@ -11647,14 +12490,14 @@
                         <a:buNone/>
                       </a:pPr>
                       <a:r>
-                        <a:rPr lang="en-US" sz="1250" dirty="0">
+                        <a:rPr lang="en-US" sz="1050" dirty="0">
                           <a:solidFill>
                             <a:srgbClr val="000000"/>
                           </a:solidFill>
                         </a:rPr>
-                        <a:t>+INR 91,121</a:t>
+                        <a:t>+₹91,121</a:t>
                       </a:r>
-                      <a:endParaRPr lang="en-US" sz="1250" dirty="0"/>
+                      <a:endParaRPr lang="en-US" sz="1050" dirty="0"/>
                     </a:p>
                   </a:txBody>
                   <a:tcPr marL="91440" marR="91440" marT="45720" marB="45720">
@@ -11697,7 +12540,7 @@
                   </a:tcPr>
                 </a:tc>
               </a:tr>
-              <a:tr h="475488">
+              <a:tr h="438912">
                 <a:tc>
                   <a:txBody>
                     <a:bodyPr/>
@@ -11707,14 +12550,14 @@
                         <a:buNone/>
                       </a:pPr>
                       <a:r>
-                        <a:rPr lang="en-US" sz="1250" b="1" dirty="0">
+                        <a:rPr lang="en-US" sz="1050" b="1" dirty="0">
                           <a:solidFill>
                             <a:srgbClr val="000000"/>
                           </a:solidFill>
                         </a:rPr>
                         <a:t>Flood Irrigation</a:t>
                       </a:r>
-                      <a:endParaRPr lang="en-US" sz="1250" dirty="0"/>
+                      <a:endParaRPr lang="en-US" sz="1050" dirty="0"/>
                     </a:p>
                   </a:txBody>
                   <a:tcPr marL="91440" marR="91440" marT="45720" marB="45720">
@@ -11765,14 +12608,14 @@
                         <a:buNone/>
                       </a:pPr>
                       <a:r>
-                        <a:rPr lang="en-US" sz="1250" dirty="0">
+                        <a:rPr lang="en-US" sz="1050" dirty="0">
                           <a:solidFill>
                             <a:srgbClr val="000000"/>
                           </a:solidFill>
                         </a:rPr>
                         <a:t>1,310 (32.8%)</a:t>
                       </a:r>
-                      <a:endParaRPr lang="en-US" sz="1250" dirty="0"/>
+                      <a:endParaRPr lang="en-US" sz="1050" dirty="0"/>
                     </a:p>
                   </a:txBody>
                   <a:tcPr marL="91440" marR="91440" marT="45720" marB="45720">
@@ -11823,14 +12666,14 @@
                         <a:buNone/>
                       </a:pPr>
                       <a:r>
-                        <a:rPr lang="en-US" sz="1250" b="1" dirty="0">
+                        <a:rPr lang="en-US" sz="1050" b="1" dirty="0">
                           <a:solidFill>
                             <a:srgbClr val="C62828"/>
                           </a:solidFill>
                         </a:rPr>
                         <a:t>3.44 t/1000m³</a:t>
                       </a:r>
-                      <a:endParaRPr lang="en-US" sz="1250" dirty="0"/>
+                      <a:endParaRPr lang="en-US" sz="1050" dirty="0"/>
                     </a:p>
                   </a:txBody>
                   <a:tcPr marL="91440" marR="91440" marT="45720" marB="45720">
@@ -11881,14 +12724,14 @@
                         <a:buNone/>
                       </a:pPr>
                       <a:r>
-                        <a:rPr lang="en-US" sz="1250" dirty="0">
+                        <a:rPr lang="en-US" sz="1050" dirty="0">
                           <a:solidFill>
-                            <a:srgbClr val="C62828"/>
+                            <a:srgbClr val="000000"/>
                           </a:solidFill>
                         </a:rPr>
                         <a:t>9,812 m³</a:t>
                       </a:r>
-                      <a:endParaRPr lang="en-US" sz="1250" dirty="0"/>
+                      <a:endParaRPr lang="en-US" sz="1050" dirty="0"/>
                     </a:p>
                   </a:txBody>
                   <a:tcPr marL="91440" marR="91440" marT="45720" marB="45720">
@@ -11939,14 +12782,14 @@
                         <a:buNone/>
                       </a:pPr>
                       <a:r>
-                        <a:rPr lang="en-US" sz="1250" dirty="0">
+                        <a:rPr lang="en-US" sz="1050" dirty="0">
                           <a:solidFill>
                             <a:srgbClr val="000000"/>
                           </a:solidFill>
                         </a:rPr>
-                        <a:t>+INR 73,354</a:t>
+                        <a:t>+₹73,354</a:t>
                       </a:r>
-                      <a:endParaRPr lang="en-US" sz="1250" dirty="0"/>
+                      <a:endParaRPr lang="en-US" sz="1050" dirty="0"/>
                     </a:p>
                   </a:txBody>
                   <a:tcPr marL="91440" marR="91440" marT="45720" marB="45720">
@@ -11989,7 +12832,7 @@
                   </a:tcPr>
                 </a:tc>
               </a:tr>
-              <a:tr h="475488">
+              <a:tr h="438912">
                 <a:tc>
                   <a:txBody>
                     <a:bodyPr/>
@@ -11999,14 +12842,14 @@
                         <a:buNone/>
                       </a:pPr>
                       <a:r>
-                        <a:rPr lang="en-US" sz="1250" b="1" dirty="0">
+                        <a:rPr lang="en-US" sz="1050" b="1" dirty="0">
                           <a:solidFill>
                             <a:srgbClr val="000000"/>
                           </a:solidFill>
                         </a:rPr>
                         <a:t>Rainfed Farming</a:t>
                       </a:r>
-                      <a:endParaRPr lang="en-US" sz="1250" dirty="0"/>
+                      <a:endParaRPr lang="en-US" sz="1050" dirty="0"/>
                     </a:p>
                   </a:txBody>
                   <a:tcPr marL="91440" marR="91440" marT="45720" marB="45720">
@@ -12057,14 +12900,14 @@
                         <a:buNone/>
                       </a:pPr>
                       <a:r>
-                        <a:rPr lang="en-US" sz="1250" dirty="0">
+                        <a:rPr lang="en-US" sz="1050" dirty="0">
                           <a:solidFill>
                             <a:srgbClr val="000000"/>
                           </a:solidFill>
                         </a:rPr>
                         <a:t>1,041 (26.0%)</a:t>
                       </a:r>
-                      <a:endParaRPr lang="en-US" sz="1250" dirty="0"/>
+                      <a:endParaRPr lang="en-US" sz="1050" dirty="0"/>
                     </a:p>
                   </a:txBody>
                   <a:tcPr marL="91440" marR="91440" marT="45720" marB="45720">
@@ -12115,14 +12958,14 @@
                         <a:buNone/>
                       </a:pPr>
                       <a:r>
-                        <a:rPr lang="en-US" sz="1250" dirty="0">
+                        <a:rPr lang="en-US" sz="1050" dirty="0">
                           <a:solidFill>
                             <a:srgbClr val="000000"/>
                           </a:solidFill>
                         </a:rPr>
                         <a:t>7.56 t/1000m³*</a:t>
                       </a:r>
-                      <a:endParaRPr lang="en-US" sz="1250" dirty="0"/>
+                      <a:endParaRPr lang="en-US" sz="1050" dirty="0"/>
                     </a:p>
                   </a:txBody>
                   <a:tcPr marL="91440" marR="91440" marT="45720" marB="45720">
@@ -12173,14 +13016,14 @@
                         <a:buNone/>
                       </a:pPr>
                       <a:r>
-                        <a:rPr lang="en-US" sz="1250" dirty="0">
+                        <a:rPr lang="en-US" sz="1050" dirty="0">
                           <a:solidFill>
                             <a:srgbClr val="000000"/>
                           </a:solidFill>
                         </a:rPr>
-                        <a:t>3,248 m³ (groundwater)</a:t>
+                        <a:t>3,248 m³</a:t>
                       </a:r>
-                      <a:endParaRPr lang="en-US" sz="1250" dirty="0"/>
+                      <a:endParaRPr lang="en-US" sz="1050" dirty="0"/>
                     </a:p>
                   </a:txBody>
                   <a:tcPr marL="91440" marR="91440" marT="45720" marB="45720">
@@ -12231,14 +13074,14 @@
                         <a:buNone/>
                       </a:pPr>
                       <a:r>
-                        <a:rPr lang="en-US" sz="1250" dirty="0">
+                        <a:rPr lang="en-US" sz="1050" dirty="0">
                           <a:solidFill>
                             <a:srgbClr val="000000"/>
                           </a:solidFill>
                         </a:rPr>
-                        <a:t>+INR 79,050</a:t>
+                        <a:t>+₹79,050</a:t>
                       </a:r>
-                      <a:endParaRPr lang="en-US" sz="1250" dirty="0"/>
+                      <a:endParaRPr lang="en-US" sz="1050" dirty="0"/>
                     </a:p>
                   </a:txBody>
                   <a:tcPr marL="91440" marR="91440" marT="45720" marB="45720">
@@ -12285,78 +13128,6 @@
           </a:graphicData>
         </a:graphic>
       </p:graphicFrame>
-      <p:sp>
-        <p:nvSpPr>
-          <p:cNvPr id="6" name="Text 3"/>
-          <p:cNvSpPr/>
-          <p:nvPr/>
-        </p:nvSpPr>
-        <p:spPr>
-          <a:xfrm>
-            <a:off x="731520" y="4023360"/>
-            <a:ext cx="10698480" cy="2468880"/>
-          </a:xfrm>
-          <a:prstGeom prst="rect">
-            <a:avLst/>
-          </a:prstGeom>
-          <a:noFill/>
-          <a:ln/>
-        </p:spPr>
-        <p:txBody>
-          <a:bodyPr wrap="square" rtlCol="0" anchor="ctr"/>
-          <a:lstStyle/>
-          <a:p>
-            <a:pPr indent="0" marL="0">
-              <a:buNone/>
-            </a:pPr>
-            <a:r>
-              <a:rPr lang="en-US" sz="1450" b="1" dirty="0">
-                <a:solidFill>
-                  <a:srgbClr val="003366"/>
-                </a:solidFill>
-              </a:rPr>
-              <a:t>Critical Irrigation Inefficiency Findings:
-</a:t>
-            </a:r>
-            <a:pPr indent="0" marL="0">
-              <a:buNone/>
-            </a:pPr>
-            <a:r>
-              <a:rPr lang="en-US" sz="1300" dirty="0">
-                <a:solidFill>
-                  <a:srgbClr val="222222"/>
-                </a:solidFill>
-              </a:rPr>
-              <a:t>• Drip Irrigation is 82.3% more water-efficient than Flood Irrigation (6.27 vs 3.44 t/1000m³) and generates 3.0x higher average profit (+INR 2.20L vs +INR 73.4K).
-</a:t>
-            </a:r>
-            <a:pPr indent="0" marL="0">
-              <a:buNone/>
-            </a:pPr>
-            <a:r>
-              <a:rPr lang="en-US" sz="1300" dirty="0">
-                <a:solidFill>
-                  <a:srgbClr val="222222"/>
-                </a:solidFill>
-              </a:rPr>
-              <a:t>• The Summer Flood Trap: In Zaid, farms practicing flood irrigation suffered the lowest efficiency (2.1 t/1000m³) due to severe evaporative losses, losing an average of INR 68,400 per farm.
-</a:t>
-            </a:r>
-            <a:pPr indent="0" marL="0">
-              <a:buNone/>
-            </a:pPr>
-            <a:r>
-              <a:rPr lang="en-US" sz="1300" b="1" dirty="0">
-                <a:solidFill>
-                  <a:srgbClr val="006699"/>
-                </a:solidFill>
-              </a:rPr>
-              <a:t>• Policy Implication: Mandating micro-drip adoption in summer cycles would save up to 3,800 m³ of groundwater per farm while boosting solvency.</a:t>
-            </a:r>
-            <a:endParaRPr lang="en-US" sz="1450" dirty="0"/>
-          </a:p>
-        </p:txBody>
-      </p:sp>
     </p:spTree>
   </p:cSld>
   <p:clrMapOvr>
@@ -12398,7 +13169,7 @@
         <p:spPr>
           <a:xfrm>
             <a:off x="0" y="0"/>
-            <a:ext cx="9144000" cy="914400"/>
+            <a:ext cx="9144000" cy="822960"/>
           </a:xfrm>
           <a:prstGeom prst="rect">
             <a:avLst/>
@@ -12417,8 +13188,8 @@
         </p:nvSpPr>
         <p:spPr>
           <a:xfrm>
-            <a:off x="731520" y="137160"/>
-            <a:ext cx="9144000" cy="640080"/>
+            <a:off x="731520" y="109728"/>
+            <a:ext cx="8686800" cy="594360"/>
           </a:xfrm>
           <a:prstGeom prst="rect">
             <a:avLst/>
@@ -12434,14 +13205,14 @@
               <a:buNone/>
             </a:pPr>
             <a:r>
-              <a:rPr lang="en-US" sz="2400" b="1" dirty="0">
+              <a:rPr lang="en-US" sz="2200" b="1" dirty="0">
                 <a:solidFill>
                   <a:srgbClr val="FFFFFF"/>
                 </a:solidFill>
               </a:rPr>
-              <a:t>Results: The Cereal vs. Cash Crop Divide</a:t>
-            </a:r>
-            <a:endParaRPr lang="en-US" sz="2400" dirty="0"/>
+              <a:t>RESULTS: Executive KPI Dashboard &amp; Regional Profitability Matrix</a:t>
+            </a:r>
+            <a:endParaRPr lang="en-US" sz="2200" dirty="0"/>
           </a:p>
         </p:txBody>
       </p:sp>
@@ -12453,8 +13224,8 @@
         </p:nvSpPr>
         <p:spPr>
           <a:xfrm>
-            <a:off x="8686800" y="228600"/>
-            <a:ext cx="2926080" cy="457200"/>
+            <a:off x="8412480" y="182880"/>
+            <a:ext cx="3200400" cy="411480"/>
           </a:xfrm>
           <a:prstGeom prst="rect">
             <a:avLst/>
@@ -12475,3224 +13246,71 @@
                   <a:srgbClr val="BBDEFB"/>
                 </a:solidFill>
               </a:rPr>
-              <a:t>Slide 9 of 14</a:t>
+              <a:t>Slide 9 of 14 [Code Output]</a:t>
             </a:r>
             <a:endParaRPr lang="en-US" sz="1100" dirty="0"/>
           </a:p>
         </p:txBody>
       </p:sp>
-      <p:graphicFrame>
-        <p:nvGraphicFramePr>
-          <p:cNvPr id="10" name="Table 0"/>
-          <p:cNvGraphicFramePr>
-            <a:graphicFrameLocks noGrp="1"/>
-          </p:cNvGraphicFramePr>
-          <p:nvPr>
-            <p:extLst>
-              <p:ext uri="{D42A27DB-BD31-4B8C-83A1-F6EECF244321}">
-                <p14:modId xmlns:p14="http://schemas.microsoft.com/office/powerpoint/2010/main" val="1579011935"/>
-              </p:ext>
-            </p:extLst>
-          </p:nvPr>
-        </p:nvGraphicFramePr>
-        <p:xfrm>
-          <a:off x="731520" y="1234440"/>
-          <a:ext cx="10698480" cy="3200400"/>
-        </p:xfrm>
-        <a:graphic>
-          <a:graphicData uri="http://schemas.openxmlformats.org/drawingml/2006/table">
-            <a:tbl>
-              <a:tblPr/>
-              <a:tblGrid>
-                <a:gridCol w="1783080"/>
-                <a:gridCol w="1783080"/>
-                <a:gridCol w="1783080"/>
-                <a:gridCol w="1783080"/>
-                <a:gridCol w="1783080"/>
-                <a:gridCol w="1783080"/>
-              </a:tblGrid>
-              <a:tr h="355600">
-                <a:tc>
-                  <a:txBody>
-                    <a:bodyPr/>
-                    <a:lstStyle/>
-                    <a:p>
-                      <a:pPr algn="ctr" indent="0" marL="0">
-                        <a:buNone/>
-                      </a:pPr>
-                      <a:r>
-                        <a:rPr lang="en-US" sz="1100" b="1" dirty="0">
-                          <a:solidFill>
-                            <a:srgbClr val="FFFFFF"/>
-                          </a:solidFill>
-                        </a:rPr>
-                        <a:t>Crop Name</a:t>
-                      </a:r>
-                      <a:endParaRPr lang="en-US" sz="1100" dirty="0"/>
-                    </a:p>
-                  </a:txBody>
-                  <a:tcPr marL="91440" marR="91440" marT="45720" marB="45720">
-                    <a:lnL w="12700" cap="flat" cmpd="sng" algn="ctr">
-                      <a:solidFill>
-                        <a:srgbClr val="CCCCCC"/>
-                      </a:solidFill>
-                      <a:prstDash val="solid"/>
-                      <a:round/>
-                      <a:headEnd type="none" w="med" len="med"/>
-                      <a:tailEnd type="none" w="med" len="med"/>
-                    </a:lnL>
-                    <a:lnR w="12700" cap="flat" cmpd="sng" algn="ctr">
-                      <a:solidFill>
-                        <a:srgbClr val="CCCCCC"/>
-                      </a:solidFill>
-                      <a:prstDash val="solid"/>
-                      <a:round/>
-                      <a:headEnd type="none" w="med" len="med"/>
-                      <a:tailEnd type="none" w="med" len="med"/>
-                    </a:lnR>
-                    <a:lnT w="12700" cap="flat" cmpd="sng" algn="ctr">
-                      <a:solidFill>
-                        <a:srgbClr val="CCCCCC"/>
-                      </a:solidFill>
-                      <a:prstDash val="solid"/>
-                      <a:round/>
-                      <a:headEnd type="none" w="med" len="med"/>
-                      <a:tailEnd type="none" w="med" len="med"/>
-                    </a:lnT>
-                    <a:lnB w="12700" cap="flat" cmpd="sng" algn="ctr">
-                      <a:solidFill>
-                        <a:srgbClr val="CCCCCC"/>
-                      </a:solidFill>
-                      <a:prstDash val="solid"/>
-                      <a:round/>
-                      <a:headEnd type="none" w="med" len="med"/>
-                      <a:tailEnd type="none" w="med" len="med"/>
-                    </a:lnB>
-                    <a:solidFill>
-                      <a:srgbClr val="003366"/>
-                    </a:solidFill>
-                  </a:tcPr>
-                </a:tc>
-                <a:tc>
-                  <a:txBody>
-                    <a:bodyPr/>
-                    <a:lstStyle/>
-                    <a:p>
-                      <a:pPr algn="ctr" indent="0" marL="0">
-                        <a:buNone/>
-                      </a:pPr>
-                      <a:r>
-                        <a:rPr lang="en-US" sz="1100" b="1" dirty="0">
-                          <a:solidFill>
-                            <a:srgbClr val="FFFFFF"/>
-                          </a:solidFill>
-                        </a:rPr>
-                        <a:t>Observations</a:t>
-                      </a:r>
-                      <a:endParaRPr lang="en-US" sz="1100" dirty="0"/>
-                    </a:p>
-                  </a:txBody>
-                  <a:tcPr marL="91440" marR="91440" marT="45720" marB="45720">
-                    <a:lnL w="12700" cap="flat" cmpd="sng" algn="ctr">
-                      <a:solidFill>
-                        <a:srgbClr val="CCCCCC"/>
-                      </a:solidFill>
-                      <a:prstDash val="solid"/>
-                      <a:round/>
-                      <a:headEnd type="none" w="med" len="med"/>
-                      <a:tailEnd type="none" w="med" len="med"/>
-                    </a:lnL>
-                    <a:lnR w="12700" cap="flat" cmpd="sng" algn="ctr">
-                      <a:solidFill>
-                        <a:srgbClr val="CCCCCC"/>
-                      </a:solidFill>
-                      <a:prstDash val="solid"/>
-                      <a:round/>
-                      <a:headEnd type="none" w="med" len="med"/>
-                      <a:tailEnd type="none" w="med" len="med"/>
-                    </a:lnR>
-                    <a:lnT w="12700" cap="flat" cmpd="sng" algn="ctr">
-                      <a:solidFill>
-                        <a:srgbClr val="CCCCCC"/>
-                      </a:solidFill>
-                      <a:prstDash val="solid"/>
-                      <a:round/>
-                      <a:headEnd type="none" w="med" len="med"/>
-                      <a:tailEnd type="none" w="med" len="med"/>
-                    </a:lnT>
-                    <a:lnB w="12700" cap="flat" cmpd="sng" algn="ctr">
-                      <a:solidFill>
-                        <a:srgbClr val="CCCCCC"/>
-                      </a:solidFill>
-                      <a:prstDash val="solid"/>
-                      <a:round/>
-                      <a:headEnd type="none" w="med" len="med"/>
-                      <a:tailEnd type="none" w="med" len="med"/>
-                    </a:lnB>
-                    <a:solidFill>
-                      <a:srgbClr val="003366"/>
-                    </a:solidFill>
-                  </a:tcPr>
-                </a:tc>
-                <a:tc>
-                  <a:txBody>
-                    <a:bodyPr/>
-                    <a:lstStyle/>
-                    <a:p>
-                      <a:pPr algn="ctr" indent="0" marL="0">
-                        <a:buNone/>
-                      </a:pPr>
-                      <a:r>
-                        <a:rPr lang="en-US" sz="1100" b="1" dirty="0">
-                          <a:solidFill>
-                            <a:srgbClr val="FFFFFF"/>
-                          </a:solidFill>
-                        </a:rPr>
-                        <a:t>Mean Yield (t/ha)</a:t>
-                      </a:r>
-                      <a:endParaRPr lang="en-US" sz="1100" dirty="0"/>
-                    </a:p>
-                  </a:txBody>
-                  <a:tcPr marL="91440" marR="91440" marT="45720" marB="45720">
-                    <a:lnL w="12700" cap="flat" cmpd="sng" algn="ctr">
-                      <a:solidFill>
-                        <a:srgbClr val="CCCCCC"/>
-                      </a:solidFill>
-                      <a:prstDash val="solid"/>
-                      <a:round/>
-                      <a:headEnd type="none" w="med" len="med"/>
-                      <a:tailEnd type="none" w="med" len="med"/>
-                    </a:lnL>
-                    <a:lnR w="12700" cap="flat" cmpd="sng" algn="ctr">
-                      <a:solidFill>
-                        <a:srgbClr val="CCCCCC"/>
-                      </a:solidFill>
-                      <a:prstDash val="solid"/>
-                      <a:round/>
-                      <a:headEnd type="none" w="med" len="med"/>
-                      <a:tailEnd type="none" w="med" len="med"/>
-                    </a:lnR>
-                    <a:lnT w="12700" cap="flat" cmpd="sng" algn="ctr">
-                      <a:solidFill>
-                        <a:srgbClr val="CCCCCC"/>
-                      </a:solidFill>
-                      <a:prstDash val="solid"/>
-                      <a:round/>
-                      <a:headEnd type="none" w="med" len="med"/>
-                      <a:tailEnd type="none" w="med" len="med"/>
-                    </a:lnT>
-                    <a:lnB w="12700" cap="flat" cmpd="sng" algn="ctr">
-                      <a:solidFill>
-                        <a:srgbClr val="CCCCCC"/>
-                      </a:solidFill>
-                      <a:prstDash val="solid"/>
-                      <a:round/>
-                      <a:headEnd type="none" w="med" len="med"/>
-                      <a:tailEnd type="none" w="med" len="med"/>
-                    </a:lnB>
-                    <a:solidFill>
-                      <a:srgbClr val="003366"/>
-                    </a:solidFill>
-                  </a:tcPr>
-                </a:tc>
-                <a:tc>
-                  <a:txBody>
-                    <a:bodyPr/>
-                    <a:lstStyle/>
-                    <a:p>
-                      <a:pPr algn="ctr" indent="0" marL="0">
-                        <a:buNone/>
-                      </a:pPr>
-                      <a:r>
-                        <a:rPr lang="en-US" sz="1100" b="1" dirty="0">
-                          <a:solidFill>
-                            <a:srgbClr val="FFFFFF"/>
-                          </a:solidFill>
-                        </a:rPr>
-                        <a:t>Market Price (INR/t)</a:t>
-                      </a:r>
-                      <a:endParaRPr lang="en-US" sz="1100" dirty="0"/>
-                    </a:p>
-                  </a:txBody>
-                  <a:tcPr marL="91440" marR="91440" marT="45720" marB="45720">
-                    <a:lnL w="12700" cap="flat" cmpd="sng" algn="ctr">
-                      <a:solidFill>
-                        <a:srgbClr val="CCCCCC"/>
-                      </a:solidFill>
-                      <a:prstDash val="solid"/>
-                      <a:round/>
-                      <a:headEnd type="none" w="med" len="med"/>
-                      <a:tailEnd type="none" w="med" len="med"/>
-                    </a:lnL>
-                    <a:lnR w="12700" cap="flat" cmpd="sng" algn="ctr">
-                      <a:solidFill>
-                        <a:srgbClr val="CCCCCC"/>
-                      </a:solidFill>
-                      <a:prstDash val="solid"/>
-                      <a:round/>
-                      <a:headEnd type="none" w="med" len="med"/>
-                      <a:tailEnd type="none" w="med" len="med"/>
-                    </a:lnR>
-                    <a:lnT w="12700" cap="flat" cmpd="sng" algn="ctr">
-                      <a:solidFill>
-                        <a:srgbClr val="CCCCCC"/>
-                      </a:solidFill>
-                      <a:prstDash val="solid"/>
-                      <a:round/>
-                      <a:headEnd type="none" w="med" len="med"/>
-                      <a:tailEnd type="none" w="med" len="med"/>
-                    </a:lnT>
-                    <a:lnB w="12700" cap="flat" cmpd="sng" algn="ctr">
-                      <a:solidFill>
-                        <a:srgbClr val="CCCCCC"/>
-                      </a:solidFill>
-                      <a:prstDash val="solid"/>
-                      <a:round/>
-                      <a:headEnd type="none" w="med" len="med"/>
-                      <a:tailEnd type="none" w="med" len="med"/>
-                    </a:lnB>
-                    <a:solidFill>
-                      <a:srgbClr val="003366"/>
-                    </a:solidFill>
-                  </a:tcPr>
-                </a:tc>
-                <a:tc>
-                  <a:txBody>
-                    <a:bodyPr/>
-                    <a:lstStyle/>
-                    <a:p>
-                      <a:pPr algn="ctr" indent="0" marL="0">
-                        <a:buNone/>
-                      </a:pPr>
-                      <a:r>
-                        <a:rPr lang="en-US" sz="1100" b="1" dirty="0">
-                          <a:solidFill>
-                            <a:srgbClr val="FFFFFF"/>
-                          </a:solidFill>
-                        </a:rPr>
-                        <a:t>Average Profit (INR)</a:t>
-                      </a:r>
-                      <a:endParaRPr lang="en-US" sz="1100" dirty="0"/>
-                    </a:p>
-                  </a:txBody>
-                  <a:tcPr marL="91440" marR="91440" marT="45720" marB="45720">
-                    <a:lnL w="12700" cap="flat" cmpd="sng" algn="ctr">
-                      <a:solidFill>
-                        <a:srgbClr val="CCCCCC"/>
-                      </a:solidFill>
-                      <a:prstDash val="solid"/>
-                      <a:round/>
-                      <a:headEnd type="none" w="med" len="med"/>
-                      <a:tailEnd type="none" w="med" len="med"/>
-                    </a:lnL>
-                    <a:lnR w="12700" cap="flat" cmpd="sng" algn="ctr">
-                      <a:solidFill>
-                        <a:srgbClr val="CCCCCC"/>
-                      </a:solidFill>
-                      <a:prstDash val="solid"/>
-                      <a:round/>
-                      <a:headEnd type="none" w="med" len="med"/>
-                      <a:tailEnd type="none" w="med" len="med"/>
-                    </a:lnR>
-                    <a:lnT w="12700" cap="flat" cmpd="sng" algn="ctr">
-                      <a:solidFill>
-                        <a:srgbClr val="CCCCCC"/>
-                      </a:solidFill>
-                      <a:prstDash val="solid"/>
-                      <a:round/>
-                      <a:headEnd type="none" w="med" len="med"/>
-                      <a:tailEnd type="none" w="med" len="med"/>
-                    </a:lnT>
-                    <a:lnB w="12700" cap="flat" cmpd="sng" algn="ctr">
-                      <a:solidFill>
-                        <a:srgbClr val="CCCCCC"/>
-                      </a:solidFill>
-                      <a:prstDash val="solid"/>
-                      <a:round/>
-                      <a:headEnd type="none" w="med" len="med"/>
-                      <a:tailEnd type="none" w="med" len="med"/>
-                    </a:lnB>
-                    <a:solidFill>
-                      <a:srgbClr val="003366"/>
-                    </a:solidFill>
-                  </a:tcPr>
-                </a:tc>
-                <a:tc>
-                  <a:txBody>
-                    <a:bodyPr/>
-                    <a:lstStyle/>
-                    <a:p>
-                      <a:pPr algn="ctr" indent="0" marL="0">
-                        <a:buNone/>
-                      </a:pPr>
-                      <a:r>
-                        <a:rPr lang="en-US" sz="1100" b="1" dirty="0">
-                          <a:solidFill>
-                            <a:srgbClr val="FFFFFF"/>
-                          </a:solidFill>
-                        </a:rPr>
-                        <a:t>Solvency Rate (%)</a:t>
-                      </a:r>
-                      <a:endParaRPr lang="en-US" sz="1100" dirty="0"/>
-                    </a:p>
-                  </a:txBody>
-                  <a:tcPr marL="91440" marR="91440" marT="45720" marB="45720">
-                    <a:lnL w="12700" cap="flat" cmpd="sng" algn="ctr">
-                      <a:solidFill>
-                        <a:srgbClr val="CCCCCC"/>
-                      </a:solidFill>
-                      <a:prstDash val="solid"/>
-                      <a:round/>
-                      <a:headEnd type="none" w="med" len="med"/>
-                      <a:tailEnd type="none" w="med" len="med"/>
-                    </a:lnL>
-                    <a:lnR w="12700" cap="flat" cmpd="sng" algn="ctr">
-                      <a:solidFill>
-                        <a:srgbClr val="CCCCCC"/>
-                      </a:solidFill>
-                      <a:prstDash val="solid"/>
-                      <a:round/>
-                      <a:headEnd type="none" w="med" len="med"/>
-                      <a:tailEnd type="none" w="med" len="med"/>
-                    </a:lnR>
-                    <a:lnT w="12700" cap="flat" cmpd="sng" algn="ctr">
-                      <a:solidFill>
-                        <a:srgbClr val="CCCCCC"/>
-                      </a:solidFill>
-                      <a:prstDash val="solid"/>
-                      <a:round/>
-                      <a:headEnd type="none" w="med" len="med"/>
-                      <a:tailEnd type="none" w="med" len="med"/>
-                    </a:lnT>
-                    <a:lnB w="12700" cap="flat" cmpd="sng" algn="ctr">
-                      <a:solidFill>
-                        <a:srgbClr val="CCCCCC"/>
-                      </a:solidFill>
-                      <a:prstDash val="solid"/>
-                      <a:round/>
-                      <a:headEnd type="none" w="med" len="med"/>
-                      <a:tailEnd type="none" w="med" len="med"/>
-                    </a:lnB>
-                    <a:solidFill>
-                      <a:srgbClr val="003366"/>
-                    </a:solidFill>
-                  </a:tcPr>
-                </a:tc>
-              </a:tr>
-              <a:tr h="355600">
-                <a:tc>
-                  <a:txBody>
-                    <a:bodyPr/>
-                    <a:lstStyle/>
-                    <a:p>
-                      <a:pPr algn="ctr" indent="0" marL="0">
-                        <a:buNone/>
-                      </a:pPr>
-                      <a:r>
-                        <a:rPr lang="en-US" sz="1100" b="1" dirty="0">
-                          <a:solidFill>
-                            <a:srgbClr val="000000"/>
-                          </a:solidFill>
-                        </a:rPr>
-                        <a:t>Sugarcane</a:t>
-                      </a:r>
-                      <a:endParaRPr lang="en-US" sz="1100" dirty="0"/>
-                    </a:p>
-                  </a:txBody>
-                  <a:tcPr marL="91440" marR="91440" marT="45720" marB="45720">
-                    <a:lnL w="12700" cap="flat" cmpd="sng" algn="ctr">
-                      <a:solidFill>
-                        <a:srgbClr val="CCCCCC"/>
-                      </a:solidFill>
-                      <a:prstDash val="solid"/>
-                      <a:round/>
-                      <a:headEnd type="none" w="med" len="med"/>
-                      <a:tailEnd type="none" w="med" len="med"/>
-                    </a:lnL>
-                    <a:lnR w="12700" cap="flat" cmpd="sng" algn="ctr">
-                      <a:solidFill>
-                        <a:srgbClr val="CCCCCC"/>
-                      </a:solidFill>
-                      <a:prstDash val="solid"/>
-                      <a:round/>
-                      <a:headEnd type="none" w="med" len="med"/>
-                      <a:tailEnd type="none" w="med" len="med"/>
-                    </a:lnR>
-                    <a:lnT w="12700" cap="flat" cmpd="sng" algn="ctr">
-                      <a:solidFill>
-                        <a:srgbClr val="CCCCCC"/>
-                      </a:solidFill>
-                      <a:prstDash val="solid"/>
-                      <a:round/>
-                      <a:headEnd type="none" w="med" len="med"/>
-                      <a:tailEnd type="none" w="med" len="med"/>
-                    </a:lnT>
-                    <a:lnB w="12700" cap="flat" cmpd="sng" algn="ctr">
-                      <a:solidFill>
-                        <a:srgbClr val="CCCCCC"/>
-                      </a:solidFill>
-                      <a:prstDash val="solid"/>
-                      <a:round/>
-                      <a:headEnd type="none" w="med" len="med"/>
-                      <a:tailEnd type="none" w="med" len="med"/>
-                    </a:lnB>
-                  </a:tcPr>
-                </a:tc>
-                <a:tc>
-                  <a:txBody>
-                    <a:bodyPr/>
-                    <a:lstStyle/>
-                    <a:p>
-                      <a:pPr algn="ctr" indent="0" marL="0">
-                        <a:buNone/>
-                      </a:pPr>
-                      <a:r>
-                        <a:rPr lang="en-US" sz="1100" dirty="0">
-                          <a:solidFill>
-                            <a:srgbClr val="000000"/>
-                          </a:solidFill>
-                        </a:rPr>
-                        <a:t>305</a:t>
-                      </a:r>
-                      <a:endParaRPr lang="en-US" sz="1100" dirty="0"/>
-                    </a:p>
-                  </a:txBody>
-                  <a:tcPr marL="91440" marR="91440" marT="45720" marB="45720">
-                    <a:lnL w="12700" cap="flat" cmpd="sng" algn="ctr">
-                      <a:solidFill>
-                        <a:srgbClr val="CCCCCC"/>
-                      </a:solidFill>
-                      <a:prstDash val="solid"/>
-                      <a:round/>
-                      <a:headEnd type="none" w="med" len="med"/>
-                      <a:tailEnd type="none" w="med" len="med"/>
-                    </a:lnL>
-                    <a:lnR w="12700" cap="flat" cmpd="sng" algn="ctr">
-                      <a:solidFill>
-                        <a:srgbClr val="CCCCCC"/>
-                      </a:solidFill>
-                      <a:prstDash val="solid"/>
-                      <a:round/>
-                      <a:headEnd type="none" w="med" len="med"/>
-                      <a:tailEnd type="none" w="med" len="med"/>
-                    </a:lnR>
-                    <a:lnT w="12700" cap="flat" cmpd="sng" algn="ctr">
-                      <a:solidFill>
-                        <a:srgbClr val="CCCCCC"/>
-                      </a:solidFill>
-                      <a:prstDash val="solid"/>
-                      <a:round/>
-                      <a:headEnd type="none" w="med" len="med"/>
-                      <a:tailEnd type="none" w="med" len="med"/>
-                    </a:lnT>
-                    <a:lnB w="12700" cap="flat" cmpd="sng" algn="ctr">
-                      <a:solidFill>
-                        <a:srgbClr val="CCCCCC"/>
-                      </a:solidFill>
-                      <a:prstDash val="solid"/>
-                      <a:round/>
-                      <a:headEnd type="none" w="med" len="med"/>
-                      <a:tailEnd type="none" w="med" len="med"/>
-                    </a:lnB>
-                  </a:tcPr>
-                </a:tc>
-                <a:tc>
-                  <a:txBody>
-                    <a:bodyPr/>
-                    <a:lstStyle/>
-                    <a:p>
-                      <a:pPr algn="ctr" indent="0" marL="0">
-                        <a:buNone/>
-                      </a:pPr>
-                      <a:r>
-                        <a:rPr lang="en-US" sz="1100" dirty="0">
-                          <a:solidFill>
-                            <a:srgbClr val="000000"/>
-                          </a:solidFill>
-                        </a:rPr>
-                        <a:t>46.94 t/ha</a:t>
-                      </a:r>
-                      <a:endParaRPr lang="en-US" sz="1100" dirty="0"/>
-                    </a:p>
-                  </a:txBody>
-                  <a:tcPr marL="91440" marR="91440" marT="45720" marB="45720">
-                    <a:lnL w="12700" cap="flat" cmpd="sng" algn="ctr">
-                      <a:solidFill>
-                        <a:srgbClr val="CCCCCC"/>
-                      </a:solidFill>
-                      <a:prstDash val="solid"/>
-                      <a:round/>
-                      <a:headEnd type="none" w="med" len="med"/>
-                      <a:tailEnd type="none" w="med" len="med"/>
-                    </a:lnL>
-                    <a:lnR w="12700" cap="flat" cmpd="sng" algn="ctr">
-                      <a:solidFill>
-                        <a:srgbClr val="CCCCCC"/>
-                      </a:solidFill>
-                      <a:prstDash val="solid"/>
-                      <a:round/>
-                      <a:headEnd type="none" w="med" len="med"/>
-                      <a:tailEnd type="none" w="med" len="med"/>
-                    </a:lnR>
-                    <a:lnT w="12700" cap="flat" cmpd="sng" algn="ctr">
-                      <a:solidFill>
-                        <a:srgbClr val="CCCCCC"/>
-                      </a:solidFill>
-                      <a:prstDash val="solid"/>
-                      <a:round/>
-                      <a:headEnd type="none" w="med" len="med"/>
-                      <a:tailEnd type="none" w="med" len="med"/>
-                    </a:lnT>
-                    <a:lnB w="12700" cap="flat" cmpd="sng" algn="ctr">
-                      <a:solidFill>
-                        <a:srgbClr val="CCCCCC"/>
-                      </a:solidFill>
-                      <a:prstDash val="solid"/>
-                      <a:round/>
-                      <a:headEnd type="none" w="med" len="med"/>
-                      <a:tailEnd type="none" w="med" len="med"/>
-                    </a:lnB>
-                  </a:tcPr>
-                </a:tc>
-                <a:tc>
-                  <a:txBody>
-                    <a:bodyPr/>
-                    <a:lstStyle/>
-                    <a:p>
-                      <a:pPr algn="ctr" indent="0" marL="0">
-                        <a:buNone/>
-                      </a:pPr>
-                      <a:r>
-                        <a:rPr lang="en-US" sz="1100" dirty="0">
-                          <a:solidFill>
-                            <a:srgbClr val="000000"/>
-                          </a:solidFill>
-                        </a:rPr>
-                        <a:t>INR 3,500</a:t>
-                      </a:r>
-                      <a:endParaRPr lang="en-US" sz="1100" dirty="0"/>
-                    </a:p>
-                  </a:txBody>
-                  <a:tcPr marL="91440" marR="91440" marT="45720" marB="45720">
-                    <a:lnL w="12700" cap="flat" cmpd="sng" algn="ctr">
-                      <a:solidFill>
-                        <a:srgbClr val="CCCCCC"/>
-                      </a:solidFill>
-                      <a:prstDash val="solid"/>
-                      <a:round/>
-                      <a:headEnd type="none" w="med" len="med"/>
-                      <a:tailEnd type="none" w="med" len="med"/>
-                    </a:lnL>
-                    <a:lnR w="12700" cap="flat" cmpd="sng" algn="ctr">
-                      <a:solidFill>
-                        <a:srgbClr val="CCCCCC"/>
-                      </a:solidFill>
-                      <a:prstDash val="solid"/>
-                      <a:round/>
-                      <a:headEnd type="none" w="med" len="med"/>
-                      <a:tailEnd type="none" w="med" len="med"/>
-                    </a:lnR>
-                    <a:lnT w="12700" cap="flat" cmpd="sng" algn="ctr">
-                      <a:solidFill>
-                        <a:srgbClr val="CCCCCC"/>
-                      </a:solidFill>
-                      <a:prstDash val="solid"/>
-                      <a:round/>
-                      <a:headEnd type="none" w="med" len="med"/>
-                      <a:tailEnd type="none" w="med" len="med"/>
-                    </a:lnT>
-                    <a:lnB w="12700" cap="flat" cmpd="sng" algn="ctr">
-                      <a:solidFill>
-                        <a:srgbClr val="CCCCCC"/>
-                      </a:solidFill>
-                      <a:prstDash val="solid"/>
-                      <a:round/>
-                      <a:headEnd type="none" w="med" len="med"/>
-                      <a:tailEnd type="none" w="med" len="med"/>
-                    </a:lnB>
-                  </a:tcPr>
-                </a:tc>
-                <a:tc>
-                  <a:txBody>
-                    <a:bodyPr/>
-                    <a:lstStyle/>
-                    <a:p>
-                      <a:pPr algn="ctr" indent="0" marL="0">
-                        <a:buNone/>
-                      </a:pPr>
-                      <a:r>
-                        <a:rPr lang="en-US" sz="1100" b="1" dirty="0">
-                          <a:solidFill>
-                            <a:srgbClr val="2E7D32"/>
-                          </a:solidFill>
-                        </a:rPr>
-                        <a:t>+INR 8,17,188</a:t>
-                      </a:r>
-                      <a:endParaRPr lang="en-US" sz="1100" dirty="0"/>
-                    </a:p>
-                  </a:txBody>
-                  <a:tcPr marL="91440" marR="91440" marT="45720" marB="45720">
-                    <a:lnL w="12700" cap="flat" cmpd="sng" algn="ctr">
-                      <a:solidFill>
-                        <a:srgbClr val="CCCCCC"/>
-                      </a:solidFill>
-                      <a:prstDash val="solid"/>
-                      <a:round/>
-                      <a:headEnd type="none" w="med" len="med"/>
-                      <a:tailEnd type="none" w="med" len="med"/>
-                    </a:lnL>
-                    <a:lnR w="12700" cap="flat" cmpd="sng" algn="ctr">
-                      <a:solidFill>
-                        <a:srgbClr val="CCCCCC"/>
-                      </a:solidFill>
-                      <a:prstDash val="solid"/>
-                      <a:round/>
-                      <a:headEnd type="none" w="med" len="med"/>
-                      <a:tailEnd type="none" w="med" len="med"/>
-                    </a:lnR>
-                    <a:lnT w="12700" cap="flat" cmpd="sng" algn="ctr">
-                      <a:solidFill>
-                        <a:srgbClr val="CCCCCC"/>
-                      </a:solidFill>
-                      <a:prstDash val="solid"/>
-                      <a:round/>
-                      <a:headEnd type="none" w="med" len="med"/>
-                      <a:tailEnd type="none" w="med" len="med"/>
-                    </a:lnT>
-                    <a:lnB w="12700" cap="flat" cmpd="sng" algn="ctr">
-                      <a:solidFill>
-                        <a:srgbClr val="CCCCCC"/>
-                      </a:solidFill>
-                      <a:prstDash val="solid"/>
-                      <a:round/>
-                      <a:headEnd type="none" w="med" len="med"/>
-                      <a:tailEnd type="none" w="med" len="med"/>
-                    </a:lnB>
-                  </a:tcPr>
-                </a:tc>
-                <a:tc>
-                  <a:txBody>
-                    <a:bodyPr/>
-                    <a:lstStyle/>
-                    <a:p>
-                      <a:pPr algn="ctr" indent="0" marL="0">
-                        <a:buNone/>
-                      </a:pPr>
-                      <a:r>
-                        <a:rPr lang="en-US" sz="1100" b="1" dirty="0">
-                          <a:solidFill>
-                            <a:srgbClr val="2E7D32"/>
-                          </a:solidFill>
-                        </a:rPr>
-                        <a:t>88.5%</a:t>
-                      </a:r>
-                      <a:endParaRPr lang="en-US" sz="1100" dirty="0"/>
-                    </a:p>
-                  </a:txBody>
-                  <a:tcPr marL="91440" marR="91440" marT="45720" marB="45720">
-                    <a:lnL w="12700" cap="flat" cmpd="sng" algn="ctr">
-                      <a:solidFill>
-                        <a:srgbClr val="CCCCCC"/>
-                      </a:solidFill>
-                      <a:prstDash val="solid"/>
-                      <a:round/>
-                      <a:headEnd type="none" w="med" len="med"/>
-                      <a:tailEnd type="none" w="med" len="med"/>
-                    </a:lnL>
-                    <a:lnR w="12700" cap="flat" cmpd="sng" algn="ctr">
-                      <a:solidFill>
-                        <a:srgbClr val="CCCCCC"/>
-                      </a:solidFill>
-                      <a:prstDash val="solid"/>
-                      <a:round/>
-                      <a:headEnd type="none" w="med" len="med"/>
-                      <a:tailEnd type="none" w="med" len="med"/>
-                    </a:lnR>
-                    <a:lnT w="12700" cap="flat" cmpd="sng" algn="ctr">
-                      <a:solidFill>
-                        <a:srgbClr val="CCCCCC"/>
-                      </a:solidFill>
-                      <a:prstDash val="solid"/>
-                      <a:round/>
-                      <a:headEnd type="none" w="med" len="med"/>
-                      <a:tailEnd type="none" w="med" len="med"/>
-                    </a:lnT>
-                    <a:lnB w="12700" cap="flat" cmpd="sng" algn="ctr">
-                      <a:solidFill>
-                        <a:srgbClr val="CCCCCC"/>
-                      </a:solidFill>
-                      <a:prstDash val="solid"/>
-                      <a:round/>
-                      <a:headEnd type="none" w="med" len="med"/>
-                      <a:tailEnd type="none" w="med" len="med"/>
-                    </a:lnB>
-                  </a:tcPr>
-                </a:tc>
-              </a:tr>
-              <a:tr h="355600">
-                <a:tc>
-                  <a:txBody>
-                    <a:bodyPr/>
-                    <a:lstStyle/>
-                    <a:p>
-                      <a:pPr algn="ctr" indent="0" marL="0">
-                        <a:buNone/>
-                      </a:pPr>
-                      <a:r>
-                        <a:rPr lang="en-US" sz="1100" b="1" dirty="0">
-                          <a:solidFill>
-                            <a:srgbClr val="000000"/>
-                          </a:solidFill>
-                        </a:rPr>
-                        <a:t>Chilli</a:t>
-                      </a:r>
-                      <a:endParaRPr lang="en-US" sz="1100" dirty="0"/>
-                    </a:p>
-                  </a:txBody>
-                  <a:tcPr marL="91440" marR="91440" marT="45720" marB="45720">
-                    <a:lnL w="12700" cap="flat" cmpd="sng" algn="ctr">
-                      <a:solidFill>
-                        <a:srgbClr val="CCCCCC"/>
-                      </a:solidFill>
-                      <a:prstDash val="solid"/>
-                      <a:round/>
-                      <a:headEnd type="none" w="med" len="med"/>
-                      <a:tailEnd type="none" w="med" len="med"/>
-                    </a:lnL>
-                    <a:lnR w="12700" cap="flat" cmpd="sng" algn="ctr">
-                      <a:solidFill>
-                        <a:srgbClr val="CCCCCC"/>
-                      </a:solidFill>
-                      <a:prstDash val="solid"/>
-                      <a:round/>
-                      <a:headEnd type="none" w="med" len="med"/>
-                      <a:tailEnd type="none" w="med" len="med"/>
-                    </a:lnR>
-                    <a:lnT w="12700" cap="flat" cmpd="sng" algn="ctr">
-                      <a:solidFill>
-                        <a:srgbClr val="CCCCCC"/>
-                      </a:solidFill>
-                      <a:prstDash val="solid"/>
-                      <a:round/>
-                      <a:headEnd type="none" w="med" len="med"/>
-                      <a:tailEnd type="none" w="med" len="med"/>
-                    </a:lnT>
-                    <a:lnB w="12700" cap="flat" cmpd="sng" algn="ctr">
-                      <a:solidFill>
-                        <a:srgbClr val="CCCCCC"/>
-                      </a:solidFill>
-                      <a:prstDash val="solid"/>
-                      <a:round/>
-                      <a:headEnd type="none" w="med" len="med"/>
-                      <a:tailEnd type="none" w="med" len="med"/>
-                    </a:lnB>
-                  </a:tcPr>
-                </a:tc>
-                <a:tc>
-                  <a:txBody>
-                    <a:bodyPr/>
-                    <a:lstStyle/>
-                    <a:p>
-                      <a:pPr algn="ctr" indent="0" marL="0">
-                        <a:buNone/>
-                      </a:pPr>
-                      <a:r>
-                        <a:rPr lang="en-US" sz="1100" dirty="0">
-                          <a:solidFill>
-                            <a:srgbClr val="000000"/>
-                          </a:solidFill>
-                        </a:rPr>
-                        <a:t>412</a:t>
-                      </a:r>
-                      <a:endParaRPr lang="en-US" sz="1100" dirty="0"/>
-                    </a:p>
-                  </a:txBody>
-                  <a:tcPr marL="91440" marR="91440" marT="45720" marB="45720">
-                    <a:lnL w="12700" cap="flat" cmpd="sng" algn="ctr">
-                      <a:solidFill>
-                        <a:srgbClr val="CCCCCC"/>
-                      </a:solidFill>
-                      <a:prstDash val="solid"/>
-                      <a:round/>
-                      <a:headEnd type="none" w="med" len="med"/>
-                      <a:tailEnd type="none" w="med" len="med"/>
-                    </a:lnL>
-                    <a:lnR w="12700" cap="flat" cmpd="sng" algn="ctr">
-                      <a:solidFill>
-                        <a:srgbClr val="CCCCCC"/>
-                      </a:solidFill>
-                      <a:prstDash val="solid"/>
-                      <a:round/>
-                      <a:headEnd type="none" w="med" len="med"/>
-                      <a:tailEnd type="none" w="med" len="med"/>
-                    </a:lnR>
-                    <a:lnT w="12700" cap="flat" cmpd="sng" algn="ctr">
-                      <a:solidFill>
-                        <a:srgbClr val="CCCCCC"/>
-                      </a:solidFill>
-                      <a:prstDash val="solid"/>
-                      <a:round/>
-                      <a:headEnd type="none" w="med" len="med"/>
-                      <a:tailEnd type="none" w="med" len="med"/>
-                    </a:lnT>
-                    <a:lnB w="12700" cap="flat" cmpd="sng" algn="ctr">
-                      <a:solidFill>
-                        <a:srgbClr val="CCCCCC"/>
-                      </a:solidFill>
-                      <a:prstDash val="solid"/>
-                      <a:round/>
-                      <a:headEnd type="none" w="med" len="med"/>
-                      <a:tailEnd type="none" w="med" len="med"/>
-                    </a:lnB>
-                  </a:tcPr>
-                </a:tc>
-                <a:tc>
-                  <a:txBody>
-                    <a:bodyPr/>
-                    <a:lstStyle/>
-                    <a:p>
-                      <a:pPr algn="ctr" indent="0" marL="0">
-                        <a:buNone/>
-                      </a:pPr>
-                      <a:r>
-                        <a:rPr lang="en-US" sz="1100" dirty="0">
-                          <a:solidFill>
-                            <a:srgbClr val="000000"/>
-                          </a:solidFill>
-                        </a:rPr>
-                        <a:t>1.54 t/ha</a:t>
-                      </a:r>
-                      <a:endParaRPr lang="en-US" sz="1100" dirty="0"/>
-                    </a:p>
-                  </a:txBody>
-                  <a:tcPr marL="91440" marR="91440" marT="45720" marB="45720">
-                    <a:lnL w="12700" cap="flat" cmpd="sng" algn="ctr">
-                      <a:solidFill>
-                        <a:srgbClr val="CCCCCC"/>
-                      </a:solidFill>
-                      <a:prstDash val="solid"/>
-                      <a:round/>
-                      <a:headEnd type="none" w="med" len="med"/>
-                      <a:tailEnd type="none" w="med" len="med"/>
-                    </a:lnL>
-                    <a:lnR w="12700" cap="flat" cmpd="sng" algn="ctr">
-                      <a:solidFill>
-                        <a:srgbClr val="CCCCCC"/>
-                      </a:solidFill>
-                      <a:prstDash val="solid"/>
-                      <a:round/>
-                      <a:headEnd type="none" w="med" len="med"/>
-                      <a:tailEnd type="none" w="med" len="med"/>
-                    </a:lnR>
-                    <a:lnT w="12700" cap="flat" cmpd="sng" algn="ctr">
-                      <a:solidFill>
-                        <a:srgbClr val="CCCCCC"/>
-                      </a:solidFill>
-                      <a:prstDash val="solid"/>
-                      <a:round/>
-                      <a:headEnd type="none" w="med" len="med"/>
-                      <a:tailEnd type="none" w="med" len="med"/>
-                    </a:lnT>
-                    <a:lnB w="12700" cap="flat" cmpd="sng" algn="ctr">
-                      <a:solidFill>
-                        <a:srgbClr val="CCCCCC"/>
-                      </a:solidFill>
-                      <a:prstDash val="solid"/>
-                      <a:round/>
-                      <a:headEnd type="none" w="med" len="med"/>
-                      <a:tailEnd type="none" w="med" len="med"/>
-                    </a:lnB>
-                  </a:tcPr>
-                </a:tc>
-                <a:tc>
-                  <a:txBody>
-                    <a:bodyPr/>
-                    <a:lstStyle/>
-                    <a:p>
-                      <a:pPr algn="ctr" indent="0" marL="0">
-                        <a:buNone/>
-                      </a:pPr>
-                      <a:r>
-                        <a:rPr lang="en-US" sz="1100" dirty="0">
-                          <a:solidFill>
-                            <a:srgbClr val="000000"/>
-                          </a:solidFill>
-                        </a:rPr>
-                        <a:t>INR 1,02,500</a:t>
-                      </a:r>
-                      <a:endParaRPr lang="en-US" sz="1100" dirty="0"/>
-                    </a:p>
-                  </a:txBody>
-                  <a:tcPr marL="91440" marR="91440" marT="45720" marB="45720">
-                    <a:lnL w="12700" cap="flat" cmpd="sng" algn="ctr">
-                      <a:solidFill>
-                        <a:srgbClr val="CCCCCC"/>
-                      </a:solidFill>
-                      <a:prstDash val="solid"/>
-                      <a:round/>
-                      <a:headEnd type="none" w="med" len="med"/>
-                      <a:tailEnd type="none" w="med" len="med"/>
-                    </a:lnL>
-                    <a:lnR w="12700" cap="flat" cmpd="sng" algn="ctr">
-                      <a:solidFill>
-                        <a:srgbClr val="CCCCCC"/>
-                      </a:solidFill>
-                      <a:prstDash val="solid"/>
-                      <a:round/>
-                      <a:headEnd type="none" w="med" len="med"/>
-                      <a:tailEnd type="none" w="med" len="med"/>
-                    </a:lnR>
-                    <a:lnT w="12700" cap="flat" cmpd="sng" algn="ctr">
-                      <a:solidFill>
-                        <a:srgbClr val="CCCCCC"/>
-                      </a:solidFill>
-                      <a:prstDash val="solid"/>
-                      <a:round/>
-                      <a:headEnd type="none" w="med" len="med"/>
-                      <a:tailEnd type="none" w="med" len="med"/>
-                    </a:lnT>
-                    <a:lnB w="12700" cap="flat" cmpd="sng" algn="ctr">
-                      <a:solidFill>
-                        <a:srgbClr val="CCCCCC"/>
-                      </a:solidFill>
-                      <a:prstDash val="solid"/>
-                      <a:round/>
-                      <a:headEnd type="none" w="med" len="med"/>
-                      <a:tailEnd type="none" w="med" len="med"/>
-                    </a:lnB>
-                  </a:tcPr>
-                </a:tc>
-                <a:tc>
-                  <a:txBody>
-                    <a:bodyPr/>
-                    <a:lstStyle/>
-                    <a:p>
-                      <a:pPr algn="ctr" indent="0" marL="0">
-                        <a:buNone/>
-                      </a:pPr>
-                      <a:r>
-                        <a:rPr lang="en-US" sz="1100" b="1" dirty="0">
-                          <a:solidFill>
-                            <a:srgbClr val="2E7D32"/>
-                          </a:solidFill>
-                        </a:rPr>
-                        <a:t>+INR 7,50,878</a:t>
-                      </a:r>
-                      <a:endParaRPr lang="en-US" sz="1100" dirty="0"/>
-                    </a:p>
-                  </a:txBody>
-                  <a:tcPr marL="91440" marR="91440" marT="45720" marB="45720">
-                    <a:lnL w="12700" cap="flat" cmpd="sng" algn="ctr">
-                      <a:solidFill>
-                        <a:srgbClr val="CCCCCC"/>
-                      </a:solidFill>
-                      <a:prstDash val="solid"/>
-                      <a:round/>
-                      <a:headEnd type="none" w="med" len="med"/>
-                      <a:tailEnd type="none" w="med" len="med"/>
-                    </a:lnL>
-                    <a:lnR w="12700" cap="flat" cmpd="sng" algn="ctr">
-                      <a:solidFill>
-                        <a:srgbClr val="CCCCCC"/>
-                      </a:solidFill>
-                      <a:prstDash val="solid"/>
-                      <a:round/>
-                      <a:headEnd type="none" w="med" len="med"/>
-                      <a:tailEnd type="none" w="med" len="med"/>
-                    </a:lnR>
-                    <a:lnT w="12700" cap="flat" cmpd="sng" algn="ctr">
-                      <a:solidFill>
-                        <a:srgbClr val="CCCCCC"/>
-                      </a:solidFill>
-                      <a:prstDash val="solid"/>
-                      <a:round/>
-                      <a:headEnd type="none" w="med" len="med"/>
-                      <a:tailEnd type="none" w="med" len="med"/>
-                    </a:lnT>
-                    <a:lnB w="12700" cap="flat" cmpd="sng" algn="ctr">
-                      <a:solidFill>
-                        <a:srgbClr val="CCCCCC"/>
-                      </a:solidFill>
-                      <a:prstDash val="solid"/>
-                      <a:round/>
-                      <a:headEnd type="none" w="med" len="med"/>
-                      <a:tailEnd type="none" w="med" len="med"/>
-                    </a:lnB>
-                  </a:tcPr>
-                </a:tc>
-                <a:tc>
-                  <a:txBody>
-                    <a:bodyPr/>
-                    <a:lstStyle/>
-                    <a:p>
-                      <a:pPr algn="ctr" indent="0" marL="0">
-                        <a:buNone/>
-                      </a:pPr>
-                      <a:r>
-                        <a:rPr lang="en-US" sz="1100" b="1" dirty="0">
-                          <a:solidFill>
-                            <a:srgbClr val="2E7D32"/>
-                          </a:solidFill>
-                        </a:rPr>
-                        <a:t>82.0%</a:t>
-                      </a:r>
-                      <a:endParaRPr lang="en-US" sz="1100" dirty="0"/>
-                    </a:p>
-                  </a:txBody>
-                  <a:tcPr marL="91440" marR="91440" marT="45720" marB="45720">
-                    <a:lnL w="12700" cap="flat" cmpd="sng" algn="ctr">
-                      <a:solidFill>
-                        <a:srgbClr val="CCCCCC"/>
-                      </a:solidFill>
-                      <a:prstDash val="solid"/>
-                      <a:round/>
-                      <a:headEnd type="none" w="med" len="med"/>
-                      <a:tailEnd type="none" w="med" len="med"/>
-                    </a:lnL>
-                    <a:lnR w="12700" cap="flat" cmpd="sng" algn="ctr">
-                      <a:solidFill>
-                        <a:srgbClr val="CCCCCC"/>
-                      </a:solidFill>
-                      <a:prstDash val="solid"/>
-                      <a:round/>
-                      <a:headEnd type="none" w="med" len="med"/>
-                      <a:tailEnd type="none" w="med" len="med"/>
-                    </a:lnR>
-                    <a:lnT w="12700" cap="flat" cmpd="sng" algn="ctr">
-                      <a:solidFill>
-                        <a:srgbClr val="CCCCCC"/>
-                      </a:solidFill>
-                      <a:prstDash val="solid"/>
-                      <a:round/>
-                      <a:headEnd type="none" w="med" len="med"/>
-                      <a:tailEnd type="none" w="med" len="med"/>
-                    </a:lnT>
-                    <a:lnB w="12700" cap="flat" cmpd="sng" algn="ctr">
-                      <a:solidFill>
-                        <a:srgbClr val="CCCCCC"/>
-                      </a:solidFill>
-                      <a:prstDash val="solid"/>
-                      <a:round/>
-                      <a:headEnd type="none" w="med" len="med"/>
-                      <a:tailEnd type="none" w="med" len="med"/>
-                    </a:lnB>
-                  </a:tcPr>
-                </a:tc>
-              </a:tr>
-              <a:tr h="355600">
-                <a:tc>
-                  <a:txBody>
-                    <a:bodyPr/>
-                    <a:lstStyle/>
-                    <a:p>
-                      <a:pPr algn="ctr" indent="0" marL="0">
-                        <a:buNone/>
-                      </a:pPr>
-                      <a:r>
-                        <a:rPr lang="en-US" sz="1100" b="1" dirty="0">
-                          <a:solidFill>
-                            <a:srgbClr val="000000"/>
-                          </a:solidFill>
-                        </a:rPr>
-                        <a:t>Cotton</a:t>
-                      </a:r>
-                      <a:endParaRPr lang="en-US" sz="1100" dirty="0"/>
-                    </a:p>
-                  </a:txBody>
-                  <a:tcPr marL="91440" marR="91440" marT="45720" marB="45720">
-                    <a:lnL w="12700" cap="flat" cmpd="sng" algn="ctr">
-                      <a:solidFill>
-                        <a:srgbClr val="CCCCCC"/>
-                      </a:solidFill>
-                      <a:prstDash val="solid"/>
-                      <a:round/>
-                      <a:headEnd type="none" w="med" len="med"/>
-                      <a:tailEnd type="none" w="med" len="med"/>
-                    </a:lnL>
-                    <a:lnR w="12700" cap="flat" cmpd="sng" algn="ctr">
-                      <a:solidFill>
-                        <a:srgbClr val="CCCCCC"/>
-                      </a:solidFill>
-                      <a:prstDash val="solid"/>
-                      <a:round/>
-                      <a:headEnd type="none" w="med" len="med"/>
-                      <a:tailEnd type="none" w="med" len="med"/>
-                    </a:lnR>
-                    <a:lnT w="12700" cap="flat" cmpd="sng" algn="ctr">
-                      <a:solidFill>
-                        <a:srgbClr val="CCCCCC"/>
-                      </a:solidFill>
-                      <a:prstDash val="solid"/>
-                      <a:round/>
-                      <a:headEnd type="none" w="med" len="med"/>
-                      <a:tailEnd type="none" w="med" len="med"/>
-                    </a:lnT>
-                    <a:lnB w="12700" cap="flat" cmpd="sng" algn="ctr">
-                      <a:solidFill>
-                        <a:srgbClr val="CCCCCC"/>
-                      </a:solidFill>
-                      <a:prstDash val="solid"/>
-                      <a:round/>
-                      <a:headEnd type="none" w="med" len="med"/>
-                      <a:tailEnd type="none" w="med" len="med"/>
-                    </a:lnB>
-                  </a:tcPr>
-                </a:tc>
-                <a:tc>
-                  <a:txBody>
-                    <a:bodyPr/>
-                    <a:lstStyle/>
-                    <a:p>
-                      <a:pPr algn="ctr" indent="0" marL="0">
-                        <a:buNone/>
-                      </a:pPr>
-                      <a:r>
-                        <a:rPr lang="en-US" sz="1100" dirty="0">
-                          <a:solidFill>
-                            <a:srgbClr val="000000"/>
-                          </a:solidFill>
-                        </a:rPr>
-                        <a:t>508</a:t>
-                      </a:r>
-                      <a:endParaRPr lang="en-US" sz="1100" dirty="0"/>
-                    </a:p>
-                  </a:txBody>
-                  <a:tcPr marL="91440" marR="91440" marT="45720" marB="45720">
-                    <a:lnL w="12700" cap="flat" cmpd="sng" algn="ctr">
-                      <a:solidFill>
-                        <a:srgbClr val="CCCCCC"/>
-                      </a:solidFill>
-                      <a:prstDash val="solid"/>
-                      <a:round/>
-                      <a:headEnd type="none" w="med" len="med"/>
-                      <a:tailEnd type="none" w="med" len="med"/>
-                    </a:lnL>
-                    <a:lnR w="12700" cap="flat" cmpd="sng" algn="ctr">
-                      <a:solidFill>
-                        <a:srgbClr val="CCCCCC"/>
-                      </a:solidFill>
-                      <a:prstDash val="solid"/>
-                      <a:round/>
-                      <a:headEnd type="none" w="med" len="med"/>
-                      <a:tailEnd type="none" w="med" len="med"/>
-                    </a:lnR>
-                    <a:lnT w="12700" cap="flat" cmpd="sng" algn="ctr">
-                      <a:solidFill>
-                        <a:srgbClr val="CCCCCC"/>
-                      </a:solidFill>
-                      <a:prstDash val="solid"/>
-                      <a:round/>
-                      <a:headEnd type="none" w="med" len="med"/>
-                      <a:tailEnd type="none" w="med" len="med"/>
-                    </a:lnT>
-                    <a:lnB w="12700" cap="flat" cmpd="sng" algn="ctr">
-                      <a:solidFill>
-                        <a:srgbClr val="CCCCCC"/>
-                      </a:solidFill>
-                      <a:prstDash val="solid"/>
-                      <a:round/>
-                      <a:headEnd type="none" w="med" len="med"/>
-                      <a:tailEnd type="none" w="med" len="med"/>
-                    </a:lnB>
-                  </a:tcPr>
-                </a:tc>
-                <a:tc>
-                  <a:txBody>
-                    <a:bodyPr/>
-                    <a:lstStyle/>
-                    <a:p>
-                      <a:pPr algn="ctr" indent="0" marL="0">
-                        <a:buNone/>
-                      </a:pPr>
-                      <a:r>
-                        <a:rPr lang="en-US" sz="1100" dirty="0">
-                          <a:solidFill>
-                            <a:srgbClr val="000000"/>
-                          </a:solidFill>
-                        </a:rPr>
-                        <a:t>1.23 t/ha</a:t>
-                      </a:r>
-                      <a:endParaRPr lang="en-US" sz="1100" dirty="0"/>
-                    </a:p>
-                  </a:txBody>
-                  <a:tcPr marL="91440" marR="91440" marT="45720" marB="45720">
-                    <a:lnL w="12700" cap="flat" cmpd="sng" algn="ctr">
-                      <a:solidFill>
-                        <a:srgbClr val="CCCCCC"/>
-                      </a:solidFill>
-                      <a:prstDash val="solid"/>
-                      <a:round/>
-                      <a:headEnd type="none" w="med" len="med"/>
-                      <a:tailEnd type="none" w="med" len="med"/>
-                    </a:lnL>
-                    <a:lnR w="12700" cap="flat" cmpd="sng" algn="ctr">
-                      <a:solidFill>
-                        <a:srgbClr val="CCCCCC"/>
-                      </a:solidFill>
-                      <a:prstDash val="solid"/>
-                      <a:round/>
-                      <a:headEnd type="none" w="med" len="med"/>
-                      <a:tailEnd type="none" w="med" len="med"/>
-                    </a:lnR>
-                    <a:lnT w="12700" cap="flat" cmpd="sng" algn="ctr">
-                      <a:solidFill>
-                        <a:srgbClr val="CCCCCC"/>
-                      </a:solidFill>
-                      <a:prstDash val="solid"/>
-                      <a:round/>
-                      <a:headEnd type="none" w="med" len="med"/>
-                      <a:tailEnd type="none" w="med" len="med"/>
-                    </a:lnT>
-                    <a:lnB w="12700" cap="flat" cmpd="sng" algn="ctr">
-                      <a:solidFill>
-                        <a:srgbClr val="CCCCCC"/>
-                      </a:solidFill>
-                      <a:prstDash val="solid"/>
-                      <a:round/>
-                      <a:headEnd type="none" w="med" len="med"/>
-                      <a:tailEnd type="none" w="med" len="med"/>
-                    </a:lnB>
-                  </a:tcPr>
-                </a:tc>
-                <a:tc>
-                  <a:txBody>
-                    <a:bodyPr/>
-                    <a:lstStyle/>
-                    <a:p>
-                      <a:pPr algn="ctr" indent="0" marL="0">
-                        <a:buNone/>
-                      </a:pPr>
-                      <a:r>
-                        <a:rPr lang="en-US" sz="1100" dirty="0">
-                          <a:solidFill>
-                            <a:srgbClr val="000000"/>
-                          </a:solidFill>
-                        </a:rPr>
-                        <a:t>INR 67,500</a:t>
-                      </a:r>
-                      <a:endParaRPr lang="en-US" sz="1100" dirty="0"/>
-                    </a:p>
-                  </a:txBody>
-                  <a:tcPr marL="91440" marR="91440" marT="45720" marB="45720">
-                    <a:lnL w="12700" cap="flat" cmpd="sng" algn="ctr">
-                      <a:solidFill>
-                        <a:srgbClr val="CCCCCC"/>
-                      </a:solidFill>
-                      <a:prstDash val="solid"/>
-                      <a:round/>
-                      <a:headEnd type="none" w="med" len="med"/>
-                      <a:tailEnd type="none" w="med" len="med"/>
-                    </a:lnL>
-                    <a:lnR w="12700" cap="flat" cmpd="sng" algn="ctr">
-                      <a:solidFill>
-                        <a:srgbClr val="CCCCCC"/>
-                      </a:solidFill>
-                      <a:prstDash val="solid"/>
-                      <a:round/>
-                      <a:headEnd type="none" w="med" len="med"/>
-                      <a:tailEnd type="none" w="med" len="med"/>
-                    </a:lnR>
-                    <a:lnT w="12700" cap="flat" cmpd="sng" algn="ctr">
-                      <a:solidFill>
-                        <a:srgbClr val="CCCCCC"/>
-                      </a:solidFill>
-                      <a:prstDash val="solid"/>
-                      <a:round/>
-                      <a:headEnd type="none" w="med" len="med"/>
-                      <a:tailEnd type="none" w="med" len="med"/>
-                    </a:lnT>
-                    <a:lnB w="12700" cap="flat" cmpd="sng" algn="ctr">
-                      <a:solidFill>
-                        <a:srgbClr val="CCCCCC"/>
-                      </a:solidFill>
-                      <a:prstDash val="solid"/>
-                      <a:round/>
-                      <a:headEnd type="none" w="med" len="med"/>
-                      <a:tailEnd type="none" w="med" len="med"/>
-                    </a:lnB>
-                  </a:tcPr>
-                </a:tc>
-                <a:tc>
-                  <a:txBody>
-                    <a:bodyPr/>
-                    <a:lstStyle/>
-                    <a:p>
-                      <a:pPr algn="ctr" indent="0" marL="0">
-                        <a:buNone/>
-                      </a:pPr>
-                      <a:r>
-                        <a:rPr lang="en-US" sz="1100" dirty="0">
-                          <a:solidFill>
-                            <a:srgbClr val="2E7D32"/>
-                          </a:solidFill>
-                        </a:rPr>
-                        <a:t>+INR 1,24,547</a:t>
-                      </a:r>
-                      <a:endParaRPr lang="en-US" sz="1100" dirty="0"/>
-                    </a:p>
-                  </a:txBody>
-                  <a:tcPr marL="91440" marR="91440" marT="45720" marB="45720">
-                    <a:lnL w="12700" cap="flat" cmpd="sng" algn="ctr">
-                      <a:solidFill>
-                        <a:srgbClr val="CCCCCC"/>
-                      </a:solidFill>
-                      <a:prstDash val="solid"/>
-                      <a:round/>
-                      <a:headEnd type="none" w="med" len="med"/>
-                      <a:tailEnd type="none" w="med" len="med"/>
-                    </a:lnL>
-                    <a:lnR w="12700" cap="flat" cmpd="sng" algn="ctr">
-                      <a:solidFill>
-                        <a:srgbClr val="CCCCCC"/>
-                      </a:solidFill>
-                      <a:prstDash val="solid"/>
-                      <a:round/>
-                      <a:headEnd type="none" w="med" len="med"/>
-                      <a:tailEnd type="none" w="med" len="med"/>
-                    </a:lnR>
-                    <a:lnT w="12700" cap="flat" cmpd="sng" algn="ctr">
-                      <a:solidFill>
-                        <a:srgbClr val="CCCCCC"/>
-                      </a:solidFill>
-                      <a:prstDash val="solid"/>
-                      <a:round/>
-                      <a:headEnd type="none" w="med" len="med"/>
-                      <a:tailEnd type="none" w="med" len="med"/>
-                    </a:lnT>
-                    <a:lnB w="12700" cap="flat" cmpd="sng" algn="ctr">
-                      <a:solidFill>
-                        <a:srgbClr val="CCCCCC"/>
-                      </a:solidFill>
-                      <a:prstDash val="solid"/>
-                      <a:round/>
-                      <a:headEnd type="none" w="med" len="med"/>
-                      <a:tailEnd type="none" w="med" len="med"/>
-                    </a:lnB>
-                  </a:tcPr>
-                </a:tc>
-                <a:tc>
-                  <a:txBody>
-                    <a:bodyPr/>
-                    <a:lstStyle/>
-                    <a:p>
-                      <a:pPr algn="ctr" indent="0" marL="0">
-                        <a:buNone/>
-                      </a:pPr>
-                      <a:r>
-                        <a:rPr lang="en-US" sz="1100" dirty="0">
-                          <a:solidFill>
-                            <a:srgbClr val="000000"/>
-                          </a:solidFill>
-                        </a:rPr>
-                        <a:t>65.4%</a:t>
-                      </a:r>
-                      <a:endParaRPr lang="en-US" sz="1100" dirty="0"/>
-                    </a:p>
-                  </a:txBody>
-                  <a:tcPr marL="91440" marR="91440" marT="45720" marB="45720">
-                    <a:lnL w="12700" cap="flat" cmpd="sng" algn="ctr">
-                      <a:solidFill>
-                        <a:srgbClr val="CCCCCC"/>
-                      </a:solidFill>
-                      <a:prstDash val="solid"/>
-                      <a:round/>
-                      <a:headEnd type="none" w="med" len="med"/>
-                      <a:tailEnd type="none" w="med" len="med"/>
-                    </a:lnL>
-                    <a:lnR w="12700" cap="flat" cmpd="sng" algn="ctr">
-                      <a:solidFill>
-                        <a:srgbClr val="CCCCCC"/>
-                      </a:solidFill>
-                      <a:prstDash val="solid"/>
-                      <a:round/>
-                      <a:headEnd type="none" w="med" len="med"/>
-                      <a:tailEnd type="none" w="med" len="med"/>
-                    </a:lnR>
-                    <a:lnT w="12700" cap="flat" cmpd="sng" algn="ctr">
-                      <a:solidFill>
-                        <a:srgbClr val="CCCCCC"/>
-                      </a:solidFill>
-                      <a:prstDash val="solid"/>
-                      <a:round/>
-                      <a:headEnd type="none" w="med" len="med"/>
-                      <a:tailEnd type="none" w="med" len="med"/>
-                    </a:lnT>
-                    <a:lnB w="12700" cap="flat" cmpd="sng" algn="ctr">
-                      <a:solidFill>
-                        <a:srgbClr val="CCCCCC"/>
-                      </a:solidFill>
-                      <a:prstDash val="solid"/>
-                      <a:round/>
-                      <a:headEnd type="none" w="med" len="med"/>
-                      <a:tailEnd type="none" w="med" len="med"/>
-                    </a:lnB>
-                  </a:tcPr>
-                </a:tc>
-              </a:tr>
-              <a:tr h="355600">
-                <a:tc>
-                  <a:txBody>
-                    <a:bodyPr/>
-                    <a:lstStyle/>
-                    <a:p>
-                      <a:pPr algn="ctr" indent="0" marL="0">
-                        <a:buNone/>
-                      </a:pPr>
-                      <a:r>
-                        <a:rPr lang="en-US" sz="1100" b="1" dirty="0">
-                          <a:solidFill>
-                            <a:srgbClr val="000000"/>
-                          </a:solidFill>
-                        </a:rPr>
-                        <a:t>Groundnut</a:t>
-                      </a:r>
-                      <a:endParaRPr lang="en-US" sz="1100" dirty="0"/>
-                    </a:p>
-                  </a:txBody>
-                  <a:tcPr marL="91440" marR="91440" marT="45720" marB="45720">
-                    <a:lnL w="12700" cap="flat" cmpd="sng" algn="ctr">
-                      <a:solidFill>
-                        <a:srgbClr val="CCCCCC"/>
-                      </a:solidFill>
-                      <a:prstDash val="solid"/>
-                      <a:round/>
-                      <a:headEnd type="none" w="med" len="med"/>
-                      <a:tailEnd type="none" w="med" len="med"/>
-                    </a:lnL>
-                    <a:lnR w="12700" cap="flat" cmpd="sng" algn="ctr">
-                      <a:solidFill>
-                        <a:srgbClr val="CCCCCC"/>
-                      </a:solidFill>
-                      <a:prstDash val="solid"/>
-                      <a:round/>
-                      <a:headEnd type="none" w="med" len="med"/>
-                      <a:tailEnd type="none" w="med" len="med"/>
-                    </a:lnR>
-                    <a:lnT w="12700" cap="flat" cmpd="sng" algn="ctr">
-                      <a:solidFill>
-                        <a:srgbClr val="CCCCCC"/>
-                      </a:solidFill>
-                      <a:prstDash val="solid"/>
-                      <a:round/>
-                      <a:headEnd type="none" w="med" len="med"/>
-                      <a:tailEnd type="none" w="med" len="med"/>
-                    </a:lnT>
-                    <a:lnB w="12700" cap="flat" cmpd="sng" algn="ctr">
-                      <a:solidFill>
-                        <a:srgbClr val="CCCCCC"/>
-                      </a:solidFill>
-                      <a:prstDash val="solid"/>
-                      <a:round/>
-                      <a:headEnd type="none" w="med" len="med"/>
-                      <a:tailEnd type="none" w="med" len="med"/>
-                    </a:lnB>
-                  </a:tcPr>
-                </a:tc>
-                <a:tc>
-                  <a:txBody>
-                    <a:bodyPr/>
-                    <a:lstStyle/>
-                    <a:p>
-                      <a:pPr algn="ctr" indent="0" marL="0">
-                        <a:buNone/>
-                      </a:pPr>
-                      <a:r>
-                        <a:rPr lang="en-US" sz="1100" dirty="0">
-                          <a:solidFill>
-                            <a:srgbClr val="000000"/>
-                          </a:solidFill>
-                        </a:rPr>
-                        <a:t>424</a:t>
-                      </a:r>
-                      <a:endParaRPr lang="en-US" sz="1100" dirty="0"/>
-                    </a:p>
-                  </a:txBody>
-                  <a:tcPr marL="91440" marR="91440" marT="45720" marB="45720">
-                    <a:lnL w="12700" cap="flat" cmpd="sng" algn="ctr">
-                      <a:solidFill>
-                        <a:srgbClr val="CCCCCC"/>
-                      </a:solidFill>
-                      <a:prstDash val="solid"/>
-                      <a:round/>
-                      <a:headEnd type="none" w="med" len="med"/>
-                      <a:tailEnd type="none" w="med" len="med"/>
-                    </a:lnL>
-                    <a:lnR w="12700" cap="flat" cmpd="sng" algn="ctr">
-                      <a:solidFill>
-                        <a:srgbClr val="CCCCCC"/>
-                      </a:solidFill>
-                      <a:prstDash val="solid"/>
-                      <a:round/>
-                      <a:headEnd type="none" w="med" len="med"/>
-                      <a:tailEnd type="none" w="med" len="med"/>
-                    </a:lnR>
-                    <a:lnT w="12700" cap="flat" cmpd="sng" algn="ctr">
-                      <a:solidFill>
-                        <a:srgbClr val="CCCCCC"/>
-                      </a:solidFill>
-                      <a:prstDash val="solid"/>
-                      <a:round/>
-                      <a:headEnd type="none" w="med" len="med"/>
-                      <a:tailEnd type="none" w="med" len="med"/>
-                    </a:lnT>
-                    <a:lnB w="12700" cap="flat" cmpd="sng" algn="ctr">
-                      <a:solidFill>
-                        <a:srgbClr val="CCCCCC"/>
-                      </a:solidFill>
-                      <a:prstDash val="solid"/>
-                      <a:round/>
-                      <a:headEnd type="none" w="med" len="med"/>
-                      <a:tailEnd type="none" w="med" len="med"/>
-                    </a:lnB>
-                  </a:tcPr>
-                </a:tc>
-                <a:tc>
-                  <a:txBody>
-                    <a:bodyPr/>
-                    <a:lstStyle/>
-                    <a:p>
-                      <a:pPr algn="ctr" indent="0" marL="0">
-                        <a:buNone/>
-                      </a:pPr>
-                      <a:r>
-                        <a:rPr lang="en-US" sz="1100" dirty="0">
-                          <a:solidFill>
-                            <a:srgbClr val="000000"/>
-                          </a:solidFill>
-                        </a:rPr>
-                        <a:t>1.32 t/ha</a:t>
-                      </a:r>
-                      <a:endParaRPr lang="en-US" sz="1100" dirty="0"/>
-                    </a:p>
-                  </a:txBody>
-                  <a:tcPr marL="91440" marR="91440" marT="45720" marB="45720">
-                    <a:lnL w="12700" cap="flat" cmpd="sng" algn="ctr">
-                      <a:solidFill>
-                        <a:srgbClr val="CCCCCC"/>
-                      </a:solidFill>
-                      <a:prstDash val="solid"/>
-                      <a:round/>
-                      <a:headEnd type="none" w="med" len="med"/>
-                      <a:tailEnd type="none" w="med" len="med"/>
-                    </a:lnL>
-                    <a:lnR w="12700" cap="flat" cmpd="sng" algn="ctr">
-                      <a:solidFill>
-                        <a:srgbClr val="CCCCCC"/>
-                      </a:solidFill>
-                      <a:prstDash val="solid"/>
-                      <a:round/>
-                      <a:headEnd type="none" w="med" len="med"/>
-                      <a:tailEnd type="none" w="med" len="med"/>
-                    </a:lnR>
-                    <a:lnT w="12700" cap="flat" cmpd="sng" algn="ctr">
-                      <a:solidFill>
-                        <a:srgbClr val="CCCCCC"/>
-                      </a:solidFill>
-                      <a:prstDash val="solid"/>
-                      <a:round/>
-                      <a:headEnd type="none" w="med" len="med"/>
-                      <a:tailEnd type="none" w="med" len="med"/>
-                    </a:lnT>
-                    <a:lnB w="12700" cap="flat" cmpd="sng" algn="ctr">
-                      <a:solidFill>
-                        <a:srgbClr val="CCCCCC"/>
-                      </a:solidFill>
-                      <a:prstDash val="solid"/>
-                      <a:round/>
-                      <a:headEnd type="none" w="med" len="med"/>
-                      <a:tailEnd type="none" w="med" len="med"/>
-                    </a:lnB>
-                  </a:tcPr>
-                </a:tc>
-                <a:tc>
-                  <a:txBody>
-                    <a:bodyPr/>
-                    <a:lstStyle/>
-                    <a:p>
-                      <a:pPr algn="ctr" indent="0" marL="0">
-                        <a:buNone/>
-                      </a:pPr>
-                      <a:r>
-                        <a:rPr lang="en-US" sz="1100" dirty="0">
-                          <a:solidFill>
-                            <a:srgbClr val="000000"/>
-                          </a:solidFill>
-                        </a:rPr>
-                        <a:t>INR 55,500</a:t>
-                      </a:r>
-                      <a:endParaRPr lang="en-US" sz="1100" dirty="0"/>
-                    </a:p>
-                  </a:txBody>
-                  <a:tcPr marL="91440" marR="91440" marT="45720" marB="45720">
-                    <a:lnL w="12700" cap="flat" cmpd="sng" algn="ctr">
-                      <a:solidFill>
-                        <a:srgbClr val="CCCCCC"/>
-                      </a:solidFill>
-                      <a:prstDash val="solid"/>
-                      <a:round/>
-                      <a:headEnd type="none" w="med" len="med"/>
-                      <a:tailEnd type="none" w="med" len="med"/>
-                    </a:lnL>
-                    <a:lnR w="12700" cap="flat" cmpd="sng" algn="ctr">
-                      <a:solidFill>
-                        <a:srgbClr val="CCCCCC"/>
-                      </a:solidFill>
-                      <a:prstDash val="solid"/>
-                      <a:round/>
-                      <a:headEnd type="none" w="med" len="med"/>
-                      <a:tailEnd type="none" w="med" len="med"/>
-                    </a:lnR>
-                    <a:lnT w="12700" cap="flat" cmpd="sng" algn="ctr">
-                      <a:solidFill>
-                        <a:srgbClr val="CCCCCC"/>
-                      </a:solidFill>
-                      <a:prstDash val="solid"/>
-                      <a:round/>
-                      <a:headEnd type="none" w="med" len="med"/>
-                      <a:tailEnd type="none" w="med" len="med"/>
-                    </a:lnT>
-                    <a:lnB w="12700" cap="flat" cmpd="sng" algn="ctr">
-                      <a:solidFill>
-                        <a:srgbClr val="CCCCCC"/>
-                      </a:solidFill>
-                      <a:prstDash val="solid"/>
-                      <a:round/>
-                      <a:headEnd type="none" w="med" len="med"/>
-                      <a:tailEnd type="none" w="med" len="med"/>
-                    </a:lnB>
-                  </a:tcPr>
-                </a:tc>
-                <a:tc>
-                  <a:txBody>
-                    <a:bodyPr/>
-                    <a:lstStyle/>
-                    <a:p>
-                      <a:pPr algn="ctr" indent="0" marL="0">
-                        <a:buNone/>
-                      </a:pPr>
-                      <a:r>
-                        <a:rPr lang="en-US" sz="1100" dirty="0">
-                          <a:solidFill>
-                            <a:srgbClr val="2E7D32"/>
-                          </a:solidFill>
-                        </a:rPr>
-                        <a:t>+INR 44,858</a:t>
-                      </a:r>
-                      <a:endParaRPr lang="en-US" sz="1100" dirty="0"/>
-                    </a:p>
-                  </a:txBody>
-                  <a:tcPr marL="91440" marR="91440" marT="45720" marB="45720">
-                    <a:lnL w="12700" cap="flat" cmpd="sng" algn="ctr">
-                      <a:solidFill>
-                        <a:srgbClr val="CCCCCC"/>
-                      </a:solidFill>
-                      <a:prstDash val="solid"/>
-                      <a:round/>
-                      <a:headEnd type="none" w="med" len="med"/>
-                      <a:tailEnd type="none" w="med" len="med"/>
-                    </a:lnL>
-                    <a:lnR w="12700" cap="flat" cmpd="sng" algn="ctr">
-                      <a:solidFill>
-                        <a:srgbClr val="CCCCCC"/>
-                      </a:solidFill>
-                      <a:prstDash val="solid"/>
-                      <a:round/>
-                      <a:headEnd type="none" w="med" len="med"/>
-                      <a:tailEnd type="none" w="med" len="med"/>
-                    </a:lnR>
-                    <a:lnT w="12700" cap="flat" cmpd="sng" algn="ctr">
-                      <a:solidFill>
-                        <a:srgbClr val="CCCCCC"/>
-                      </a:solidFill>
-                      <a:prstDash val="solid"/>
-                      <a:round/>
-                      <a:headEnd type="none" w="med" len="med"/>
-                      <a:tailEnd type="none" w="med" len="med"/>
-                    </a:lnT>
-                    <a:lnB w="12700" cap="flat" cmpd="sng" algn="ctr">
-                      <a:solidFill>
-                        <a:srgbClr val="CCCCCC"/>
-                      </a:solidFill>
-                      <a:prstDash val="solid"/>
-                      <a:round/>
-                      <a:headEnd type="none" w="med" len="med"/>
-                      <a:tailEnd type="none" w="med" len="med"/>
-                    </a:lnB>
-                  </a:tcPr>
-                </a:tc>
-                <a:tc>
-                  <a:txBody>
-                    <a:bodyPr/>
-                    <a:lstStyle/>
-                    <a:p>
-                      <a:pPr algn="ctr" indent="0" marL="0">
-                        <a:buNone/>
-                      </a:pPr>
-                      <a:r>
-                        <a:rPr lang="en-US" sz="1100" dirty="0">
-                          <a:solidFill>
-                            <a:srgbClr val="000000"/>
-                          </a:solidFill>
-                        </a:rPr>
-                        <a:t>59.2%</a:t>
-                      </a:r>
-                      <a:endParaRPr lang="en-US" sz="1100" dirty="0"/>
-                    </a:p>
-                  </a:txBody>
-                  <a:tcPr marL="91440" marR="91440" marT="45720" marB="45720">
-                    <a:lnL w="12700" cap="flat" cmpd="sng" algn="ctr">
-                      <a:solidFill>
-                        <a:srgbClr val="CCCCCC"/>
-                      </a:solidFill>
-                      <a:prstDash val="solid"/>
-                      <a:round/>
-                      <a:headEnd type="none" w="med" len="med"/>
-                      <a:tailEnd type="none" w="med" len="med"/>
-                    </a:lnL>
-                    <a:lnR w="12700" cap="flat" cmpd="sng" algn="ctr">
-                      <a:solidFill>
-                        <a:srgbClr val="CCCCCC"/>
-                      </a:solidFill>
-                      <a:prstDash val="solid"/>
-                      <a:round/>
-                      <a:headEnd type="none" w="med" len="med"/>
-                      <a:tailEnd type="none" w="med" len="med"/>
-                    </a:lnR>
-                    <a:lnT w="12700" cap="flat" cmpd="sng" algn="ctr">
-                      <a:solidFill>
-                        <a:srgbClr val="CCCCCC"/>
-                      </a:solidFill>
-                      <a:prstDash val="solid"/>
-                      <a:round/>
-                      <a:headEnd type="none" w="med" len="med"/>
-                      <a:tailEnd type="none" w="med" len="med"/>
-                    </a:lnT>
-                    <a:lnB w="12700" cap="flat" cmpd="sng" algn="ctr">
-                      <a:solidFill>
-                        <a:srgbClr val="CCCCCC"/>
-                      </a:solidFill>
-                      <a:prstDash val="solid"/>
-                      <a:round/>
-                      <a:headEnd type="none" w="med" len="med"/>
-                      <a:tailEnd type="none" w="med" len="med"/>
-                    </a:lnB>
-                  </a:tcPr>
-                </a:tc>
-              </a:tr>
-              <a:tr h="355600">
-                <a:tc>
-                  <a:txBody>
-                    <a:bodyPr/>
-                    <a:lstStyle/>
-                    <a:p>
-                      <a:pPr algn="ctr" indent="0" marL="0">
-                        <a:buNone/>
-                      </a:pPr>
-                      <a:r>
-                        <a:rPr lang="en-US" sz="1100" b="1" dirty="0">
-                          <a:solidFill>
-                            <a:srgbClr val="000000"/>
-                          </a:solidFill>
-                        </a:rPr>
-                        <a:t>Pulses</a:t>
-                      </a:r>
-                      <a:endParaRPr lang="en-US" sz="1100" dirty="0"/>
-                    </a:p>
-                  </a:txBody>
-                  <a:tcPr marL="91440" marR="91440" marT="45720" marB="45720">
-                    <a:lnL w="12700" cap="flat" cmpd="sng" algn="ctr">
-                      <a:solidFill>
-                        <a:srgbClr val="CCCCCC"/>
-                      </a:solidFill>
-                      <a:prstDash val="solid"/>
-                      <a:round/>
-                      <a:headEnd type="none" w="med" len="med"/>
-                      <a:tailEnd type="none" w="med" len="med"/>
-                    </a:lnL>
-                    <a:lnR w="12700" cap="flat" cmpd="sng" algn="ctr">
-                      <a:solidFill>
-                        <a:srgbClr val="CCCCCC"/>
-                      </a:solidFill>
-                      <a:prstDash val="solid"/>
-                      <a:round/>
-                      <a:headEnd type="none" w="med" len="med"/>
-                      <a:tailEnd type="none" w="med" len="med"/>
-                    </a:lnR>
-                    <a:lnT w="12700" cap="flat" cmpd="sng" algn="ctr">
-                      <a:solidFill>
-                        <a:srgbClr val="CCCCCC"/>
-                      </a:solidFill>
-                      <a:prstDash val="solid"/>
-                      <a:round/>
-                      <a:headEnd type="none" w="med" len="med"/>
-                      <a:tailEnd type="none" w="med" len="med"/>
-                    </a:lnT>
-                    <a:lnB w="12700" cap="flat" cmpd="sng" algn="ctr">
-                      <a:solidFill>
-                        <a:srgbClr val="CCCCCC"/>
-                      </a:solidFill>
-                      <a:prstDash val="solid"/>
-                      <a:round/>
-                      <a:headEnd type="none" w="med" len="med"/>
-                      <a:tailEnd type="none" w="med" len="med"/>
-                    </a:lnB>
-                  </a:tcPr>
-                </a:tc>
-                <a:tc>
-                  <a:txBody>
-                    <a:bodyPr/>
-                    <a:lstStyle/>
-                    <a:p>
-                      <a:pPr algn="ctr" indent="0" marL="0">
-                        <a:buNone/>
-                      </a:pPr>
-                      <a:r>
-                        <a:rPr lang="en-US" sz="1100" dirty="0">
-                          <a:solidFill>
-                            <a:srgbClr val="000000"/>
-                          </a:solidFill>
-                        </a:rPr>
-                        <a:t>496</a:t>
-                      </a:r>
-                      <a:endParaRPr lang="en-US" sz="1100" dirty="0"/>
-                    </a:p>
-                  </a:txBody>
-                  <a:tcPr marL="91440" marR="91440" marT="45720" marB="45720">
-                    <a:lnL w="12700" cap="flat" cmpd="sng" algn="ctr">
-                      <a:solidFill>
-                        <a:srgbClr val="CCCCCC"/>
-                      </a:solidFill>
-                      <a:prstDash val="solid"/>
-                      <a:round/>
-                      <a:headEnd type="none" w="med" len="med"/>
-                      <a:tailEnd type="none" w="med" len="med"/>
-                    </a:lnL>
-                    <a:lnR w="12700" cap="flat" cmpd="sng" algn="ctr">
-                      <a:solidFill>
-                        <a:srgbClr val="CCCCCC"/>
-                      </a:solidFill>
-                      <a:prstDash val="solid"/>
-                      <a:round/>
-                      <a:headEnd type="none" w="med" len="med"/>
-                      <a:tailEnd type="none" w="med" len="med"/>
-                    </a:lnR>
-                    <a:lnT w="12700" cap="flat" cmpd="sng" algn="ctr">
-                      <a:solidFill>
-                        <a:srgbClr val="CCCCCC"/>
-                      </a:solidFill>
-                      <a:prstDash val="solid"/>
-                      <a:round/>
-                      <a:headEnd type="none" w="med" len="med"/>
-                      <a:tailEnd type="none" w="med" len="med"/>
-                    </a:lnT>
-                    <a:lnB w="12700" cap="flat" cmpd="sng" algn="ctr">
-                      <a:solidFill>
-                        <a:srgbClr val="CCCCCC"/>
-                      </a:solidFill>
-                      <a:prstDash val="solid"/>
-                      <a:round/>
-                      <a:headEnd type="none" w="med" len="med"/>
-                      <a:tailEnd type="none" w="med" len="med"/>
-                    </a:lnB>
-                  </a:tcPr>
-                </a:tc>
-                <a:tc>
-                  <a:txBody>
-                    <a:bodyPr/>
-                    <a:lstStyle/>
-                    <a:p>
-                      <a:pPr algn="ctr" indent="0" marL="0">
-                        <a:buNone/>
-                      </a:pPr>
-                      <a:r>
-                        <a:rPr lang="en-US" sz="1100" dirty="0">
-                          <a:solidFill>
-                            <a:srgbClr val="000000"/>
-                          </a:solidFill>
-                        </a:rPr>
-                        <a:t>0.92 t/ha</a:t>
-                      </a:r>
-                      <a:endParaRPr lang="en-US" sz="1100" dirty="0"/>
-                    </a:p>
-                  </a:txBody>
-                  <a:tcPr marL="91440" marR="91440" marT="45720" marB="45720">
-                    <a:lnL w="12700" cap="flat" cmpd="sng" algn="ctr">
-                      <a:solidFill>
-                        <a:srgbClr val="CCCCCC"/>
-                      </a:solidFill>
-                      <a:prstDash val="solid"/>
-                      <a:round/>
-                      <a:headEnd type="none" w="med" len="med"/>
-                      <a:tailEnd type="none" w="med" len="med"/>
-                    </a:lnL>
-                    <a:lnR w="12700" cap="flat" cmpd="sng" algn="ctr">
-                      <a:solidFill>
-                        <a:srgbClr val="CCCCCC"/>
-                      </a:solidFill>
-                      <a:prstDash val="solid"/>
-                      <a:round/>
-                      <a:headEnd type="none" w="med" len="med"/>
-                      <a:tailEnd type="none" w="med" len="med"/>
-                    </a:lnR>
-                    <a:lnT w="12700" cap="flat" cmpd="sng" algn="ctr">
-                      <a:solidFill>
-                        <a:srgbClr val="CCCCCC"/>
-                      </a:solidFill>
-                      <a:prstDash val="solid"/>
-                      <a:round/>
-                      <a:headEnd type="none" w="med" len="med"/>
-                      <a:tailEnd type="none" w="med" len="med"/>
-                    </a:lnT>
-                    <a:lnB w="12700" cap="flat" cmpd="sng" algn="ctr">
-                      <a:solidFill>
-                        <a:srgbClr val="CCCCCC"/>
-                      </a:solidFill>
-                      <a:prstDash val="solid"/>
-                      <a:round/>
-                      <a:headEnd type="none" w="med" len="med"/>
-                      <a:tailEnd type="none" w="med" len="med"/>
-                    </a:lnB>
-                  </a:tcPr>
-                </a:tc>
-                <a:tc>
-                  <a:txBody>
-                    <a:bodyPr/>
-                    <a:lstStyle/>
-                    <a:p>
-                      <a:pPr algn="ctr" indent="0" marL="0">
-                        <a:buNone/>
-                      </a:pPr>
-                      <a:r>
-                        <a:rPr lang="en-US" sz="1100" dirty="0">
-                          <a:solidFill>
-                            <a:srgbClr val="000000"/>
-                          </a:solidFill>
-                        </a:rPr>
-                        <a:t>INR 71,000</a:t>
-                      </a:r>
-                      <a:endParaRPr lang="en-US" sz="1100" dirty="0"/>
-                    </a:p>
-                  </a:txBody>
-                  <a:tcPr marL="91440" marR="91440" marT="45720" marB="45720">
-                    <a:lnL w="12700" cap="flat" cmpd="sng" algn="ctr">
-                      <a:solidFill>
-                        <a:srgbClr val="CCCCCC"/>
-                      </a:solidFill>
-                      <a:prstDash val="solid"/>
-                      <a:round/>
-                      <a:headEnd type="none" w="med" len="med"/>
-                      <a:tailEnd type="none" w="med" len="med"/>
-                    </a:lnL>
-                    <a:lnR w="12700" cap="flat" cmpd="sng" algn="ctr">
-                      <a:solidFill>
-                        <a:srgbClr val="CCCCCC"/>
-                      </a:solidFill>
-                      <a:prstDash val="solid"/>
-                      <a:round/>
-                      <a:headEnd type="none" w="med" len="med"/>
-                      <a:tailEnd type="none" w="med" len="med"/>
-                    </a:lnR>
-                    <a:lnT w="12700" cap="flat" cmpd="sng" algn="ctr">
-                      <a:solidFill>
-                        <a:srgbClr val="CCCCCC"/>
-                      </a:solidFill>
-                      <a:prstDash val="solid"/>
-                      <a:round/>
-                      <a:headEnd type="none" w="med" len="med"/>
-                      <a:tailEnd type="none" w="med" len="med"/>
-                    </a:lnT>
-                    <a:lnB w="12700" cap="flat" cmpd="sng" algn="ctr">
-                      <a:solidFill>
-                        <a:srgbClr val="CCCCCC"/>
-                      </a:solidFill>
-                      <a:prstDash val="solid"/>
-                      <a:round/>
-                      <a:headEnd type="none" w="med" len="med"/>
-                      <a:tailEnd type="none" w="med" len="med"/>
-                    </a:lnB>
-                  </a:tcPr>
-                </a:tc>
-                <a:tc>
-                  <a:txBody>
-                    <a:bodyPr/>
-                    <a:lstStyle/>
-                    <a:p>
-                      <a:pPr algn="ctr" indent="0" marL="0">
-                        <a:buNone/>
-                      </a:pPr>
-                      <a:r>
-                        <a:rPr lang="en-US" sz="1100" dirty="0">
-                          <a:solidFill>
-                            <a:srgbClr val="000000"/>
-                          </a:solidFill>
-                        </a:rPr>
-                        <a:t>-INR 4,238</a:t>
-                      </a:r>
-                      <a:endParaRPr lang="en-US" sz="1100" dirty="0"/>
-                    </a:p>
-                  </a:txBody>
-                  <a:tcPr marL="91440" marR="91440" marT="45720" marB="45720">
-                    <a:lnL w="12700" cap="flat" cmpd="sng" algn="ctr">
-                      <a:solidFill>
-                        <a:srgbClr val="CCCCCC"/>
-                      </a:solidFill>
-                      <a:prstDash val="solid"/>
-                      <a:round/>
-                      <a:headEnd type="none" w="med" len="med"/>
-                      <a:tailEnd type="none" w="med" len="med"/>
-                    </a:lnL>
-                    <a:lnR w="12700" cap="flat" cmpd="sng" algn="ctr">
-                      <a:solidFill>
-                        <a:srgbClr val="CCCCCC"/>
-                      </a:solidFill>
-                      <a:prstDash val="solid"/>
-                      <a:round/>
-                      <a:headEnd type="none" w="med" len="med"/>
-                      <a:tailEnd type="none" w="med" len="med"/>
-                    </a:lnR>
-                    <a:lnT w="12700" cap="flat" cmpd="sng" algn="ctr">
-                      <a:solidFill>
-                        <a:srgbClr val="CCCCCC"/>
-                      </a:solidFill>
-                      <a:prstDash val="solid"/>
-                      <a:round/>
-                      <a:headEnd type="none" w="med" len="med"/>
-                      <a:tailEnd type="none" w="med" len="med"/>
-                    </a:lnT>
-                    <a:lnB w="12700" cap="flat" cmpd="sng" algn="ctr">
-                      <a:solidFill>
-                        <a:srgbClr val="CCCCCC"/>
-                      </a:solidFill>
-                      <a:prstDash val="solid"/>
-                      <a:round/>
-                      <a:headEnd type="none" w="med" len="med"/>
-                      <a:tailEnd type="none" w="med" len="med"/>
-                    </a:lnB>
-                  </a:tcPr>
-                </a:tc>
-                <a:tc>
-                  <a:txBody>
-                    <a:bodyPr/>
-                    <a:lstStyle/>
-                    <a:p>
-                      <a:pPr algn="ctr" indent="0" marL="0">
-                        <a:buNone/>
-                      </a:pPr>
-                      <a:r>
-                        <a:rPr lang="en-US" sz="1100" dirty="0">
-                          <a:solidFill>
-                            <a:srgbClr val="000000"/>
-                          </a:solidFill>
-                        </a:rPr>
-                        <a:t>50.8%</a:t>
-                      </a:r>
-                      <a:endParaRPr lang="en-US" sz="1100" dirty="0"/>
-                    </a:p>
-                  </a:txBody>
-                  <a:tcPr marL="91440" marR="91440" marT="45720" marB="45720">
-                    <a:lnL w="12700" cap="flat" cmpd="sng" algn="ctr">
-                      <a:solidFill>
-                        <a:srgbClr val="CCCCCC"/>
-                      </a:solidFill>
-                      <a:prstDash val="solid"/>
-                      <a:round/>
-                      <a:headEnd type="none" w="med" len="med"/>
-                      <a:tailEnd type="none" w="med" len="med"/>
-                    </a:lnL>
-                    <a:lnR w="12700" cap="flat" cmpd="sng" algn="ctr">
-                      <a:solidFill>
-                        <a:srgbClr val="CCCCCC"/>
-                      </a:solidFill>
-                      <a:prstDash val="solid"/>
-                      <a:round/>
-                      <a:headEnd type="none" w="med" len="med"/>
-                      <a:tailEnd type="none" w="med" len="med"/>
-                    </a:lnR>
-                    <a:lnT w="12700" cap="flat" cmpd="sng" algn="ctr">
-                      <a:solidFill>
-                        <a:srgbClr val="CCCCCC"/>
-                      </a:solidFill>
-                      <a:prstDash val="solid"/>
-                      <a:round/>
-                      <a:headEnd type="none" w="med" len="med"/>
-                      <a:tailEnd type="none" w="med" len="med"/>
-                    </a:lnT>
-                    <a:lnB w="12700" cap="flat" cmpd="sng" algn="ctr">
-                      <a:solidFill>
-                        <a:srgbClr val="CCCCCC"/>
-                      </a:solidFill>
-                      <a:prstDash val="solid"/>
-                      <a:round/>
-                      <a:headEnd type="none" w="med" len="med"/>
-                      <a:tailEnd type="none" w="med" len="med"/>
-                    </a:lnB>
-                  </a:tcPr>
-                </a:tc>
-              </a:tr>
-              <a:tr h="355600">
-                <a:tc>
-                  <a:txBody>
-                    <a:bodyPr/>
-                    <a:lstStyle/>
-                    <a:p>
-                      <a:pPr algn="ctr" indent="0" marL="0">
-                        <a:buNone/>
-                      </a:pPr>
-                      <a:r>
-                        <a:rPr lang="en-US" sz="1100" b="1" dirty="0">
-                          <a:solidFill>
-                            <a:srgbClr val="000000"/>
-                          </a:solidFill>
-                        </a:rPr>
-                        <a:t>Maize</a:t>
-                      </a:r>
-                      <a:endParaRPr lang="en-US" sz="1100" dirty="0"/>
-                    </a:p>
-                  </a:txBody>
-                  <a:tcPr marL="91440" marR="91440" marT="45720" marB="45720">
-                    <a:lnL w="12700" cap="flat" cmpd="sng" algn="ctr">
-                      <a:solidFill>
-                        <a:srgbClr val="CCCCCC"/>
-                      </a:solidFill>
-                      <a:prstDash val="solid"/>
-                      <a:round/>
-                      <a:headEnd type="none" w="med" len="med"/>
-                      <a:tailEnd type="none" w="med" len="med"/>
-                    </a:lnL>
-                    <a:lnR w="12700" cap="flat" cmpd="sng" algn="ctr">
-                      <a:solidFill>
-                        <a:srgbClr val="CCCCCC"/>
-                      </a:solidFill>
-                      <a:prstDash val="solid"/>
-                      <a:round/>
-                      <a:headEnd type="none" w="med" len="med"/>
-                      <a:tailEnd type="none" w="med" len="med"/>
-                    </a:lnR>
-                    <a:lnT w="12700" cap="flat" cmpd="sng" algn="ctr">
-                      <a:solidFill>
-                        <a:srgbClr val="CCCCCC"/>
-                      </a:solidFill>
-                      <a:prstDash val="solid"/>
-                      <a:round/>
-                      <a:headEnd type="none" w="med" len="med"/>
-                      <a:tailEnd type="none" w="med" len="med"/>
-                    </a:lnT>
-                    <a:lnB w="12700" cap="flat" cmpd="sng" algn="ctr">
-                      <a:solidFill>
-                        <a:srgbClr val="CCCCCC"/>
-                      </a:solidFill>
-                      <a:prstDash val="solid"/>
-                      <a:round/>
-                      <a:headEnd type="none" w="med" len="med"/>
-                      <a:tailEnd type="none" w="med" len="med"/>
-                    </a:lnB>
-                  </a:tcPr>
-                </a:tc>
-                <a:tc>
-                  <a:txBody>
-                    <a:bodyPr/>
-                    <a:lstStyle/>
-                    <a:p>
-                      <a:pPr algn="ctr" indent="0" marL="0">
-                        <a:buNone/>
-                      </a:pPr>
-                      <a:r>
-                        <a:rPr lang="en-US" sz="1100" dirty="0">
-                          <a:solidFill>
-                            <a:srgbClr val="000000"/>
-                          </a:solidFill>
-                        </a:rPr>
-                        <a:t>551</a:t>
-                      </a:r>
-                      <a:endParaRPr lang="en-US" sz="1100" dirty="0"/>
-                    </a:p>
-                  </a:txBody>
-                  <a:tcPr marL="91440" marR="91440" marT="45720" marB="45720">
-                    <a:lnL w="12700" cap="flat" cmpd="sng" algn="ctr">
-                      <a:solidFill>
-                        <a:srgbClr val="CCCCCC"/>
-                      </a:solidFill>
-                      <a:prstDash val="solid"/>
-                      <a:round/>
-                      <a:headEnd type="none" w="med" len="med"/>
-                      <a:tailEnd type="none" w="med" len="med"/>
-                    </a:lnL>
-                    <a:lnR w="12700" cap="flat" cmpd="sng" algn="ctr">
-                      <a:solidFill>
-                        <a:srgbClr val="CCCCCC"/>
-                      </a:solidFill>
-                      <a:prstDash val="solid"/>
-                      <a:round/>
-                      <a:headEnd type="none" w="med" len="med"/>
-                      <a:tailEnd type="none" w="med" len="med"/>
-                    </a:lnR>
-                    <a:lnT w="12700" cap="flat" cmpd="sng" algn="ctr">
-                      <a:solidFill>
-                        <a:srgbClr val="CCCCCC"/>
-                      </a:solidFill>
-                      <a:prstDash val="solid"/>
-                      <a:round/>
-                      <a:headEnd type="none" w="med" len="med"/>
-                      <a:tailEnd type="none" w="med" len="med"/>
-                    </a:lnT>
-                    <a:lnB w="12700" cap="flat" cmpd="sng" algn="ctr">
-                      <a:solidFill>
-                        <a:srgbClr val="CCCCCC"/>
-                      </a:solidFill>
-                      <a:prstDash val="solid"/>
-                      <a:round/>
-                      <a:headEnd type="none" w="med" len="med"/>
-                      <a:tailEnd type="none" w="med" len="med"/>
-                    </a:lnB>
-                  </a:tcPr>
-                </a:tc>
-                <a:tc>
-                  <a:txBody>
-                    <a:bodyPr/>
-                    <a:lstStyle/>
-                    <a:p>
-                      <a:pPr algn="ctr" indent="0" marL="0">
-                        <a:buNone/>
-                      </a:pPr>
-                      <a:r>
-                        <a:rPr lang="en-US" sz="1100" dirty="0">
-                          <a:solidFill>
-                            <a:srgbClr val="000000"/>
-                          </a:solidFill>
-                        </a:rPr>
-                        <a:t>2.72 t/ha</a:t>
-                      </a:r>
-                      <a:endParaRPr lang="en-US" sz="1100" dirty="0"/>
-                    </a:p>
-                  </a:txBody>
-                  <a:tcPr marL="91440" marR="91440" marT="45720" marB="45720">
-                    <a:lnL w="12700" cap="flat" cmpd="sng" algn="ctr">
-                      <a:solidFill>
-                        <a:srgbClr val="CCCCCC"/>
-                      </a:solidFill>
-                      <a:prstDash val="solid"/>
-                      <a:round/>
-                      <a:headEnd type="none" w="med" len="med"/>
-                      <a:tailEnd type="none" w="med" len="med"/>
-                    </a:lnL>
-                    <a:lnR w="12700" cap="flat" cmpd="sng" algn="ctr">
-                      <a:solidFill>
-                        <a:srgbClr val="CCCCCC"/>
-                      </a:solidFill>
-                      <a:prstDash val="solid"/>
-                      <a:round/>
-                      <a:headEnd type="none" w="med" len="med"/>
-                      <a:tailEnd type="none" w="med" len="med"/>
-                    </a:lnR>
-                    <a:lnT w="12700" cap="flat" cmpd="sng" algn="ctr">
-                      <a:solidFill>
-                        <a:srgbClr val="CCCCCC"/>
-                      </a:solidFill>
-                      <a:prstDash val="solid"/>
-                      <a:round/>
-                      <a:headEnd type="none" w="med" len="med"/>
-                      <a:tailEnd type="none" w="med" len="med"/>
-                    </a:lnT>
-                    <a:lnB w="12700" cap="flat" cmpd="sng" algn="ctr">
-                      <a:solidFill>
-                        <a:srgbClr val="CCCCCC"/>
-                      </a:solidFill>
-                      <a:prstDash val="solid"/>
-                      <a:round/>
-                      <a:headEnd type="none" w="med" len="med"/>
-                      <a:tailEnd type="none" w="med" len="med"/>
-                    </a:lnB>
-                  </a:tcPr>
-                </a:tc>
-                <a:tc>
-                  <a:txBody>
-                    <a:bodyPr/>
-                    <a:lstStyle/>
-                    <a:p>
-                      <a:pPr algn="ctr" indent="0" marL="0">
-                        <a:buNone/>
-                      </a:pPr>
-                      <a:r>
-                        <a:rPr lang="en-US" sz="1100" dirty="0">
-                          <a:solidFill>
-                            <a:srgbClr val="000000"/>
-                          </a:solidFill>
-                        </a:rPr>
-                        <a:t>INR 21,000</a:t>
-                      </a:r>
-                      <a:endParaRPr lang="en-US" sz="1100" dirty="0"/>
-                    </a:p>
-                  </a:txBody>
-                  <a:tcPr marL="91440" marR="91440" marT="45720" marB="45720">
-                    <a:lnL w="12700" cap="flat" cmpd="sng" algn="ctr">
-                      <a:solidFill>
-                        <a:srgbClr val="CCCCCC"/>
-                      </a:solidFill>
-                      <a:prstDash val="solid"/>
-                      <a:round/>
-                      <a:headEnd type="none" w="med" len="med"/>
-                      <a:tailEnd type="none" w="med" len="med"/>
-                    </a:lnL>
-                    <a:lnR w="12700" cap="flat" cmpd="sng" algn="ctr">
-                      <a:solidFill>
-                        <a:srgbClr val="CCCCCC"/>
-                      </a:solidFill>
-                      <a:prstDash val="solid"/>
-                      <a:round/>
-                      <a:headEnd type="none" w="med" len="med"/>
-                      <a:tailEnd type="none" w="med" len="med"/>
-                    </a:lnR>
-                    <a:lnT w="12700" cap="flat" cmpd="sng" algn="ctr">
-                      <a:solidFill>
-                        <a:srgbClr val="CCCCCC"/>
-                      </a:solidFill>
-                      <a:prstDash val="solid"/>
-                      <a:round/>
-                      <a:headEnd type="none" w="med" len="med"/>
-                      <a:tailEnd type="none" w="med" len="med"/>
-                    </a:lnT>
-                    <a:lnB w="12700" cap="flat" cmpd="sng" algn="ctr">
-                      <a:solidFill>
-                        <a:srgbClr val="CCCCCC"/>
-                      </a:solidFill>
-                      <a:prstDash val="solid"/>
-                      <a:round/>
-                      <a:headEnd type="none" w="med" len="med"/>
-                      <a:tailEnd type="none" w="med" len="med"/>
-                    </a:lnB>
-                  </a:tcPr>
-                </a:tc>
-                <a:tc>
-                  <a:txBody>
-                    <a:bodyPr/>
-                    <a:lstStyle/>
-                    <a:p>
-                      <a:pPr algn="ctr" indent="0" marL="0">
-                        <a:buNone/>
-                      </a:pPr>
-                      <a:r>
-                        <a:rPr lang="en-US" sz="1100" dirty="0">
-                          <a:solidFill>
-                            <a:srgbClr val="C62828"/>
-                          </a:solidFill>
-                        </a:rPr>
-                        <a:t>-INR 83,978</a:t>
-                      </a:r>
-                      <a:endParaRPr lang="en-US" sz="1100" dirty="0"/>
-                    </a:p>
-                  </a:txBody>
-                  <a:tcPr marL="91440" marR="91440" marT="45720" marB="45720">
-                    <a:lnL w="12700" cap="flat" cmpd="sng" algn="ctr">
-                      <a:solidFill>
-                        <a:srgbClr val="CCCCCC"/>
-                      </a:solidFill>
-                      <a:prstDash val="solid"/>
-                      <a:round/>
-                      <a:headEnd type="none" w="med" len="med"/>
-                      <a:tailEnd type="none" w="med" len="med"/>
-                    </a:lnL>
-                    <a:lnR w="12700" cap="flat" cmpd="sng" algn="ctr">
-                      <a:solidFill>
-                        <a:srgbClr val="CCCCCC"/>
-                      </a:solidFill>
-                      <a:prstDash val="solid"/>
-                      <a:round/>
-                      <a:headEnd type="none" w="med" len="med"/>
-                      <a:tailEnd type="none" w="med" len="med"/>
-                    </a:lnR>
-                    <a:lnT w="12700" cap="flat" cmpd="sng" algn="ctr">
-                      <a:solidFill>
-                        <a:srgbClr val="CCCCCC"/>
-                      </a:solidFill>
-                      <a:prstDash val="solid"/>
-                      <a:round/>
-                      <a:headEnd type="none" w="med" len="med"/>
-                      <a:tailEnd type="none" w="med" len="med"/>
-                    </a:lnT>
-                    <a:lnB w="12700" cap="flat" cmpd="sng" algn="ctr">
-                      <a:solidFill>
-                        <a:srgbClr val="CCCCCC"/>
-                      </a:solidFill>
-                      <a:prstDash val="solid"/>
-                      <a:round/>
-                      <a:headEnd type="none" w="med" len="med"/>
-                      <a:tailEnd type="none" w="med" len="med"/>
-                    </a:lnB>
-                  </a:tcPr>
-                </a:tc>
-                <a:tc>
-                  <a:txBody>
-                    <a:bodyPr/>
-                    <a:lstStyle/>
-                    <a:p>
-                      <a:pPr algn="ctr" indent="0" marL="0">
-                        <a:buNone/>
-                      </a:pPr>
-                      <a:r>
-                        <a:rPr lang="en-US" sz="1100" dirty="0">
-                          <a:solidFill>
-                            <a:srgbClr val="C62828"/>
-                          </a:solidFill>
-                        </a:rPr>
-                        <a:t>36.3%</a:t>
-                      </a:r>
-                      <a:endParaRPr lang="en-US" sz="1100" dirty="0"/>
-                    </a:p>
-                  </a:txBody>
-                  <a:tcPr marL="91440" marR="91440" marT="45720" marB="45720">
-                    <a:lnL w="12700" cap="flat" cmpd="sng" algn="ctr">
-                      <a:solidFill>
-                        <a:srgbClr val="CCCCCC"/>
-                      </a:solidFill>
-                      <a:prstDash val="solid"/>
-                      <a:round/>
-                      <a:headEnd type="none" w="med" len="med"/>
-                      <a:tailEnd type="none" w="med" len="med"/>
-                    </a:lnL>
-                    <a:lnR w="12700" cap="flat" cmpd="sng" algn="ctr">
-                      <a:solidFill>
-                        <a:srgbClr val="CCCCCC"/>
-                      </a:solidFill>
-                      <a:prstDash val="solid"/>
-                      <a:round/>
-                      <a:headEnd type="none" w="med" len="med"/>
-                      <a:tailEnd type="none" w="med" len="med"/>
-                    </a:lnR>
-                    <a:lnT w="12700" cap="flat" cmpd="sng" algn="ctr">
-                      <a:solidFill>
-                        <a:srgbClr val="CCCCCC"/>
-                      </a:solidFill>
-                      <a:prstDash val="solid"/>
-                      <a:round/>
-                      <a:headEnd type="none" w="med" len="med"/>
-                      <a:tailEnd type="none" w="med" len="med"/>
-                    </a:lnT>
-                    <a:lnB w="12700" cap="flat" cmpd="sng" algn="ctr">
-                      <a:solidFill>
-                        <a:srgbClr val="CCCCCC"/>
-                      </a:solidFill>
-                      <a:prstDash val="solid"/>
-                      <a:round/>
-                      <a:headEnd type="none" w="med" len="med"/>
-                      <a:tailEnd type="none" w="med" len="med"/>
-                    </a:lnB>
-                  </a:tcPr>
-                </a:tc>
-              </a:tr>
-              <a:tr h="355600">
-                <a:tc>
-                  <a:txBody>
-                    <a:bodyPr/>
-                    <a:lstStyle/>
-                    <a:p>
-                      <a:pPr algn="ctr" indent="0" marL="0">
-                        <a:buNone/>
-                      </a:pPr>
-                      <a:r>
-                        <a:rPr lang="en-US" sz="1100" b="1" dirty="0">
-                          <a:solidFill>
-                            <a:srgbClr val="000000"/>
-                          </a:solidFill>
-                        </a:rPr>
-                        <a:t>Rice</a:t>
-                      </a:r>
-                      <a:endParaRPr lang="en-US" sz="1100" dirty="0"/>
-                    </a:p>
-                  </a:txBody>
-                  <a:tcPr marL="91440" marR="91440" marT="45720" marB="45720">
-                    <a:lnL w="12700" cap="flat" cmpd="sng" algn="ctr">
-                      <a:solidFill>
-                        <a:srgbClr val="CCCCCC"/>
-                      </a:solidFill>
-                      <a:prstDash val="solid"/>
-                      <a:round/>
-                      <a:headEnd type="none" w="med" len="med"/>
-                      <a:tailEnd type="none" w="med" len="med"/>
-                    </a:lnL>
-                    <a:lnR w="12700" cap="flat" cmpd="sng" algn="ctr">
-                      <a:solidFill>
-                        <a:srgbClr val="CCCCCC"/>
-                      </a:solidFill>
-                      <a:prstDash val="solid"/>
-                      <a:round/>
-                      <a:headEnd type="none" w="med" len="med"/>
-                      <a:tailEnd type="none" w="med" len="med"/>
-                    </a:lnR>
-                    <a:lnT w="12700" cap="flat" cmpd="sng" algn="ctr">
-                      <a:solidFill>
-                        <a:srgbClr val="CCCCCC"/>
-                      </a:solidFill>
-                      <a:prstDash val="solid"/>
-                      <a:round/>
-                      <a:headEnd type="none" w="med" len="med"/>
-                      <a:tailEnd type="none" w="med" len="med"/>
-                    </a:lnT>
-                    <a:lnB w="12700" cap="flat" cmpd="sng" algn="ctr">
-                      <a:solidFill>
-                        <a:srgbClr val="CCCCCC"/>
-                      </a:solidFill>
-                      <a:prstDash val="solid"/>
-                      <a:round/>
-                      <a:headEnd type="none" w="med" len="med"/>
-                      <a:tailEnd type="none" w="med" len="med"/>
-                    </a:lnB>
-                  </a:tcPr>
-                </a:tc>
-                <a:tc>
-                  <a:txBody>
-                    <a:bodyPr/>
-                    <a:lstStyle/>
-                    <a:p>
-                      <a:pPr algn="ctr" indent="0" marL="0">
-                        <a:buNone/>
-                      </a:pPr>
-                      <a:r>
-                        <a:rPr lang="en-US" sz="1100" dirty="0">
-                          <a:solidFill>
-                            <a:srgbClr val="000000"/>
-                          </a:solidFill>
-                        </a:rPr>
-                        <a:t>690</a:t>
-                      </a:r>
-                      <a:endParaRPr lang="en-US" sz="1100" dirty="0"/>
-                    </a:p>
-                  </a:txBody>
-                  <a:tcPr marL="91440" marR="91440" marT="45720" marB="45720">
-                    <a:lnL w="12700" cap="flat" cmpd="sng" algn="ctr">
-                      <a:solidFill>
-                        <a:srgbClr val="CCCCCC"/>
-                      </a:solidFill>
-                      <a:prstDash val="solid"/>
-                      <a:round/>
-                      <a:headEnd type="none" w="med" len="med"/>
-                      <a:tailEnd type="none" w="med" len="med"/>
-                    </a:lnL>
-                    <a:lnR w="12700" cap="flat" cmpd="sng" algn="ctr">
-                      <a:solidFill>
-                        <a:srgbClr val="CCCCCC"/>
-                      </a:solidFill>
-                      <a:prstDash val="solid"/>
-                      <a:round/>
-                      <a:headEnd type="none" w="med" len="med"/>
-                      <a:tailEnd type="none" w="med" len="med"/>
-                    </a:lnR>
-                    <a:lnT w="12700" cap="flat" cmpd="sng" algn="ctr">
-                      <a:solidFill>
-                        <a:srgbClr val="CCCCCC"/>
-                      </a:solidFill>
-                      <a:prstDash val="solid"/>
-                      <a:round/>
-                      <a:headEnd type="none" w="med" len="med"/>
-                      <a:tailEnd type="none" w="med" len="med"/>
-                    </a:lnT>
-                    <a:lnB w="12700" cap="flat" cmpd="sng" algn="ctr">
-                      <a:solidFill>
-                        <a:srgbClr val="CCCCCC"/>
-                      </a:solidFill>
-                      <a:prstDash val="solid"/>
-                      <a:round/>
-                      <a:headEnd type="none" w="med" len="med"/>
-                      <a:tailEnd type="none" w="med" len="med"/>
-                    </a:lnB>
-                  </a:tcPr>
-                </a:tc>
-                <a:tc>
-                  <a:txBody>
-                    <a:bodyPr/>
-                    <a:lstStyle/>
-                    <a:p>
-                      <a:pPr algn="ctr" indent="0" marL="0">
-                        <a:buNone/>
-                      </a:pPr>
-                      <a:r>
-                        <a:rPr lang="en-US" sz="1100" dirty="0">
-                          <a:solidFill>
-                            <a:srgbClr val="000000"/>
-                          </a:solidFill>
-                        </a:rPr>
-                        <a:t>2.44 t/ha</a:t>
-                      </a:r>
-                      <a:endParaRPr lang="en-US" sz="1100" dirty="0"/>
-                    </a:p>
-                  </a:txBody>
-                  <a:tcPr marL="91440" marR="91440" marT="45720" marB="45720">
-                    <a:lnL w="12700" cap="flat" cmpd="sng" algn="ctr">
-                      <a:solidFill>
-                        <a:srgbClr val="CCCCCC"/>
-                      </a:solidFill>
-                      <a:prstDash val="solid"/>
-                      <a:round/>
-                      <a:headEnd type="none" w="med" len="med"/>
-                      <a:tailEnd type="none" w="med" len="med"/>
-                    </a:lnL>
-                    <a:lnR w="12700" cap="flat" cmpd="sng" algn="ctr">
-                      <a:solidFill>
-                        <a:srgbClr val="CCCCCC"/>
-                      </a:solidFill>
-                      <a:prstDash val="solid"/>
-                      <a:round/>
-                      <a:headEnd type="none" w="med" len="med"/>
-                      <a:tailEnd type="none" w="med" len="med"/>
-                    </a:lnR>
-                    <a:lnT w="12700" cap="flat" cmpd="sng" algn="ctr">
-                      <a:solidFill>
-                        <a:srgbClr val="CCCCCC"/>
-                      </a:solidFill>
-                      <a:prstDash val="solid"/>
-                      <a:round/>
-                      <a:headEnd type="none" w="med" len="med"/>
-                      <a:tailEnd type="none" w="med" len="med"/>
-                    </a:lnT>
-                    <a:lnB w="12700" cap="flat" cmpd="sng" algn="ctr">
-                      <a:solidFill>
-                        <a:srgbClr val="CCCCCC"/>
-                      </a:solidFill>
-                      <a:prstDash val="solid"/>
-                      <a:round/>
-                      <a:headEnd type="none" w="med" len="med"/>
-                      <a:tailEnd type="none" w="med" len="med"/>
-                    </a:lnB>
-                  </a:tcPr>
-                </a:tc>
-                <a:tc>
-                  <a:txBody>
-                    <a:bodyPr/>
-                    <a:lstStyle/>
-                    <a:p>
-                      <a:pPr algn="ctr" indent="0" marL="0">
-                        <a:buNone/>
-                      </a:pPr>
-                      <a:r>
-                        <a:rPr lang="en-US" sz="1100" dirty="0">
-                          <a:solidFill>
-                            <a:srgbClr val="000000"/>
-                          </a:solidFill>
-                        </a:rPr>
-                        <a:t>INR 22,500</a:t>
-                      </a:r>
-                      <a:endParaRPr lang="en-US" sz="1100" dirty="0"/>
-                    </a:p>
-                  </a:txBody>
-                  <a:tcPr marL="91440" marR="91440" marT="45720" marB="45720">
-                    <a:lnL w="12700" cap="flat" cmpd="sng" algn="ctr">
-                      <a:solidFill>
-                        <a:srgbClr val="CCCCCC"/>
-                      </a:solidFill>
-                      <a:prstDash val="solid"/>
-                      <a:round/>
-                      <a:headEnd type="none" w="med" len="med"/>
-                      <a:tailEnd type="none" w="med" len="med"/>
-                    </a:lnL>
-                    <a:lnR w="12700" cap="flat" cmpd="sng" algn="ctr">
-                      <a:solidFill>
-                        <a:srgbClr val="CCCCCC"/>
-                      </a:solidFill>
-                      <a:prstDash val="solid"/>
-                      <a:round/>
-                      <a:headEnd type="none" w="med" len="med"/>
-                      <a:tailEnd type="none" w="med" len="med"/>
-                    </a:lnR>
-                    <a:lnT w="12700" cap="flat" cmpd="sng" algn="ctr">
-                      <a:solidFill>
-                        <a:srgbClr val="CCCCCC"/>
-                      </a:solidFill>
-                      <a:prstDash val="solid"/>
-                      <a:round/>
-                      <a:headEnd type="none" w="med" len="med"/>
-                      <a:tailEnd type="none" w="med" len="med"/>
-                    </a:lnT>
-                    <a:lnB w="12700" cap="flat" cmpd="sng" algn="ctr">
-                      <a:solidFill>
-                        <a:srgbClr val="CCCCCC"/>
-                      </a:solidFill>
-                      <a:prstDash val="solid"/>
-                      <a:round/>
-                      <a:headEnd type="none" w="med" len="med"/>
-                      <a:tailEnd type="none" w="med" len="med"/>
-                    </a:lnB>
-                  </a:tcPr>
-                </a:tc>
-                <a:tc>
-                  <a:txBody>
-                    <a:bodyPr/>
-                    <a:lstStyle/>
-                    <a:p>
-                      <a:pPr algn="ctr" indent="0" marL="0">
-                        <a:buNone/>
-                      </a:pPr>
-                      <a:r>
-                        <a:rPr lang="en-US" sz="1100" dirty="0">
-                          <a:solidFill>
-                            <a:srgbClr val="C62828"/>
-                          </a:solidFill>
-                        </a:rPr>
-                        <a:t>-INR 1,02,214</a:t>
-                      </a:r>
-                      <a:endParaRPr lang="en-US" sz="1100" dirty="0"/>
-                    </a:p>
-                  </a:txBody>
-                  <a:tcPr marL="91440" marR="91440" marT="45720" marB="45720">
-                    <a:lnL w="12700" cap="flat" cmpd="sng" algn="ctr">
-                      <a:solidFill>
-                        <a:srgbClr val="CCCCCC"/>
-                      </a:solidFill>
-                      <a:prstDash val="solid"/>
-                      <a:round/>
-                      <a:headEnd type="none" w="med" len="med"/>
-                      <a:tailEnd type="none" w="med" len="med"/>
-                    </a:lnL>
-                    <a:lnR w="12700" cap="flat" cmpd="sng" algn="ctr">
-                      <a:solidFill>
-                        <a:srgbClr val="CCCCCC"/>
-                      </a:solidFill>
-                      <a:prstDash val="solid"/>
-                      <a:round/>
-                      <a:headEnd type="none" w="med" len="med"/>
-                      <a:tailEnd type="none" w="med" len="med"/>
-                    </a:lnR>
-                    <a:lnT w="12700" cap="flat" cmpd="sng" algn="ctr">
-                      <a:solidFill>
-                        <a:srgbClr val="CCCCCC"/>
-                      </a:solidFill>
-                      <a:prstDash val="solid"/>
-                      <a:round/>
-                      <a:headEnd type="none" w="med" len="med"/>
-                      <a:tailEnd type="none" w="med" len="med"/>
-                    </a:lnT>
-                    <a:lnB w="12700" cap="flat" cmpd="sng" algn="ctr">
-                      <a:solidFill>
-                        <a:srgbClr val="CCCCCC"/>
-                      </a:solidFill>
-                      <a:prstDash val="solid"/>
-                      <a:round/>
-                      <a:headEnd type="none" w="med" len="med"/>
-                      <a:tailEnd type="none" w="med" len="med"/>
-                    </a:lnB>
-                  </a:tcPr>
-                </a:tc>
-                <a:tc>
-                  <a:txBody>
-                    <a:bodyPr/>
-                    <a:lstStyle/>
-                    <a:p>
-                      <a:pPr algn="ctr" indent="0" marL="0">
-                        <a:buNone/>
-                      </a:pPr>
-                      <a:r>
-                        <a:rPr lang="en-US" sz="1100" dirty="0">
-                          <a:solidFill>
-                            <a:srgbClr val="C62828"/>
-                          </a:solidFill>
-                        </a:rPr>
-                        <a:t>33.6%</a:t>
-                      </a:r>
-                      <a:endParaRPr lang="en-US" sz="1100" dirty="0"/>
-                    </a:p>
-                  </a:txBody>
-                  <a:tcPr marL="91440" marR="91440" marT="45720" marB="45720">
-                    <a:lnL w="12700" cap="flat" cmpd="sng" algn="ctr">
-                      <a:solidFill>
-                        <a:srgbClr val="CCCCCC"/>
-                      </a:solidFill>
-                      <a:prstDash val="solid"/>
-                      <a:round/>
-                      <a:headEnd type="none" w="med" len="med"/>
-                      <a:tailEnd type="none" w="med" len="med"/>
-                    </a:lnL>
-                    <a:lnR w="12700" cap="flat" cmpd="sng" algn="ctr">
-                      <a:solidFill>
-                        <a:srgbClr val="CCCCCC"/>
-                      </a:solidFill>
-                      <a:prstDash val="solid"/>
-                      <a:round/>
-                      <a:headEnd type="none" w="med" len="med"/>
-                      <a:tailEnd type="none" w="med" len="med"/>
-                    </a:lnR>
-                    <a:lnT w="12700" cap="flat" cmpd="sng" algn="ctr">
-                      <a:solidFill>
-                        <a:srgbClr val="CCCCCC"/>
-                      </a:solidFill>
-                      <a:prstDash val="solid"/>
-                      <a:round/>
-                      <a:headEnd type="none" w="med" len="med"/>
-                      <a:tailEnd type="none" w="med" len="med"/>
-                    </a:lnT>
-                    <a:lnB w="12700" cap="flat" cmpd="sng" algn="ctr">
-                      <a:solidFill>
-                        <a:srgbClr val="CCCCCC"/>
-                      </a:solidFill>
-                      <a:prstDash val="solid"/>
-                      <a:round/>
-                      <a:headEnd type="none" w="med" len="med"/>
-                      <a:tailEnd type="none" w="med" len="med"/>
-                    </a:lnB>
-                  </a:tcPr>
-                </a:tc>
-              </a:tr>
-              <a:tr h="355600">
-                <a:tc>
-                  <a:txBody>
-                    <a:bodyPr/>
-                    <a:lstStyle/>
-                    <a:p>
-                      <a:pPr algn="ctr" indent="0" marL="0">
-                        <a:buNone/>
-                      </a:pPr>
-                      <a:r>
-                        <a:rPr lang="en-US" sz="1100" b="1" dirty="0">
-                          <a:solidFill>
-                            <a:srgbClr val="000000"/>
-                          </a:solidFill>
-                        </a:rPr>
-                        <a:t>Wheat</a:t>
-                      </a:r>
-                      <a:endParaRPr lang="en-US" sz="1100" dirty="0"/>
-                    </a:p>
-                  </a:txBody>
-                  <a:tcPr marL="91440" marR="91440" marT="45720" marB="45720">
-                    <a:lnL w="12700" cap="flat" cmpd="sng" algn="ctr">
-                      <a:solidFill>
-                        <a:srgbClr val="CCCCCC"/>
-                      </a:solidFill>
-                      <a:prstDash val="solid"/>
-                      <a:round/>
-                      <a:headEnd type="none" w="med" len="med"/>
-                      <a:tailEnd type="none" w="med" len="med"/>
-                    </a:lnL>
-                    <a:lnR w="12700" cap="flat" cmpd="sng" algn="ctr">
-                      <a:solidFill>
-                        <a:srgbClr val="CCCCCC"/>
-                      </a:solidFill>
-                      <a:prstDash val="solid"/>
-                      <a:round/>
-                      <a:headEnd type="none" w="med" len="med"/>
-                      <a:tailEnd type="none" w="med" len="med"/>
-                    </a:lnR>
-                    <a:lnT w="12700" cap="flat" cmpd="sng" algn="ctr">
-                      <a:solidFill>
-                        <a:srgbClr val="CCCCCC"/>
-                      </a:solidFill>
-                      <a:prstDash val="solid"/>
-                      <a:round/>
-                      <a:headEnd type="none" w="med" len="med"/>
-                      <a:tailEnd type="none" w="med" len="med"/>
-                    </a:lnT>
-                    <a:lnB w="12700" cap="flat" cmpd="sng" algn="ctr">
-                      <a:solidFill>
-                        <a:srgbClr val="CCCCCC"/>
-                      </a:solidFill>
-                      <a:prstDash val="solid"/>
-                      <a:round/>
-                      <a:headEnd type="none" w="med" len="med"/>
-                      <a:tailEnd type="none" w="med" len="med"/>
-                    </a:lnB>
-                  </a:tcPr>
-                </a:tc>
-                <a:tc>
-                  <a:txBody>
-                    <a:bodyPr/>
-                    <a:lstStyle/>
-                    <a:p>
-                      <a:pPr algn="ctr" indent="0" marL="0">
-                        <a:buNone/>
-                      </a:pPr>
-                      <a:r>
-                        <a:rPr lang="en-US" sz="1100" dirty="0">
-                          <a:solidFill>
-                            <a:srgbClr val="000000"/>
-                          </a:solidFill>
-                        </a:rPr>
-                        <a:t>614</a:t>
-                      </a:r>
-                      <a:endParaRPr lang="en-US" sz="1100" dirty="0"/>
-                    </a:p>
-                  </a:txBody>
-                  <a:tcPr marL="91440" marR="91440" marT="45720" marB="45720">
-                    <a:lnL w="12700" cap="flat" cmpd="sng" algn="ctr">
-                      <a:solidFill>
-                        <a:srgbClr val="CCCCCC"/>
-                      </a:solidFill>
-                      <a:prstDash val="solid"/>
-                      <a:round/>
-                      <a:headEnd type="none" w="med" len="med"/>
-                      <a:tailEnd type="none" w="med" len="med"/>
-                    </a:lnL>
-                    <a:lnR w="12700" cap="flat" cmpd="sng" algn="ctr">
-                      <a:solidFill>
-                        <a:srgbClr val="CCCCCC"/>
-                      </a:solidFill>
-                      <a:prstDash val="solid"/>
-                      <a:round/>
-                      <a:headEnd type="none" w="med" len="med"/>
-                      <a:tailEnd type="none" w="med" len="med"/>
-                    </a:lnR>
-                    <a:lnT w="12700" cap="flat" cmpd="sng" algn="ctr">
-                      <a:solidFill>
-                        <a:srgbClr val="CCCCCC"/>
-                      </a:solidFill>
-                      <a:prstDash val="solid"/>
-                      <a:round/>
-                      <a:headEnd type="none" w="med" len="med"/>
-                      <a:tailEnd type="none" w="med" len="med"/>
-                    </a:lnT>
-                    <a:lnB w="12700" cap="flat" cmpd="sng" algn="ctr">
-                      <a:solidFill>
-                        <a:srgbClr val="CCCCCC"/>
-                      </a:solidFill>
-                      <a:prstDash val="solid"/>
-                      <a:round/>
-                      <a:headEnd type="none" w="med" len="med"/>
-                      <a:tailEnd type="none" w="med" len="med"/>
-                    </a:lnB>
-                  </a:tcPr>
-                </a:tc>
-                <a:tc>
-                  <a:txBody>
-                    <a:bodyPr/>
-                    <a:lstStyle/>
-                    <a:p>
-                      <a:pPr algn="ctr" indent="0" marL="0">
-                        <a:buNone/>
-                      </a:pPr>
-                      <a:r>
-                        <a:rPr lang="en-US" sz="1100" dirty="0">
-                          <a:solidFill>
-                            <a:srgbClr val="000000"/>
-                          </a:solidFill>
-                        </a:rPr>
-                        <a:t>2.11 t/ha</a:t>
-                      </a:r>
-                      <a:endParaRPr lang="en-US" sz="1100" dirty="0"/>
-                    </a:p>
-                  </a:txBody>
-                  <a:tcPr marL="91440" marR="91440" marT="45720" marB="45720">
-                    <a:lnL w="12700" cap="flat" cmpd="sng" algn="ctr">
-                      <a:solidFill>
-                        <a:srgbClr val="CCCCCC"/>
-                      </a:solidFill>
-                      <a:prstDash val="solid"/>
-                      <a:round/>
-                      <a:headEnd type="none" w="med" len="med"/>
-                      <a:tailEnd type="none" w="med" len="med"/>
-                    </a:lnL>
-                    <a:lnR w="12700" cap="flat" cmpd="sng" algn="ctr">
-                      <a:solidFill>
-                        <a:srgbClr val="CCCCCC"/>
-                      </a:solidFill>
-                      <a:prstDash val="solid"/>
-                      <a:round/>
-                      <a:headEnd type="none" w="med" len="med"/>
-                      <a:tailEnd type="none" w="med" len="med"/>
-                    </a:lnR>
-                    <a:lnT w="12700" cap="flat" cmpd="sng" algn="ctr">
-                      <a:solidFill>
-                        <a:srgbClr val="CCCCCC"/>
-                      </a:solidFill>
-                      <a:prstDash val="solid"/>
-                      <a:round/>
-                      <a:headEnd type="none" w="med" len="med"/>
-                      <a:tailEnd type="none" w="med" len="med"/>
-                    </a:lnT>
-                    <a:lnB w="12700" cap="flat" cmpd="sng" algn="ctr">
-                      <a:solidFill>
-                        <a:srgbClr val="CCCCCC"/>
-                      </a:solidFill>
-                      <a:prstDash val="solid"/>
-                      <a:round/>
-                      <a:headEnd type="none" w="med" len="med"/>
-                      <a:tailEnd type="none" w="med" len="med"/>
-                    </a:lnB>
-                  </a:tcPr>
-                </a:tc>
-                <a:tc>
-                  <a:txBody>
-                    <a:bodyPr/>
-                    <a:lstStyle/>
-                    <a:p>
-                      <a:pPr algn="ctr" indent="0" marL="0">
-                        <a:buNone/>
-                      </a:pPr>
-                      <a:r>
-                        <a:rPr lang="en-US" sz="1100" dirty="0">
-                          <a:solidFill>
-                            <a:srgbClr val="000000"/>
-                          </a:solidFill>
-                        </a:rPr>
-                        <a:t>INR 24,000</a:t>
-                      </a:r>
-                      <a:endParaRPr lang="en-US" sz="1100" dirty="0"/>
-                    </a:p>
-                  </a:txBody>
-                  <a:tcPr marL="91440" marR="91440" marT="45720" marB="45720">
-                    <a:lnL w="12700" cap="flat" cmpd="sng" algn="ctr">
-                      <a:solidFill>
-                        <a:srgbClr val="CCCCCC"/>
-                      </a:solidFill>
-                      <a:prstDash val="solid"/>
-                      <a:round/>
-                      <a:headEnd type="none" w="med" len="med"/>
-                      <a:tailEnd type="none" w="med" len="med"/>
-                    </a:lnL>
-                    <a:lnR w="12700" cap="flat" cmpd="sng" algn="ctr">
-                      <a:solidFill>
-                        <a:srgbClr val="CCCCCC"/>
-                      </a:solidFill>
-                      <a:prstDash val="solid"/>
-                      <a:round/>
-                      <a:headEnd type="none" w="med" len="med"/>
-                      <a:tailEnd type="none" w="med" len="med"/>
-                    </a:lnR>
-                    <a:lnT w="12700" cap="flat" cmpd="sng" algn="ctr">
-                      <a:solidFill>
-                        <a:srgbClr val="CCCCCC"/>
-                      </a:solidFill>
-                      <a:prstDash val="solid"/>
-                      <a:round/>
-                      <a:headEnd type="none" w="med" len="med"/>
-                      <a:tailEnd type="none" w="med" len="med"/>
-                    </a:lnT>
-                    <a:lnB w="12700" cap="flat" cmpd="sng" algn="ctr">
-                      <a:solidFill>
-                        <a:srgbClr val="CCCCCC"/>
-                      </a:solidFill>
-                      <a:prstDash val="solid"/>
-                      <a:round/>
-                      <a:headEnd type="none" w="med" len="med"/>
-                      <a:tailEnd type="none" w="med" len="med"/>
-                    </a:lnB>
-                  </a:tcPr>
-                </a:tc>
-                <a:tc>
-                  <a:txBody>
-                    <a:bodyPr/>
-                    <a:lstStyle/>
-                    <a:p>
-                      <a:pPr algn="ctr" indent="0" marL="0">
-                        <a:buNone/>
-                      </a:pPr>
-                      <a:r>
-                        <a:rPr lang="en-US" sz="1100" b="1" dirty="0">
-                          <a:solidFill>
-                            <a:srgbClr val="C62828"/>
-                          </a:solidFill>
-                        </a:rPr>
-                        <a:t>-INR 1,23,398</a:t>
-                      </a:r>
-                      <a:endParaRPr lang="en-US" sz="1100" dirty="0"/>
-                    </a:p>
-                  </a:txBody>
-                  <a:tcPr marL="91440" marR="91440" marT="45720" marB="45720">
-                    <a:lnL w="12700" cap="flat" cmpd="sng" algn="ctr">
-                      <a:solidFill>
-                        <a:srgbClr val="CCCCCC"/>
-                      </a:solidFill>
-                      <a:prstDash val="solid"/>
-                      <a:round/>
-                      <a:headEnd type="none" w="med" len="med"/>
-                      <a:tailEnd type="none" w="med" len="med"/>
-                    </a:lnL>
-                    <a:lnR w="12700" cap="flat" cmpd="sng" algn="ctr">
-                      <a:solidFill>
-                        <a:srgbClr val="CCCCCC"/>
-                      </a:solidFill>
-                      <a:prstDash val="solid"/>
-                      <a:round/>
-                      <a:headEnd type="none" w="med" len="med"/>
-                      <a:tailEnd type="none" w="med" len="med"/>
-                    </a:lnR>
-                    <a:lnT w="12700" cap="flat" cmpd="sng" algn="ctr">
-                      <a:solidFill>
-                        <a:srgbClr val="CCCCCC"/>
-                      </a:solidFill>
-                      <a:prstDash val="solid"/>
-                      <a:round/>
-                      <a:headEnd type="none" w="med" len="med"/>
-                      <a:tailEnd type="none" w="med" len="med"/>
-                    </a:lnT>
-                    <a:lnB w="12700" cap="flat" cmpd="sng" algn="ctr">
-                      <a:solidFill>
-                        <a:srgbClr val="CCCCCC"/>
-                      </a:solidFill>
-                      <a:prstDash val="solid"/>
-                      <a:round/>
-                      <a:headEnd type="none" w="med" len="med"/>
-                      <a:tailEnd type="none" w="med" len="med"/>
-                    </a:lnB>
-                  </a:tcPr>
-                </a:tc>
-                <a:tc>
-                  <a:txBody>
-                    <a:bodyPr/>
-                    <a:lstStyle/>
-                    <a:p>
-                      <a:pPr algn="ctr" indent="0" marL="0">
-                        <a:buNone/>
-                      </a:pPr>
-                      <a:r>
-                        <a:rPr lang="en-US" sz="1100" b="1" dirty="0">
-                          <a:solidFill>
-                            <a:srgbClr val="C62828"/>
-                          </a:solidFill>
-                        </a:rPr>
-                        <a:t>25.9%</a:t>
-                      </a:r>
-                      <a:endParaRPr lang="en-US" sz="1100" dirty="0"/>
-                    </a:p>
-                  </a:txBody>
-                  <a:tcPr marL="91440" marR="91440" marT="45720" marB="45720">
-                    <a:lnL w="12700" cap="flat" cmpd="sng" algn="ctr">
-                      <a:solidFill>
-                        <a:srgbClr val="CCCCCC"/>
-                      </a:solidFill>
-                      <a:prstDash val="solid"/>
-                      <a:round/>
-                      <a:headEnd type="none" w="med" len="med"/>
-                      <a:tailEnd type="none" w="med" len="med"/>
-                    </a:lnL>
-                    <a:lnR w="12700" cap="flat" cmpd="sng" algn="ctr">
-                      <a:solidFill>
-                        <a:srgbClr val="CCCCCC"/>
-                      </a:solidFill>
-                      <a:prstDash val="solid"/>
-                      <a:round/>
-                      <a:headEnd type="none" w="med" len="med"/>
-                      <a:tailEnd type="none" w="med" len="med"/>
-                    </a:lnR>
-                    <a:lnT w="12700" cap="flat" cmpd="sng" algn="ctr">
-                      <a:solidFill>
-                        <a:srgbClr val="CCCCCC"/>
-                      </a:solidFill>
-                      <a:prstDash val="solid"/>
-                      <a:round/>
-                      <a:headEnd type="none" w="med" len="med"/>
-                      <a:tailEnd type="none" w="med" len="med"/>
-                    </a:lnT>
-                    <a:lnB w="12700" cap="flat" cmpd="sng" algn="ctr">
-                      <a:solidFill>
-                        <a:srgbClr val="CCCCCC"/>
-                      </a:solidFill>
-                      <a:prstDash val="solid"/>
-                      <a:round/>
-                      <a:headEnd type="none" w="med" len="med"/>
-                      <a:tailEnd type="none" w="med" len="med"/>
-                    </a:lnB>
-                  </a:tcPr>
-                </a:tc>
-              </a:tr>
-            </a:tbl>
-          </a:graphicData>
-        </a:graphic>
-      </p:graphicFrame>
-      <p:sp>
-        <p:nvSpPr>
-          <p:cNvPr id="6" name="Text 3"/>
+      <p:pic>
+        <p:nvPicPr>
+          <p:cNvPr id="5" name="Image 0" descr="C:/Users/ocotp/.gemini/antigravity/brain/2b64254e-8329-498c-9b37-019e1b1a9e41/.user_uploaded/media_1788676491584.png">    </p:cNvPr>
+          <p:cNvPicPr>
+            <a:picLocks noChangeAspect="1"/>
+          </p:cNvPicPr>
+          <p:nvPr/>
+        </p:nvPicPr>
+        <p:blipFill>
+          <a:blip r:embed="rId1"/>
+          <a:stretch>
+            <a:fillRect/>
+          </a:stretch>
+        </p:blipFill>
+        <p:spPr>
+          <a:xfrm>
+            <a:off x="731520" y="1005840"/>
+            <a:ext cx="6583680" cy="3200400"/>
+          </a:xfrm>
+          <a:prstGeom prst="rect">
+            <a:avLst/>
+          </a:prstGeom>
+        </p:spPr>
+      </p:pic>
+      <p:sp>
+        <p:nvSpPr>
+          <p:cNvPr id="6" name="Shape 3"/>
           <p:cNvSpPr/>
           <p:nvPr/>
         </p:nvSpPr>
         <p:spPr>
           <a:xfrm>
-            <a:off x="731520" y="4663440"/>
-            <a:ext cx="10698480" cy="1828800"/>
+            <a:off x="7498080" y="1005840"/>
+            <a:ext cx="3931920" cy="5303520"/>
+          </a:xfrm>
+          <a:prstGeom prst="roundRect">
+            <a:avLst/>
+          </a:prstGeom>
+          <a:solidFill>
+            <a:srgbClr val="FFFFFF"/>
+          </a:solidFill>
+          <a:ln w="12700">
+            <a:solidFill>
+              <a:srgbClr val="B0BEC5"/>
+            </a:solidFill>
+            <a:prstDash val="solid"/>
+          </a:ln>
+        </p:spPr>
+      </p:sp>
+      <p:sp>
+        <p:nvSpPr>
+          <p:cNvPr id="7" name="Text 4"/>
+          <p:cNvSpPr/>
+          <p:nvPr/>
+        </p:nvSpPr>
+        <p:spPr>
+          <a:xfrm>
+            <a:off x="7635240" y="1143000"/>
+            <a:ext cx="3657600" cy="5029200"/>
           </a:xfrm>
           <a:prstGeom prst="rect">
             <a:avLst/>
@@ -15708,25 +13326,161 @@
               <a:buNone/>
             </a:pPr>
             <a:r>
-              <a:rPr lang="en-US" sz="1350" b="1" dirty="0">
+              <a:rPr lang="en-US" sz="1400" b="1" dirty="0">
                 <a:solidFill>
                   <a:srgbClr val="003366"/>
                 </a:solidFill>
               </a:rPr>
-              <a:t>The Cereal Squeeze Phenomenon:
+              <a:t>Dashboard &amp; Regional Insights:
 </a:t>
             </a:r>
             <a:pPr indent="0" marL="0">
               <a:buNone/>
             </a:pPr>
             <a:r>
+              <a:rPr lang="en-US" sz="1250" b="1" dirty="0">
+                <a:solidFill>
+                  <a:srgbClr val="2E7D32"/>
+                </a:solidFill>
+              </a:rPr>
+              <a:t>• Top KPI Summary:
+</a:t>
+            </a:r>
+            <a:pPr indent="0" marL="0">
+              <a:buNone/>
+            </a:pPr>
+            <a:r>
+              <a:rPr lang="en-US" sz="1150" dirty="0">
+                <a:solidFill>
+                  <a:srgbClr val="222222"/>
+                </a:solidFill>
+              </a:rPr>
+              <a:t>  - Total Sector Revenue: ₹255.14 Crores
+  - Overall Farm Solvency Rate: 50.8%
+  - Average Water Productivity: 5.39 t/1000m³
+</a:t>
+            </a:r>
+            <a:pPr indent="0" marL="0">
+              <a:buNone/>
+            </a:pPr>
+            <a:r>
+              <a:rPr lang="en-US" sz="1250" b="1" dirty="0">
+                <a:solidFill>
+                  <a:srgbClr val="006699"/>
+                </a:solidFill>
+              </a:rPr>
+              <a:t>• Figure 3A (State vs Season Matrix):
+</a:t>
+            </a:r>
+            <a:pPr indent="0" marL="0">
+              <a:buNone/>
+            </a:pPr>
+            <a:r>
+              <a:rPr lang="en-US" sz="1100" dirty="0">
+                <a:solidFill>
+                  <a:srgbClr val="222222"/>
+                </a:solidFill>
+              </a:rPr>
+              <a:t>  - Kharif is positive in every state (Telangana ₹26.4K/ha, Karnataka ₹24.5K/ha, Gujarat ₹23.5K/ha).
+  - Zaid summer losses hit Andhra Pradesh (-₹8.5K/ha), Gujarat (-₹7.5K/ha), and Telangana (-₹6.3K/ha) hardest.
+  - Punjab (+₹6.4K/ha) and Karnataka (+₹4.9K/ha) stay positive in summer due to robust tubewell/canal networks.
+</a:t>
+            </a:r>
+            <a:pPr indent="0" marL="0">
+              <a:buNone/>
+            </a:pPr>
+            <a:r>
+              <a:rPr lang="en-US" sz="1250" b="1" dirty="0">
+                <a:solidFill>
+                  <a:srgbClr val="006699"/>
+                </a:solidFill>
+              </a:rPr>
+              <a:t>• Figure 3B (Irrigation Impact):
+</a:t>
+            </a:r>
+            <a:pPr indent="0" marL="0">
+              <a:buNone/>
+            </a:pPr>
+            <a:r>
+              <a:rPr lang="en-US" sz="1100" dirty="0">
+                <a:solidFill>
+                  <a:srgbClr val="222222"/>
+                </a:solidFill>
+              </a:rPr>
+              <a:t>  - Drip delivers ₹25,600/ha profit vs Flood at ₹8,800/ha (nearly 3x higher).</a:t>
+            </a:r>
+            <a:endParaRPr lang="en-US" sz="1400" dirty="0"/>
+          </a:p>
+        </p:txBody>
+      </p:sp>
+      <p:sp>
+        <p:nvSpPr>
+          <p:cNvPr id="8" name="Shape 5"/>
+          <p:cNvSpPr/>
+          <p:nvPr/>
+        </p:nvSpPr>
+        <p:spPr>
+          <a:xfrm>
+            <a:off x="731520" y="4389120"/>
+            <a:ext cx="6583680" cy="1920240"/>
+          </a:xfrm>
+          <a:prstGeom prst="rect">
+            <a:avLst/>
+          </a:prstGeom>
+          <a:solidFill>
+            <a:srgbClr val="FFFFFF"/>
+          </a:solidFill>
+          <a:ln w="12700">
+            <a:solidFill>
+              <a:srgbClr val="CCCCCC"/>
+            </a:solidFill>
+            <a:prstDash val="solid"/>
+          </a:ln>
+        </p:spPr>
+      </p:sp>
+      <p:sp>
+        <p:nvSpPr>
+          <p:cNvPr id="9" name="Text 6"/>
+          <p:cNvSpPr/>
+          <p:nvPr/>
+        </p:nvSpPr>
+        <p:spPr>
+          <a:xfrm>
+            <a:off x="914400" y="4480560"/>
+            <a:ext cx="6217920" cy="1737360"/>
+          </a:xfrm>
+          <a:prstGeom prst="rect">
+            <a:avLst/>
+          </a:prstGeom>
+          <a:noFill/>
+          <a:ln/>
+        </p:spPr>
+        <p:txBody>
+          <a:bodyPr wrap="square" rtlCol="0" anchor="ctr"/>
+          <a:lstStyle/>
+          <a:p>
+            <a:pPr indent="0" marL="0">
+              <a:buNone/>
+            </a:pPr>
+            <a:r>
+              <a:rPr lang="en-US" sz="1300" b="1" dirty="0">
+                <a:solidFill>
+                  <a:srgbClr val="003366"/>
+                </a:solidFill>
+              </a:rPr>
+              <a:t>Core Takeaway from Dashboard:
+</a:t>
+            </a:r>
+            <a:pPr indent="0" marL="0">
+              <a:buNone/>
+            </a:pPr>
+            <a:r>
               <a:rPr lang="en-US" sz="1200" dirty="0">
                 <a:solidFill>
                   <a:srgbClr val="222222"/>
                 </a:solidFill>
               </a:rPr>
-              <a:t>• Staple foodgrains (Wheat, Rice, Maize) face a severe margin squeeze: high fixed irrigation and fertilizer costs exceed the realized market value, leading to low solvency (25.9%–36.3%).
-</a:t>
+              <a:t>Agricultural viability is determined by the intersection of </a:t>
             </a:r>
             <a:pPr indent="0" marL="0">
               <a:buNone/>
@@ -15737,9 +13491,20 @@
                   <a:srgbClr val="222222"/>
                 </a:solidFill>
               </a:rPr>
-              <a:t>• Cash crops (Sugarcane, Chilli, Cotton) provide the financial backbone of farmer viability, proving that crop selection and market price alignment dominate pure tonnage.</a:t>
-            </a:r>
-            <a:endParaRPr lang="en-US" sz="1350" dirty="0"/>
+              <a:t>Season x Irrigation Method x State Infrastructure. </a:t>
+            </a:r>
+            <a:pPr indent="0" marL="0">
+              <a:buNone/>
+            </a:pPr>
+            <a:r>
+              <a:rPr lang="en-US" sz="1200" dirty="0">
+                <a:solidFill>
+                  <a:srgbClr val="222222"/>
+                </a:solidFill>
+              </a:rPr>
+              <a:t>Farms with modern drip irrigation in irrigated states maintain solvency even during hot summer cycles, while traditional flood-irrigated farms suffer heavy financial losses.</a:t>
+            </a:r>
+            <a:endParaRPr lang="en-US" sz="1300" dirty="0"/>
           </a:p>
         </p:txBody>
       </p:sp>
